--- a/FrontRow-Presentation.pptx
+++ b/FrontRow-Presentation.pptx
@@ -4,6 +4,9 @@
   <p:sldMasterIdLst>
     <p:sldMasterId id="2147483648" r:id="rId1"/>
   </p:sldMasterIdLst>
+  <p:notesMasterIdLst>
+    <p:notesMasterId r:id="rId14"/>
+  </p:notesMasterIdLst>
   <p:sldIdLst>
     <p:sldId id="256" r:id="rId2"/>
     <p:sldId id="257" r:id="rId3"/>
@@ -18,10 +21,7 @@
     <p:sldId id="266" r:id="rId12"/>
     <p:sldId id="267" r:id="rId13"/>
   </p:sldIdLst>
-  <p:notesMasterIdLst>
-    <p:notesMasterId r:id="rId14"/>
-  </p:notesMasterIdLst>
-  <p:sldSz cx="9144000" cy="5143500"/>
+  <p:sldSz cx="9144000" cy="5143500" type="screen16x9"/>
   <p:notesSz cx="5143500" cy="9144000"/>
   <p:defaultTextStyle>
     <a:lvl1pPr marL="0" algn="l" defTabSz="914400" rtl="0" eaLnBrk="1" latinLnBrk="0" hangingPunct="1">
@@ -115,6 +115,11 @@
       </a:defRPr>
     </a:lvl9pPr>
   </p:defaultTextStyle>
+  <p:extLst>
+    <p:ext uri="{EFAFB233-063F-42B5-8137-9DF3F51BA10A}">
+      <p15:sldGuideLst xmlns:p15="http://schemas.microsoft.com/office/powerpoint/2012/main"/>
+    </p:ext>
+  </p:extLst>
 </p:presentation>
 </file>
 
@@ -140,234 +145,10 @@
           <a:chExt cx="0" cy="0"/>
         </a:xfrm>
       </p:grpSpPr>
-      <p:sp>
-        <p:nvSpPr>
-          <p:cNvPr id="2" name="Header Placeholder 1"/>
-          <p:cNvSpPr>
-            <a:spLocks noGrp="1"/>
-          </p:cNvSpPr>
-          <p:nvPr>
-            <p:ph type="hdr" sz="quarter"/>
-          </p:nvPr>
-        </p:nvSpPr>
-        <p:spPr>
-          <a:xfrm>
-            <a:off x="0" y="0"/>
-            <a:ext cx="2971800" cy="458788"/>
-          </a:xfrm>
-          <a:prstGeom prst="rect">
-            <a:avLst/>
-          </a:prstGeom>
-        </p:spPr>
-        <p:txBody>
-          <a:bodyPr vert="horz" lIns="91440" tIns="45720" rIns="91440" bIns="45720" rtlCol="0"/>
-          <a:lstStyle>
-            <a:lvl1pPr algn="l">
-              <a:defRPr sz="1200"/>
-            </a:lvl1pPr>
-          </a:lstStyle>
-          <a:p>
-            <a:endParaRPr lang="en-US"/>
-          </a:p>
-        </p:txBody>
-      </p:sp>
-      <p:sp>
-        <p:nvSpPr>
-          <p:cNvPr id="3" name="Date Placeholder 2"/>
-          <p:cNvSpPr>
-            <a:spLocks noGrp="1"/>
-          </p:cNvSpPr>
-          <p:nvPr>
-            <p:ph type="dt" idx="1"/>
-          </p:nvPr>
-        </p:nvSpPr>
-        <p:spPr>
-          <a:xfrm>
-            <a:off x="3884613" y="0"/>
-            <a:ext cx="2971800" cy="458788"/>
-          </a:xfrm>
-          <a:prstGeom prst="rect">
-            <a:avLst/>
-          </a:prstGeom>
-        </p:spPr>
-        <p:txBody>
-          <a:bodyPr vert="horz" lIns="91440" tIns="45720" rIns="91440" bIns="45720" rtlCol="0"/>
-          <a:lstStyle>
-            <a:lvl1pPr algn="r">
-              <a:defRPr sz="1200"/>
-            </a:lvl1pPr>
-          </a:lstStyle>
-          <a:p>
-            <a:fld id="{5282F153-3F37-0F45-9E97-73ACFA13230C}" type="datetimeFigureOut">
-              <a:rPr lang="en-US"/>
-              <a:t>7/23/19</a:t>
-            </a:fld>
-            <a:endParaRPr lang="en-US"/>
-          </a:p>
-        </p:txBody>
-      </p:sp>
-      <p:sp>
-        <p:nvSpPr>
-          <p:cNvPr id="4" name="Slide Image Placeholder 3"/>
-          <p:cNvSpPr>
-            <a:spLocks noGrp="1" noRot="1" noChangeAspect="1"/>
-          </p:cNvSpPr>
-          <p:nvPr>
-            <p:ph type="sldImg" idx="2"/>
-          </p:nvPr>
-        </p:nvSpPr>
-        <p:spPr>
-          <a:xfrm>
-            <a:off x="685800" y="1143000"/>
-            <a:ext cx="5486400" cy="3086100"/>
-          </a:xfrm>
-          <a:prstGeom prst="rect">
-            <a:avLst/>
-          </a:prstGeom>
-          <a:noFill/>
-          <a:ln w="12700">
-            <a:solidFill>
-              <a:prstClr val="black"/>
-            </a:solidFill>
-          </a:ln>
-        </p:spPr>
-        <p:txBody>
-          <a:bodyPr vert="horz" lIns="91440" tIns="45720" rIns="91440" bIns="45720" rtlCol="0" anchor="ctr"/>
-          <a:lstStyle/>
-          <a:p>
-            <a:endParaRPr lang="en-US"/>
-          </a:p>
-        </p:txBody>
-      </p:sp>
-      <p:sp>
-        <p:nvSpPr>
-          <p:cNvPr id="5" name="Notes Placeholder 4"/>
-          <p:cNvSpPr>
-            <a:spLocks noGrp="1"/>
-          </p:cNvSpPr>
-          <p:nvPr>
-            <p:ph type="body" sz="quarter" idx="3"/>
-          </p:nvPr>
-        </p:nvSpPr>
-        <p:spPr>
-          <a:xfrm>
-            <a:off x="685800" y="4400550"/>
-            <a:ext cx="5486400" cy="3600450"/>
-          </a:xfrm>
-          <a:prstGeom prst="rect">
-            <a:avLst/>
-          </a:prstGeom>
-        </p:spPr>
-        <p:txBody>
-          <a:bodyPr vert="horz" lIns="91440" tIns="45720" rIns="91440" bIns="45720" rtlCol="0"/>
-          <a:lstStyle/>
-          <a:p>
-            <a:pPr lvl="0"/>
-            <a:r>
-              <a:rPr lang="en-US"/>
-              <a:t>Click to edit Master text styles</a:t>
-            </a:r>
-          </a:p>
-          <a:p>
-            <a:pPr lvl="1"/>
-            <a:r>
-              <a:rPr lang="en-US"/>
-              <a:t>Second level</a:t>
-            </a:r>
-          </a:p>
-          <a:p>
-            <a:pPr lvl="2"/>
-            <a:r>
-              <a:rPr lang="en-US"/>
-              <a:t>Third level</a:t>
-            </a:r>
-          </a:p>
-          <a:p>
-            <a:pPr lvl="3"/>
-            <a:r>
-              <a:rPr lang="en-US"/>
-              <a:t>Fourth level</a:t>
-            </a:r>
-          </a:p>
-          <a:p>
-            <a:pPr lvl="4"/>
-            <a:r>
-              <a:rPr lang="en-US"/>
-              <a:t>Fifth level</a:t>
-            </a:r>
-          </a:p>
-        </p:txBody>
-      </p:sp>
-      <p:sp>
-        <p:nvSpPr>
-          <p:cNvPr id="6" name="Footer Placeholder 5"/>
-          <p:cNvSpPr>
-            <a:spLocks noGrp="1"/>
-          </p:cNvSpPr>
-          <p:nvPr>
-            <p:ph type="ftr" sz="quarter" idx="4"/>
-          </p:nvPr>
-        </p:nvSpPr>
-        <p:spPr>
-          <a:xfrm>
-            <a:off x="0" y="8685213"/>
-            <a:ext cx="2971800" cy="458787"/>
-          </a:xfrm>
-          <a:prstGeom prst="rect">
-            <a:avLst/>
-          </a:prstGeom>
-        </p:spPr>
-        <p:txBody>
-          <a:bodyPr vert="horz" lIns="91440" tIns="45720" rIns="91440" bIns="45720" rtlCol="0" anchor="b"/>
-          <a:lstStyle>
-            <a:lvl1pPr algn="l">
-              <a:defRPr sz="1200"/>
-            </a:lvl1pPr>
-          </a:lstStyle>
-          <a:p>
-            <a:endParaRPr lang="en-US"/>
-          </a:p>
-        </p:txBody>
-      </p:sp>
-      <p:sp>
-        <p:nvSpPr>
-          <p:cNvPr id="7" name="Slide Number Placeholder 6"/>
-          <p:cNvSpPr>
-            <a:spLocks noGrp="1"/>
-          </p:cNvSpPr>
-          <p:nvPr>
-            <p:ph type="sldNum" sz="quarter" idx="5"/>
-          </p:nvPr>
-        </p:nvSpPr>
-        <p:spPr>
-          <a:xfrm>
-            <a:off x="3884613" y="8685213"/>
-            <a:ext cx="2971800" cy="458787"/>
-          </a:xfrm>
-          <a:prstGeom prst="rect">
-            <a:avLst/>
-          </a:prstGeom>
-        </p:spPr>
-        <p:txBody>
-          <a:bodyPr vert="horz" lIns="91440" tIns="45720" rIns="91440" bIns="45720" rtlCol="0" anchor="b"/>
-          <a:lstStyle>
-            <a:lvl1pPr algn="r">
-              <a:defRPr sz="1200"/>
-            </a:lvl1pPr>
-          </a:lstStyle>
-          <a:p>
-            <a:fld id="{CE5E9CC1-C706-0F49-92D6-E571CC5EEA8F}" type="slidenum">
-              <a:rPr lang="en-US"/>
-              <a:t>‹#›</a:t>
-            </a:fld>
-            <a:endParaRPr lang="en-US"/>
-          </a:p>
-        </p:txBody>
-      </p:sp>
     </p:spTree>
     <p:extLst>
       <p:ext uri="{BB962C8B-B14F-4D97-AF65-F5344CB8AC3E}">
-        <p14:creationId xmlns:p14="http://schemas.microsoft.com/office/powerpoint/2010/main" val="1024086991"/>
+        <p14:creationId xmlns:p14="http://schemas.microsoft.com/office/powerpoint/2010/main" val="2984908180"/>
       </p:ext>
     </p:extLst>
   </p:cSld>
@@ -511,10 +292,6 @@
           <a:bodyPr/>
           <a:lstStyle/>
           <a:p>
-            <a:r>
-              <a:rPr lang="en-US" dirty="0"/>
-              <a:t/>
-            </a:r>
             <a:endParaRPr lang="en-US" dirty="0"/>
           </a:p>
         </p:txBody>
@@ -599,10 +376,6 @@
           <a:bodyPr/>
           <a:lstStyle/>
           <a:p>
-            <a:r>
-              <a:rPr lang="en-US" dirty="0"/>
-              <a:t/>
-            </a:r>
             <a:endParaRPr lang="en-US" dirty="0"/>
           </a:p>
         </p:txBody>
@@ -687,10 +460,6 @@
           <a:bodyPr/>
           <a:lstStyle/>
           <a:p>
-            <a:r>
-              <a:rPr lang="en-US" dirty="0"/>
-              <a:t/>
-            </a:r>
             <a:endParaRPr lang="en-US" dirty="0"/>
           </a:p>
         </p:txBody>
@@ -775,10 +544,6 @@
           <a:bodyPr/>
           <a:lstStyle/>
           <a:p>
-            <a:r>
-              <a:rPr lang="en-US" dirty="0"/>
-              <a:t/>
-            </a:r>
             <a:endParaRPr lang="en-US" dirty="0"/>
           </a:p>
         </p:txBody>
@@ -863,10 +628,6 @@
           <a:bodyPr/>
           <a:lstStyle/>
           <a:p>
-            <a:r>
-              <a:rPr lang="en-US" dirty="0"/>
-              <a:t/>
-            </a:r>
             <a:endParaRPr lang="en-US" dirty="0"/>
           </a:p>
         </p:txBody>
@@ -951,10 +712,6 @@
           <a:bodyPr/>
           <a:lstStyle/>
           <a:p>
-            <a:r>
-              <a:rPr lang="en-US" dirty="0"/>
-              <a:t/>
-            </a:r>
             <a:endParaRPr lang="en-US" dirty="0"/>
           </a:p>
         </p:txBody>
@@ -1039,10 +796,6 @@
           <a:bodyPr/>
           <a:lstStyle/>
           <a:p>
-            <a:r>
-              <a:rPr lang="en-US" dirty="0"/>
-              <a:t/>
-            </a:r>
             <a:endParaRPr lang="en-US" dirty="0"/>
           </a:p>
         </p:txBody>
@@ -1127,10 +880,6 @@
           <a:bodyPr/>
           <a:lstStyle/>
           <a:p>
-            <a:r>
-              <a:rPr lang="en-US" dirty="0"/>
-              <a:t/>
-            </a:r>
             <a:endParaRPr lang="en-US" dirty="0"/>
           </a:p>
         </p:txBody>
@@ -1215,10 +964,6 @@
           <a:bodyPr/>
           <a:lstStyle/>
           <a:p>
-            <a:r>
-              <a:rPr lang="en-US" dirty="0"/>
-              <a:t/>
-            </a:r>
             <a:endParaRPr lang="en-US" dirty="0"/>
           </a:p>
         </p:txBody>
@@ -1303,10 +1048,6 @@
           <a:bodyPr/>
           <a:lstStyle/>
           <a:p>
-            <a:r>
-              <a:rPr lang="en-US" dirty="0"/>
-              <a:t/>
-            </a:r>
             <a:endParaRPr lang="en-US" dirty="0"/>
           </a:p>
         </p:txBody>
@@ -1391,10 +1132,6 @@
           <a:bodyPr/>
           <a:lstStyle/>
           <a:p>
-            <a:r>
-              <a:rPr lang="en-US" dirty="0"/>
-              <a:t/>
-            </a:r>
             <a:endParaRPr lang="en-US" dirty="0"/>
           </a:p>
         </p:txBody>
@@ -1479,10 +1216,6 @@
           <a:bodyPr/>
           <a:lstStyle/>
           <a:p>
-            <a:r>
-              <a:rPr lang="en-US" dirty="0"/>
-              <a:t/>
-            </a:r>
             <a:endParaRPr lang="en-US" dirty="0"/>
           </a:p>
         </p:txBody>
@@ -1556,6 +1289,11 @@
 <file path=ppt/slideMasters/slideMaster1.xml><?xml version="1.0" encoding="utf-8"?>
 <p:sldMaster xmlns:a="http://schemas.openxmlformats.org/drawingml/2006/main" xmlns:r="http://schemas.openxmlformats.org/officeDocument/2006/relationships" xmlns:p="http://schemas.openxmlformats.org/presentationml/2006/main">
   <p:cSld>
+    <p:bg>
+      <p:bgRef idx="1001">
+        <a:schemeClr val="bg1"/>
+      </p:bgRef>
+    </p:bg>
     <p:spTree>
       <p:nvGrpSpPr>
         <p:cNvPr id="1" name=""/>
@@ -1838,6 +1576,7 @@
         <a:solidFill>
           <a:srgbClr val="0D0B1E"/>
         </a:solidFill>
+        <a:effectLst/>
       </p:bgPr>
     </p:bg>
     <p:spTree>
@@ -1915,7 +1654,7 @@
           <a:bodyPr wrap="square" lIns="0" tIns="0" rIns="0" bIns="0" rtlCol="0" anchor="ctr"/>
           <a:lstStyle/>
           <a:p>
-            <a:pPr algn="ctr" indent="0" marL="0">
+            <a:pPr marL="0" indent="0" algn="ctr">
               <a:buNone/>
             </a:pPr>
             <a:r>
@@ -1929,9 +1668,6 @@
               </a:rPr>
               <a:t>Front</a:t>
             </a:r>
-            <a:pPr algn="ctr" indent="0" marL="0">
-              <a:buNone/>
-            </a:pPr>
             <a:r>
               <a:rPr lang="en-US" sz="6600" b="1" i="1" dirty="0">
                 <a:solidFill>
@@ -1968,7 +1704,7 @@
           <a:bodyPr wrap="square" lIns="0" tIns="0" rIns="0" bIns="0" rtlCol="0" anchor="ctr"/>
           <a:lstStyle/>
           <a:p>
-            <a:pPr algn="ctr" indent="0" marL="0">
+            <a:pPr marL="0" indent="0" algn="ctr">
               <a:buNone/>
             </a:pPr>
             <a:r>
@@ -2007,7 +1743,7 @@
           <a:bodyPr wrap="square" lIns="0" tIns="0" rIns="0" bIns="0" rtlCol="0" anchor="ctr"/>
           <a:lstStyle/>
           <a:p>
-            <a:pPr algn="ctr" indent="0" marL="0">
+            <a:pPr marL="0" indent="0" algn="ctr">
               <a:buNone/>
             </a:pPr>
             <a:r>
@@ -2024,7 +1760,7 @@
             <a:endParaRPr lang="en-US" sz="1300" dirty="0"/>
           </a:p>
           <a:p>
-            <a:pPr algn="ctr" indent="0" marL="0">
+            <a:pPr marL="0" indent="0" algn="ctr">
               <a:buNone/>
             </a:pPr>
             <a:r>
@@ -2086,7 +1822,7 @@
           <a:bodyPr wrap="square" lIns="0" tIns="0" rIns="0" bIns="0" rtlCol="0" anchor="ctr"/>
           <a:lstStyle/>
           <a:p>
-            <a:pPr algn="ctr" indent="0" marL="0">
+            <a:pPr marL="0" indent="0" algn="ctr">
               <a:buNone/>
             </a:pPr>
             <a:r>
@@ -2098,7 +1834,7 @@
                 <a:ea typeface="Calibri" pitchFamily="34" charset="-122"/>
                 <a:cs typeface="Calibri" pitchFamily="34" charset="-120"/>
               </a:rPr>
-              <a:t>[Presenter name]   ·   June 2026</a:t>
+              <a:t>Berbecar David</a:t>
             </a:r>
             <a:endParaRPr lang="en-US" sz="1200" dirty="0"/>
           </a:p>
@@ -2120,6 +1856,7 @@
         <a:solidFill>
           <a:srgbClr val="0D0B1E"/>
         </a:solidFill>
+        <a:effectLst/>
       </p:bgPr>
     </p:bg>
     <p:spTree>
@@ -2157,11 +1894,11 @@
           <a:bodyPr wrap="square" lIns="0" tIns="0" rIns="0" bIns="0" rtlCol="0" anchor="ctr"/>
           <a:lstStyle/>
           <a:p>
-            <a:pPr indent="0" marL="0">
-              <a:buNone/>
-            </a:pPr>
-            <a:r>
-              <a:rPr lang="en-US" sz="1300" b="1" spc="400" kern="0" dirty="0">
+            <a:pPr marL="0" indent="0">
+              <a:buNone/>
+            </a:pPr>
+            <a:r>
+              <a:rPr lang="en-US" sz="1300" b="1" kern="0" spc="400" dirty="0">
                 <a:solidFill>
                   <a:srgbClr val="A29BFE"/>
                 </a:solidFill>
@@ -2196,7 +1933,7 @@
           <a:bodyPr wrap="square" lIns="0" tIns="0" rIns="0" bIns="0" rtlCol="0" anchor="ctr"/>
           <a:lstStyle/>
           <a:p>
-            <a:pPr indent="0" marL="0">
+            <a:pPr marL="0" indent="0">
               <a:buNone/>
             </a:pPr>
             <a:r>
@@ -2302,7 +2039,7 @@
           <a:bodyPr wrap="square" lIns="0" tIns="0" rIns="0" bIns="0" rtlCol="0" anchor="ctr"/>
           <a:lstStyle/>
           <a:p>
-            <a:pPr indent="0" marL="0">
+            <a:pPr marL="0" indent="0">
               <a:buNone/>
             </a:pPr>
             <a:r>
@@ -2341,7 +2078,7 @@
           <a:bodyPr wrap="square" lIns="0" tIns="0" rIns="0" bIns="0" rtlCol="0" anchor="ctr"/>
           <a:lstStyle/>
           <a:p>
-            <a:pPr indent="0" marL="0">
+            <a:pPr marL="0" indent="0">
               <a:buNone/>
             </a:pPr>
             <a:r>
@@ -2427,7 +2164,7 @@
           <a:bodyPr wrap="square" lIns="0" tIns="0" rIns="0" bIns="0" rtlCol="0" anchor="ctr"/>
           <a:lstStyle/>
           <a:p>
-            <a:pPr indent="0" marL="0">
+            <a:pPr marL="0" indent="0">
               <a:buNone/>
             </a:pPr>
             <a:r>
@@ -2466,7 +2203,7 @@
           <a:bodyPr wrap="square" lIns="0" tIns="0" rIns="0" bIns="0" rtlCol="0" anchor="ctr"/>
           <a:lstStyle/>
           <a:p>
-            <a:pPr indent="0" marL="0">
+            <a:pPr marL="0" indent="0">
               <a:buNone/>
             </a:pPr>
             <a:r>
@@ -2552,7 +2289,7 @@
           <a:bodyPr wrap="square" lIns="0" tIns="0" rIns="0" bIns="0" rtlCol="0" anchor="ctr"/>
           <a:lstStyle/>
           <a:p>
-            <a:pPr indent="0" marL="0">
+            <a:pPr marL="0" indent="0">
               <a:buNone/>
             </a:pPr>
             <a:r>
@@ -2591,7 +2328,7 @@
           <a:bodyPr wrap="square" lIns="0" tIns="0" rIns="0" bIns="0" rtlCol="0" anchor="ctr"/>
           <a:lstStyle/>
           <a:p>
-            <a:pPr indent="0" marL="0">
+            <a:pPr marL="0" indent="0">
               <a:buNone/>
             </a:pPr>
             <a:r>
@@ -2677,7 +2414,7 @@
           <a:bodyPr wrap="square" lIns="0" tIns="0" rIns="0" bIns="0" rtlCol="0" anchor="ctr"/>
           <a:lstStyle/>
           <a:p>
-            <a:pPr indent="0" marL="0">
+            <a:pPr marL="0" indent="0">
               <a:buNone/>
             </a:pPr>
             <a:r>
@@ -2716,7 +2453,7 @@
           <a:bodyPr wrap="square" lIns="0" tIns="0" rIns="0" bIns="0" rtlCol="0" anchor="ctr"/>
           <a:lstStyle/>
           <a:p>
-            <a:pPr indent="0" marL="0">
+            <a:pPr marL="0" indent="0">
               <a:buNone/>
             </a:pPr>
             <a:r>
@@ -2802,7 +2539,7 @@
           <a:bodyPr wrap="square" lIns="0" tIns="0" rIns="0" bIns="0" rtlCol="0" anchor="ctr"/>
           <a:lstStyle/>
           <a:p>
-            <a:pPr indent="0" marL="0">
+            <a:pPr marL="0" indent="0">
               <a:buNone/>
             </a:pPr>
             <a:r>
@@ -2841,7 +2578,7 @@
           <a:bodyPr wrap="square" lIns="0" tIns="0" rIns="0" bIns="0" rtlCol="0" anchor="ctr"/>
           <a:lstStyle/>
           <a:p>
-            <a:pPr indent="0" marL="0">
+            <a:pPr marL="0" indent="0">
               <a:buNone/>
             </a:pPr>
             <a:r>
@@ -2875,6 +2612,7 @@
         <a:solidFill>
           <a:srgbClr val="0D0B1E"/>
         </a:solidFill>
+        <a:effectLst/>
       </p:bgPr>
     </p:bg>
     <p:spTree>
@@ -2912,11 +2650,11 @@
           <a:bodyPr wrap="square" lIns="0" tIns="0" rIns="0" bIns="0" rtlCol="0" anchor="ctr"/>
           <a:lstStyle/>
           <a:p>
-            <a:pPr indent="0" marL="0">
-              <a:buNone/>
-            </a:pPr>
-            <a:r>
-              <a:rPr lang="en-US" sz="1300" b="1" spc="400" kern="0" dirty="0">
+            <a:pPr marL="0" indent="0">
+              <a:buNone/>
+            </a:pPr>
+            <a:r>
+              <a:rPr lang="en-US" sz="1300" b="1" kern="0" spc="400" dirty="0">
                 <a:solidFill>
                   <a:srgbClr val="A29BFE"/>
                 </a:solidFill>
@@ -2951,7 +2689,7 @@
           <a:bodyPr wrap="square" lIns="0" tIns="0" rIns="0" bIns="0" rtlCol="0" anchor="ctr"/>
           <a:lstStyle/>
           <a:p>
-            <a:pPr indent="0" marL="0">
+            <a:pPr marL="0" indent="0">
               <a:buNone/>
             </a:pPr>
             <a:r>
@@ -3037,7 +2775,7 @@
           <a:bodyPr wrap="square" lIns="0" tIns="0" rIns="0" bIns="0" rtlCol="0" anchor="ctr"/>
           <a:lstStyle/>
           <a:p>
-            <a:pPr indent="0" marL="0">
+            <a:pPr marL="0" indent="0">
               <a:buNone/>
             </a:pPr>
             <a:r>
@@ -3096,7 +2834,7 @@
           <a:bodyPr wrap="square" lIns="0" tIns="0" rIns="0" bIns="0" rtlCol="0" anchor="ctr"/>
           <a:lstStyle/>
           <a:p>
-            <a:pPr indent="0" marL="0">
+            <a:pPr marL="0" indent="0">
               <a:buNone/>
             </a:pPr>
             <a:r>
@@ -3155,7 +2893,7 @@
           <a:bodyPr wrap="square" lIns="0" tIns="0" rIns="0" bIns="0" rtlCol="0" anchor="ctr"/>
           <a:lstStyle/>
           <a:p>
-            <a:pPr indent="0" marL="0">
+            <a:pPr marL="0" indent="0">
               <a:buNone/>
             </a:pPr>
             <a:r>
@@ -3214,7 +2952,7 @@
           <a:bodyPr wrap="square" lIns="0" tIns="0" rIns="0" bIns="0" rtlCol="0" anchor="ctr"/>
           <a:lstStyle/>
           <a:p>
-            <a:pPr indent="0" marL="0">
+            <a:pPr marL="0" indent="0">
               <a:buNone/>
             </a:pPr>
             <a:r>
@@ -3273,7 +3011,7 @@
           <a:bodyPr wrap="square" lIns="0" tIns="0" rIns="0" bIns="0" rtlCol="0" anchor="ctr"/>
           <a:lstStyle/>
           <a:p>
-            <a:pPr indent="0" marL="0">
+            <a:pPr marL="0" indent="0">
               <a:buNone/>
             </a:pPr>
             <a:r>
@@ -3332,7 +3070,7 @@
           <a:bodyPr wrap="square" lIns="0" tIns="0" rIns="0" bIns="0" rtlCol="0" anchor="ctr"/>
           <a:lstStyle/>
           <a:p>
-            <a:pPr indent="0" marL="0">
+            <a:pPr marL="0" indent="0">
               <a:buNone/>
             </a:pPr>
             <a:r>
@@ -3398,7 +3136,7 @@
           <a:bodyPr wrap="square" lIns="0" tIns="0" rIns="0" bIns="0" rtlCol="0" anchor="ctr"/>
           <a:lstStyle/>
           <a:p>
-            <a:pPr indent="0" marL="0">
+            <a:pPr marL="0" indent="0">
               <a:buNone/>
             </a:pPr>
             <a:r>
@@ -3457,7 +3195,7 @@
           <a:bodyPr wrap="square" lIns="0" tIns="0" rIns="0" bIns="0" rtlCol="0" anchor="ctr"/>
           <a:lstStyle/>
           <a:p>
-            <a:pPr indent="0" marL="0">
+            <a:pPr marL="0" indent="0">
               <a:buNone/>
             </a:pPr>
             <a:r>
@@ -3516,7 +3254,7 @@
           <a:bodyPr wrap="square" lIns="0" tIns="0" rIns="0" bIns="0" rtlCol="0" anchor="ctr"/>
           <a:lstStyle/>
           <a:p>
-            <a:pPr indent="0" marL="0">
+            <a:pPr marL="0" indent="0">
               <a:buNone/>
             </a:pPr>
             <a:r>
@@ -3575,7 +3313,7 @@
           <a:bodyPr wrap="square" lIns="0" tIns="0" rIns="0" bIns="0" rtlCol="0" anchor="ctr"/>
           <a:lstStyle/>
           <a:p>
-            <a:pPr indent="0" marL="0">
+            <a:pPr marL="0" indent="0">
               <a:buNone/>
             </a:pPr>
             <a:r>
@@ -3634,7 +3372,7 @@
           <a:bodyPr wrap="square" lIns="0" tIns="0" rIns="0" bIns="0" rtlCol="0" anchor="ctr"/>
           <a:lstStyle/>
           <a:p>
-            <a:pPr indent="0" marL="0">
+            <a:pPr marL="0" indent="0">
               <a:buNone/>
             </a:pPr>
             <a:r>
@@ -3693,7 +3431,7 @@
           <a:bodyPr wrap="square" lIns="0" tIns="0" rIns="0" bIns="0" rtlCol="0" anchor="ctr"/>
           <a:lstStyle/>
           <a:p>
-            <a:pPr indent="0" marL="0">
+            <a:pPr marL="0" indent="0">
               <a:buNone/>
             </a:pPr>
             <a:r>
@@ -3727,6 +3465,7 @@
         <a:solidFill>
           <a:srgbClr val="0D0B1E"/>
         </a:solidFill>
+        <a:effectLst/>
       </p:bgPr>
     </p:bg>
     <p:spTree>
@@ -3791,7 +3530,7 @@
         </p:nvSpPr>
         <p:spPr>
           <a:xfrm>
-            <a:off x="502920" y="1188720"/>
+            <a:off x="502920" y="1716786"/>
             <a:ext cx="8138160" cy="1005840"/>
           </a:xfrm>
           <a:prstGeom prst="rect">
@@ -3804,7 +3543,7 @@
           <a:bodyPr wrap="square" lIns="0" tIns="0" rIns="0" bIns="0" rtlCol="0" anchor="ctr"/>
           <a:lstStyle/>
           <a:p>
-            <a:pPr algn="ctr" indent="0" marL="0">
+            <a:pPr marL="0" indent="0" algn="ctr">
               <a:buNone/>
             </a:pPr>
             <a:r>
@@ -3818,9 +3557,6 @@
               </a:rPr>
               <a:t>Front</a:t>
             </a:r>
-            <a:pPr algn="ctr" indent="0" marL="0">
-              <a:buNone/>
-            </a:pPr>
             <a:r>
               <a:rPr lang="en-US" sz="5600" b="1" i="1" dirty="0">
                 <a:solidFill>
@@ -3844,7 +3580,7 @@
         </p:nvSpPr>
         <p:spPr>
           <a:xfrm>
-            <a:off x="502920" y="2286000"/>
+            <a:off x="502920" y="2880360"/>
             <a:ext cx="8138160" cy="384048"/>
           </a:xfrm>
           <a:prstGeom prst="rect">
@@ -3857,7 +3593,7 @@
           <a:bodyPr wrap="square" lIns="0" tIns="0" rIns="0" bIns="0" rtlCol="0" anchor="ctr"/>
           <a:lstStyle/>
           <a:p>
-            <a:pPr algn="ctr" indent="0" marL="0">
+            <a:pPr marL="0" indent="0" algn="ctr">
               <a:buNone/>
             </a:pPr>
             <a:r>
@@ -3896,45 +3632,12 @@
           <a:bodyPr wrap="square" lIns="0" tIns="0" rIns="0" bIns="0" rtlCol="0" anchor="ctr"/>
           <a:lstStyle/>
           <a:p>
-            <a:pPr algn="ctr" indent="0" marL="0">
-              <a:buNone/>
-            </a:pPr>
-            <a:r>
-              <a:rPr lang="en-US" sz="1400" dirty="0">
-                <a:solidFill>
-                  <a:srgbClr val="E8E4F9"/>
-                </a:solidFill>
-                <a:latin typeface="Calibri" pitchFamily="34" charset="0"/>
-                <a:ea typeface="Calibri" pitchFamily="34" charset="-122"/>
-                <a:cs typeface="Calibri" pitchFamily="34" charset="-120"/>
-              </a:rPr>
-              <a:t>Discovery, ticketing, AI guidance and security — one platform.</a:t>
-            </a:r>
+            <a:pPr marL="0" indent="0" algn="ctr">
+              <a:buNone/>
+            </a:pPr>
             <a:endParaRPr lang="en-US" sz="1400" dirty="0"/>
           </a:p>
         </p:txBody>
-      </p:sp>
-      <p:sp>
-        <p:nvSpPr>
-          <p:cNvPr id="7" name="Shape 5"/>
-          <p:cNvSpPr/>
-          <p:nvPr/>
-        </p:nvSpPr>
-        <p:spPr>
-          <a:xfrm>
-            <a:off x="3703320" y="3611880"/>
-            <a:ext cx="1737360" cy="502920"/>
-          </a:xfrm>
-          <a:prstGeom prst="roundRect">
-            <a:avLst>
-              <a:gd name="adj" fmla="val 21818"/>
-            </a:avLst>
-          </a:prstGeom>
-          <a:solidFill>
-            <a:srgbClr val="E84393"/>
-          </a:solidFill>
-          <a:ln/>
-        </p:spPr>
       </p:sp>
       <p:sp>
         <p:nvSpPr>
@@ -3957,20 +3660,9 @@
           <a:bodyPr wrap="square" lIns="0" tIns="0" rIns="0" bIns="0" rtlCol="0" anchor="ctr"/>
           <a:lstStyle/>
           <a:p>
-            <a:pPr algn="ctr" indent="0" marL="0">
-              <a:buNone/>
-            </a:pPr>
-            <a:r>
-              <a:rPr lang="en-US" sz="1500" b="1" dirty="0">
-                <a:solidFill>
-                  <a:srgbClr val="FFFFFF"/>
-                </a:solidFill>
-                <a:latin typeface="Calibri" pitchFamily="34" charset="0"/>
-                <a:ea typeface="Calibri" pitchFamily="34" charset="-122"/>
-                <a:cs typeface="Calibri" pitchFamily="34" charset="-120"/>
-              </a:rPr>
-              <a:t>Live demo</a:t>
-            </a:r>
+            <a:pPr marL="0" indent="0" algn="ctr">
+              <a:buNone/>
+            </a:pPr>
             <a:endParaRPr lang="en-US" sz="1500" dirty="0"/>
           </a:p>
         </p:txBody>
@@ -3991,6 +3683,7 @@
         <a:solidFill>
           <a:srgbClr val="0D0B1E"/>
         </a:solidFill>
+        <a:effectLst/>
       </p:bgPr>
     </p:bg>
     <p:spTree>
@@ -4028,11 +3721,11 @@
           <a:bodyPr wrap="square" lIns="0" tIns="0" rIns="0" bIns="0" rtlCol="0" anchor="ctr"/>
           <a:lstStyle/>
           <a:p>
-            <a:pPr indent="0" marL="0">
-              <a:buNone/>
-            </a:pPr>
-            <a:r>
-              <a:rPr lang="en-US" sz="1300" b="1" spc="400" kern="0" dirty="0">
+            <a:pPr marL="0" indent="0">
+              <a:buNone/>
+            </a:pPr>
+            <a:r>
+              <a:rPr lang="en-US" sz="1300" b="1" kern="0" spc="400" dirty="0">
                 <a:solidFill>
                   <a:srgbClr val="A29BFE"/>
                 </a:solidFill>
@@ -4067,7 +3760,7 @@
           <a:bodyPr wrap="square" lIns="0" tIns="0" rIns="0" bIns="0" rtlCol="0" anchor="ctr"/>
           <a:lstStyle/>
           <a:p>
-            <a:pPr indent="0" marL="0">
+            <a:pPr marL="0" indent="0">
               <a:buNone/>
             </a:pPr>
             <a:r>
@@ -4173,7 +3866,7 @@
           <a:bodyPr wrap="square" lIns="0" tIns="0" rIns="0" bIns="0" rtlCol="0" anchor="ctr"/>
           <a:lstStyle/>
           <a:p>
-            <a:pPr indent="0" marL="0">
+            <a:pPr marL="0" indent="0">
               <a:buNone/>
             </a:pPr>
             <a:r>
@@ -4212,7 +3905,7 @@
           <a:bodyPr wrap="square" lIns="0" tIns="0" rIns="0" bIns="0" rtlCol="0" anchor="ctr"/>
           <a:lstStyle/>
           <a:p>
-            <a:pPr indent="0" marL="0">
+            <a:pPr marL="0" indent="0">
               <a:buNone/>
             </a:pPr>
             <a:r>
@@ -4298,7 +3991,7 @@
           <a:bodyPr wrap="square" lIns="0" tIns="0" rIns="0" bIns="0" rtlCol="0" anchor="ctr"/>
           <a:lstStyle/>
           <a:p>
-            <a:pPr indent="0" marL="0">
+            <a:pPr marL="0" indent="0">
               <a:buNone/>
             </a:pPr>
             <a:r>
@@ -4337,7 +4030,7 @@
           <a:bodyPr wrap="square" lIns="0" tIns="0" rIns="0" bIns="0" rtlCol="0" anchor="ctr"/>
           <a:lstStyle/>
           <a:p>
-            <a:pPr indent="0" marL="0">
+            <a:pPr marL="0" indent="0">
               <a:buNone/>
             </a:pPr>
             <a:r>
@@ -4423,7 +4116,7 @@
           <a:bodyPr wrap="square" lIns="0" tIns="0" rIns="0" bIns="0" rtlCol="0" anchor="ctr"/>
           <a:lstStyle/>
           <a:p>
-            <a:pPr indent="0" marL="0">
+            <a:pPr marL="0" indent="0">
               <a:buNone/>
             </a:pPr>
             <a:r>
@@ -4462,7 +4155,7 @@
           <a:bodyPr wrap="square" lIns="0" tIns="0" rIns="0" bIns="0" rtlCol="0" anchor="ctr"/>
           <a:lstStyle/>
           <a:p>
-            <a:pPr indent="0" marL="0">
+            <a:pPr marL="0" indent="0">
               <a:buNone/>
             </a:pPr>
             <a:r>
@@ -4548,7 +4241,7 @@
           <a:bodyPr wrap="square" lIns="0" tIns="0" rIns="0" bIns="0" rtlCol="0" anchor="ctr"/>
           <a:lstStyle/>
           <a:p>
-            <a:pPr indent="0" marL="0">
+            <a:pPr marL="0" indent="0">
               <a:buNone/>
             </a:pPr>
             <a:r>
@@ -4587,7 +4280,7 @@
           <a:bodyPr wrap="square" lIns="0" tIns="0" rIns="0" bIns="0" rtlCol="0" anchor="ctr"/>
           <a:lstStyle/>
           <a:p>
-            <a:pPr indent="0" marL="0">
+            <a:pPr marL="0" indent="0">
               <a:buNone/>
             </a:pPr>
             <a:r>
@@ -4621,6 +4314,7 @@
         <a:solidFill>
           <a:srgbClr val="0D0B1E"/>
         </a:solidFill>
+        <a:effectLst/>
       </p:bgPr>
     </p:bg>
     <p:spTree>
@@ -4658,11 +4352,11 @@
           <a:bodyPr wrap="square" lIns="0" tIns="0" rIns="0" bIns="0" rtlCol="0" anchor="ctr"/>
           <a:lstStyle/>
           <a:p>
-            <a:pPr indent="0" marL="0">
-              <a:buNone/>
-            </a:pPr>
-            <a:r>
-              <a:rPr lang="en-US" sz="1300" b="1" spc="400" kern="0" dirty="0">
+            <a:pPr marL="0" indent="0">
+              <a:buNone/>
+            </a:pPr>
+            <a:r>
+              <a:rPr lang="en-US" sz="1300" b="1" kern="0" spc="400" dirty="0">
                 <a:solidFill>
                   <a:srgbClr val="A29BFE"/>
                 </a:solidFill>
@@ -4697,7 +4391,7 @@
           <a:bodyPr wrap="square" lIns="0" tIns="0" rIns="0" bIns="0" rtlCol="0" anchor="ctr"/>
           <a:lstStyle/>
           <a:p>
-            <a:pPr indent="0" marL="0">
+            <a:pPr marL="0" indent="0">
               <a:buNone/>
             </a:pPr>
             <a:r>
@@ -4756,7 +4450,7 @@
           <a:bodyPr wrap="square" lIns="0" tIns="0" rIns="0" bIns="0" rtlCol="0" anchor="ctr"/>
           <a:lstStyle/>
           <a:p>
-            <a:pPr indent="0" marL="0">
+            <a:pPr marL="0" indent="0">
               <a:buNone/>
             </a:pPr>
             <a:r>
@@ -4842,7 +4536,7 @@
           <a:bodyPr wrap="square" lIns="0" tIns="0" rIns="0" bIns="0" rtlCol="0" anchor="ctr"/>
           <a:lstStyle/>
           <a:p>
-            <a:pPr indent="0" marL="0">
+            <a:pPr marL="0" indent="0">
               <a:buNone/>
             </a:pPr>
             <a:r>
@@ -4881,7 +4575,7 @@
           <a:bodyPr wrap="square" lIns="0" tIns="0" rIns="0" bIns="0" rtlCol="0" anchor="ctr"/>
           <a:lstStyle/>
           <a:p>
-            <a:pPr algn="ctr" indent="0" marL="0">
+            <a:pPr marL="0" indent="0" algn="ctr">
               <a:buNone/>
             </a:pPr>
             <a:r>
@@ -4920,7 +4614,7 @@
           <a:bodyPr wrap="square" lIns="0" tIns="0" rIns="0" bIns="0" rtlCol="0" anchor="ctr"/>
           <a:lstStyle/>
           <a:p>
-            <a:pPr algn="ctr" indent="0" marL="0">
+            <a:pPr marL="0" indent="0" algn="ctr">
               <a:buNone/>
             </a:pPr>
             <a:r>
@@ -4959,7 +4653,7 @@
           <a:bodyPr wrap="square" lIns="0" tIns="0" rIns="0" bIns="0" rtlCol="0" anchor="ctr"/>
           <a:lstStyle/>
           <a:p>
-            <a:pPr algn="ctr" indent="0" marL="0">
+            <a:pPr marL="0" indent="0" algn="ctr">
               <a:buNone/>
             </a:pPr>
             <a:r>
@@ -5045,7 +4739,7 @@
           <a:bodyPr wrap="square" lIns="0" tIns="0" rIns="0" bIns="0" rtlCol="0" anchor="ctr"/>
           <a:lstStyle/>
           <a:p>
-            <a:pPr indent="0" marL="0">
+            <a:pPr marL="0" indent="0">
               <a:buNone/>
             </a:pPr>
             <a:r>
@@ -5084,7 +4778,7 @@
           <a:bodyPr wrap="square" lIns="0" tIns="0" rIns="0" bIns="0" rtlCol="0" anchor="ctr"/>
           <a:lstStyle/>
           <a:p>
-            <a:pPr algn="ctr" indent="0" marL="0">
+            <a:pPr marL="0" indent="0" algn="ctr">
               <a:buNone/>
             </a:pPr>
             <a:r>
@@ -5123,7 +4817,7 @@
           <a:bodyPr wrap="square" lIns="0" tIns="0" rIns="0" bIns="0" rtlCol="0" anchor="ctr"/>
           <a:lstStyle/>
           <a:p>
-            <a:pPr algn="ctr" indent="0" marL="0">
+            <a:pPr marL="0" indent="0" algn="ctr">
               <a:buNone/>
             </a:pPr>
             <a:r>
@@ -5162,7 +4856,7 @@
           <a:bodyPr wrap="square" lIns="0" tIns="0" rIns="0" bIns="0" rtlCol="0" anchor="ctr"/>
           <a:lstStyle/>
           <a:p>
-            <a:pPr algn="ctr" indent="0" marL="0">
+            <a:pPr marL="0" indent="0" algn="ctr">
               <a:buNone/>
             </a:pPr>
             <a:r>
@@ -5248,7 +4942,7 @@
           <a:bodyPr wrap="square" lIns="0" tIns="0" rIns="0" bIns="0" rtlCol="0" anchor="ctr"/>
           <a:lstStyle/>
           <a:p>
-            <a:pPr indent="0" marL="0">
+            <a:pPr marL="0" indent="0">
               <a:buNone/>
             </a:pPr>
             <a:r>
@@ -5287,7 +4981,7 @@
           <a:bodyPr wrap="square" lIns="0" tIns="0" rIns="0" bIns="0" rtlCol="0" anchor="ctr"/>
           <a:lstStyle/>
           <a:p>
-            <a:pPr algn="ctr" indent="0" marL="0">
+            <a:pPr marL="0" indent="0" algn="ctr">
               <a:buNone/>
             </a:pPr>
             <a:r>
@@ -5326,7 +5020,7 @@
           <a:bodyPr wrap="square" lIns="0" tIns="0" rIns="0" bIns="0" rtlCol="0" anchor="ctr"/>
           <a:lstStyle/>
           <a:p>
-            <a:pPr algn="ctr" indent="0" marL="0">
+            <a:pPr marL="0" indent="0" algn="ctr">
               <a:buNone/>
             </a:pPr>
             <a:r>
@@ -5365,7 +5059,7 @@
           <a:bodyPr wrap="square" lIns="0" tIns="0" rIns="0" bIns="0" rtlCol="0" anchor="ctr"/>
           <a:lstStyle/>
           <a:p>
-            <a:pPr algn="ctr" indent="0" marL="0">
+            <a:pPr marL="0" indent="0" algn="ctr">
               <a:buNone/>
             </a:pPr>
             <a:r>
@@ -5451,7 +5145,7 @@
           <a:bodyPr wrap="square" lIns="0" tIns="0" rIns="0" bIns="0" rtlCol="0" anchor="ctr"/>
           <a:lstStyle/>
           <a:p>
-            <a:pPr indent="0" marL="0">
+            <a:pPr marL="0" indent="0">
               <a:buNone/>
             </a:pPr>
             <a:r>
@@ -5490,7 +5184,7 @@
           <a:bodyPr wrap="square" lIns="0" tIns="0" rIns="0" bIns="0" rtlCol="0" anchor="ctr"/>
           <a:lstStyle/>
           <a:p>
-            <a:pPr algn="ctr" indent="0" marL="0">
+            <a:pPr marL="0" indent="0" algn="ctr">
               <a:buNone/>
             </a:pPr>
             <a:r>
@@ -5529,7 +5223,7 @@
           <a:bodyPr wrap="square" lIns="0" tIns="0" rIns="0" bIns="0" rtlCol="0" anchor="ctr"/>
           <a:lstStyle/>
           <a:p>
-            <a:pPr algn="ctr" indent="0" marL="0">
+            <a:pPr marL="0" indent="0" algn="ctr">
               <a:buNone/>
             </a:pPr>
             <a:r>
@@ -5568,7 +5262,7 @@
           <a:bodyPr wrap="square" lIns="0" tIns="0" rIns="0" bIns="0" rtlCol="0" anchor="ctr"/>
           <a:lstStyle/>
           <a:p>
-            <a:pPr algn="ctr" indent="0" marL="0">
+            <a:pPr marL="0" indent="0" algn="ctr">
               <a:buNone/>
             </a:pPr>
             <a:r>
@@ -5654,7 +5348,7 @@
           <a:bodyPr wrap="square" lIns="0" tIns="0" rIns="0" bIns="0" rtlCol="0" anchor="ctr"/>
           <a:lstStyle/>
           <a:p>
-            <a:pPr indent="0" marL="0">
+            <a:pPr marL="0" indent="0">
               <a:buNone/>
             </a:pPr>
             <a:r>
@@ -5693,7 +5387,7 @@
           <a:bodyPr wrap="square" lIns="0" tIns="0" rIns="0" bIns="0" rtlCol="0" anchor="ctr"/>
           <a:lstStyle/>
           <a:p>
-            <a:pPr algn="ctr" indent="0" marL="0">
+            <a:pPr marL="0" indent="0" algn="ctr">
               <a:buNone/>
             </a:pPr>
             <a:r>
@@ -5732,7 +5426,7 @@
           <a:bodyPr wrap="square" lIns="0" tIns="0" rIns="0" bIns="0" rtlCol="0" anchor="ctr"/>
           <a:lstStyle/>
           <a:p>
-            <a:pPr algn="ctr" indent="0" marL="0">
+            <a:pPr marL="0" indent="0" algn="ctr">
               <a:buNone/>
             </a:pPr>
             <a:r>
@@ -5771,7 +5465,7 @@
           <a:bodyPr wrap="square" lIns="0" tIns="0" rIns="0" bIns="0" rtlCol="0" anchor="ctr"/>
           <a:lstStyle/>
           <a:p>
-            <a:pPr algn="ctr" indent="0" marL="0">
+            <a:pPr marL="0" indent="0" algn="ctr">
               <a:buNone/>
             </a:pPr>
             <a:r>
@@ -5805,6 +5499,7 @@
         <a:solidFill>
           <a:srgbClr val="0D0B1E"/>
         </a:solidFill>
+        <a:effectLst/>
       </p:bgPr>
     </p:bg>
     <p:spTree>
@@ -5842,11 +5537,11 @@
           <a:bodyPr wrap="square" lIns="0" tIns="0" rIns="0" bIns="0" rtlCol="0" anchor="ctr"/>
           <a:lstStyle/>
           <a:p>
-            <a:pPr indent="0" marL="0">
-              <a:buNone/>
-            </a:pPr>
-            <a:r>
-              <a:rPr lang="en-US" sz="1300" b="1" spc="400" kern="0" dirty="0">
+            <a:pPr marL="0" indent="0">
+              <a:buNone/>
+            </a:pPr>
+            <a:r>
+              <a:rPr lang="en-US" sz="1300" b="1" kern="0" spc="400" dirty="0">
                 <a:solidFill>
                   <a:srgbClr val="A29BFE"/>
                 </a:solidFill>
@@ -5881,7 +5576,7 @@
           <a:bodyPr wrap="square" lIns="0" tIns="0" rIns="0" bIns="0" rtlCol="0" anchor="ctr"/>
           <a:lstStyle/>
           <a:p>
-            <a:pPr indent="0" marL="0">
+            <a:pPr marL="0" indent="0">
               <a:buNone/>
             </a:pPr>
             <a:r>
@@ -5967,7 +5662,7 @@
           <a:bodyPr wrap="square" lIns="0" tIns="0" rIns="0" bIns="0" rtlCol="0" anchor="ctr"/>
           <a:lstStyle/>
           <a:p>
-            <a:pPr indent="0" marL="0">
+            <a:pPr marL="0" indent="0">
               <a:buNone/>
             </a:pPr>
             <a:r>
@@ -6026,7 +5721,7 @@
           <a:bodyPr wrap="square" lIns="0" tIns="0" rIns="0" bIns="0" rtlCol="0" anchor="ctr"/>
           <a:lstStyle/>
           <a:p>
-            <a:pPr indent="0" marL="0">
+            <a:pPr marL="0" indent="0">
               <a:buNone/>
             </a:pPr>
             <a:r>
@@ -6085,7 +5780,7 @@
           <a:bodyPr wrap="square" lIns="0" tIns="0" rIns="0" bIns="0" rtlCol="0" anchor="ctr"/>
           <a:lstStyle/>
           <a:p>
-            <a:pPr indent="0" marL="0">
+            <a:pPr marL="0" indent="0">
               <a:buNone/>
             </a:pPr>
             <a:r>
@@ -6144,7 +5839,7 @@
           <a:bodyPr wrap="square" lIns="0" tIns="0" rIns="0" bIns="0" rtlCol="0" anchor="ctr"/>
           <a:lstStyle/>
           <a:p>
-            <a:pPr indent="0" marL="0">
+            <a:pPr marL="0" indent="0">
               <a:buNone/>
             </a:pPr>
             <a:r>
@@ -6203,7 +5898,7 @@
           <a:bodyPr wrap="square" lIns="0" tIns="0" rIns="0" bIns="0" rtlCol="0" anchor="ctr"/>
           <a:lstStyle/>
           <a:p>
-            <a:pPr indent="0" marL="0">
+            <a:pPr marL="0" indent="0">
               <a:buNone/>
             </a:pPr>
             <a:r>
@@ -6262,7 +5957,7 @@
           <a:bodyPr wrap="square" lIns="0" tIns="0" rIns="0" bIns="0" rtlCol="0" anchor="ctr"/>
           <a:lstStyle/>
           <a:p>
-            <a:pPr indent="0" marL="0">
+            <a:pPr marL="0" indent="0">
               <a:buNone/>
             </a:pPr>
             <a:r>
@@ -6321,7 +6016,7 @@
           <a:bodyPr wrap="square" lIns="0" tIns="0" rIns="0" bIns="0" rtlCol="0" anchor="ctr"/>
           <a:lstStyle/>
           <a:p>
-            <a:pPr indent="0" marL="0">
+            <a:pPr marL="0" indent="0">
               <a:buNone/>
             </a:pPr>
             <a:r>
@@ -6380,7 +6075,7 @@
           <a:bodyPr wrap="square" lIns="0" tIns="0" rIns="0" bIns="0" rtlCol="0" anchor="ctr"/>
           <a:lstStyle/>
           <a:p>
-            <a:pPr indent="0" marL="0">
+            <a:pPr marL="0" indent="0">
               <a:buNone/>
             </a:pPr>
             <a:r>
@@ -6446,7 +6141,7 @@
           <a:bodyPr wrap="square" lIns="0" tIns="0" rIns="0" bIns="0" rtlCol="0" anchor="ctr"/>
           <a:lstStyle/>
           <a:p>
-            <a:pPr indent="0" marL="0">
+            <a:pPr marL="0" indent="0">
               <a:buNone/>
             </a:pPr>
             <a:r>
@@ -6505,7 +6200,7 @@
           <a:bodyPr wrap="square" lIns="0" tIns="0" rIns="0" bIns="0" rtlCol="0" anchor="ctr"/>
           <a:lstStyle/>
           <a:p>
-            <a:pPr indent="0" marL="0">
+            <a:pPr marL="0" indent="0">
               <a:buNone/>
             </a:pPr>
             <a:r>
@@ -6564,7 +6259,7 @@
           <a:bodyPr wrap="square" lIns="0" tIns="0" rIns="0" bIns="0" rtlCol="0" anchor="ctr"/>
           <a:lstStyle/>
           <a:p>
-            <a:pPr indent="0" marL="0">
+            <a:pPr marL="0" indent="0">
               <a:buNone/>
             </a:pPr>
             <a:r>
@@ -6623,7 +6318,7 @@
           <a:bodyPr wrap="square" lIns="0" tIns="0" rIns="0" bIns="0" rtlCol="0" anchor="ctr"/>
           <a:lstStyle/>
           <a:p>
-            <a:pPr indent="0" marL="0">
+            <a:pPr marL="0" indent="0">
               <a:buNone/>
             </a:pPr>
             <a:r>
@@ -6682,7 +6377,7 @@
           <a:bodyPr wrap="square" lIns="0" tIns="0" rIns="0" bIns="0" rtlCol="0" anchor="ctr"/>
           <a:lstStyle/>
           <a:p>
-            <a:pPr indent="0" marL="0">
+            <a:pPr marL="0" indent="0">
               <a:buNone/>
             </a:pPr>
             <a:r>
@@ -6716,6 +6411,7 @@
         <a:solidFill>
           <a:srgbClr val="0D0B1E"/>
         </a:solidFill>
+        <a:effectLst/>
       </p:bgPr>
     </p:bg>
     <p:spTree>
@@ -6753,11 +6449,11 @@
           <a:bodyPr wrap="square" lIns="0" tIns="0" rIns="0" bIns="0" rtlCol="0" anchor="ctr"/>
           <a:lstStyle/>
           <a:p>
-            <a:pPr indent="0" marL="0">
-              <a:buNone/>
-            </a:pPr>
-            <a:r>
-              <a:rPr lang="en-US" sz="1300" b="1" spc="400" kern="0" dirty="0">
+            <a:pPr marL="0" indent="0">
+              <a:buNone/>
+            </a:pPr>
+            <a:r>
+              <a:rPr lang="en-US" sz="1300" b="1" kern="0" spc="400" dirty="0">
                 <a:solidFill>
                   <a:srgbClr val="A29BFE"/>
                 </a:solidFill>
@@ -6792,7 +6488,7 @@
           <a:bodyPr wrap="square" lIns="0" tIns="0" rIns="0" bIns="0" rtlCol="0" anchor="ctr"/>
           <a:lstStyle/>
           <a:p>
-            <a:pPr indent="0" marL="0">
+            <a:pPr marL="0" indent="0">
               <a:buNone/>
             </a:pPr>
             <a:r>
@@ -6871,7 +6567,7 @@
           <a:bodyPr wrap="square" lIns="0" tIns="0" rIns="0" bIns="0" rtlCol="0" anchor="ctr"/>
           <a:lstStyle/>
           <a:p>
-            <a:pPr indent="0" marL="0">
+            <a:pPr marL="0" indent="0">
               <a:buNone/>
             </a:pPr>
             <a:r>
@@ -6910,7 +6606,7 @@
           <a:bodyPr wrap="square" lIns="0" tIns="0" rIns="0" bIns="0" rtlCol="0" anchor="ctr"/>
           <a:lstStyle/>
           <a:p>
-            <a:pPr indent="0" marL="0">
+            <a:pPr marL="0" indent="0">
               <a:buNone/>
             </a:pPr>
             <a:r>
@@ -6969,7 +6665,7 @@
           <a:bodyPr wrap="square" lIns="0" tIns="0" rIns="0" bIns="0" rtlCol="0" anchor="ctr"/>
           <a:lstStyle/>
           <a:p>
-            <a:pPr indent="0" marL="0">
+            <a:pPr marL="0" indent="0">
               <a:buNone/>
             </a:pPr>
             <a:r>
@@ -7008,7 +6704,7 @@
           <a:bodyPr wrap="square" lIns="0" tIns="0" rIns="0" bIns="0" rtlCol="0" anchor="ctr"/>
           <a:lstStyle/>
           <a:p>
-            <a:pPr indent="0" marL="0">
+            <a:pPr marL="0" indent="0">
               <a:buNone/>
             </a:pPr>
             <a:r>
@@ -7067,7 +6763,7 @@
           <a:bodyPr wrap="square" lIns="0" tIns="0" rIns="0" bIns="0" rtlCol="0" anchor="ctr"/>
           <a:lstStyle/>
           <a:p>
-            <a:pPr indent="0" marL="0">
+            <a:pPr marL="0" indent="0">
               <a:buNone/>
             </a:pPr>
             <a:r>
@@ -7106,7 +6802,7 @@
           <a:bodyPr wrap="square" lIns="0" tIns="0" rIns="0" bIns="0" rtlCol="0" anchor="ctr"/>
           <a:lstStyle/>
           <a:p>
-            <a:pPr indent="0" marL="0">
+            <a:pPr marL="0" indent="0">
               <a:buNone/>
             </a:pPr>
             <a:r>
@@ -7165,7 +6861,7 @@
           <a:bodyPr wrap="square" lIns="0" tIns="0" rIns="0" bIns="0" rtlCol="0" anchor="ctr"/>
           <a:lstStyle/>
           <a:p>
-            <a:pPr indent="0" marL="0">
+            <a:pPr marL="0" indent="0">
               <a:buNone/>
             </a:pPr>
             <a:r>
@@ -7204,7 +6900,7 @@
           <a:bodyPr wrap="square" lIns="0" tIns="0" rIns="0" bIns="0" rtlCol="0" anchor="ctr"/>
           <a:lstStyle/>
           <a:p>
-            <a:pPr indent="0" marL="0">
+            <a:pPr marL="0" indent="0">
               <a:buNone/>
             </a:pPr>
             <a:r>
@@ -7263,7 +6959,7 @@
           <a:bodyPr wrap="square" lIns="0" tIns="0" rIns="0" bIns="0" rtlCol="0" anchor="ctr"/>
           <a:lstStyle/>
           <a:p>
-            <a:pPr indent="0" marL="0">
+            <a:pPr marL="0" indent="0">
               <a:buNone/>
             </a:pPr>
             <a:r>
@@ -7302,7 +6998,7 @@
           <a:bodyPr wrap="square" lIns="0" tIns="0" rIns="0" bIns="0" rtlCol="0" anchor="ctr"/>
           <a:lstStyle/>
           <a:p>
-            <a:pPr indent="0" marL="0">
+            <a:pPr marL="0" indent="0">
               <a:buNone/>
             </a:pPr>
             <a:r>
@@ -7390,11 +7086,11 @@
           <a:bodyPr wrap="square" lIns="0" tIns="0" rIns="0" bIns="0" rtlCol="0" anchor="ctr"/>
           <a:lstStyle/>
           <a:p>
-            <a:pPr indent="0" marL="0">
-              <a:buNone/>
-            </a:pPr>
-            <a:r>
-              <a:rPr lang="en-US" sz="1200" b="1" spc="300" kern="0" dirty="0">
+            <a:pPr marL="0" indent="0">
+              <a:buNone/>
+            </a:pPr>
+            <a:r>
+              <a:rPr lang="en-US" sz="1200" b="1" kern="0" spc="300" dirty="0">
                 <a:solidFill>
                   <a:srgbClr val="FFFFFF"/>
                 </a:solidFill>
@@ -7429,7 +7125,7 @@
           <a:bodyPr wrap="square" lIns="0" tIns="0" rIns="0" bIns="0" rtlCol="0" anchor="ctr"/>
           <a:lstStyle/>
           <a:p>
-            <a:pPr indent="0" marL="0">
+            <a:pPr marL="0" indent="0">
               <a:buNone/>
             </a:pPr>
             <a:r>
@@ -7468,7 +7164,7 @@
           <a:bodyPr wrap="square" lIns="0" tIns="0" rIns="0" bIns="0" rtlCol="0" anchor="ctr"/>
           <a:lstStyle/>
           <a:p>
-            <a:pPr indent="0" marL="0">
+            <a:pPr marL="0" indent="0">
               <a:buNone/>
             </a:pPr>
             <a:r>
@@ -7507,7 +7203,7 @@
           <a:bodyPr wrap="square" lIns="0" tIns="0" rIns="0" bIns="0" rtlCol="0" anchor="ctr"/>
           <a:lstStyle/>
           <a:p>
-            <a:pPr indent="0" marL="0">
+            <a:pPr marL="0" indent="0">
               <a:buNone/>
             </a:pPr>
             <a:r>
@@ -7568,7 +7264,7 @@
           <a:bodyPr wrap="square" lIns="0" tIns="0" rIns="0" bIns="0" rtlCol="0" anchor="ctr"/>
           <a:lstStyle/>
           <a:p>
-            <a:pPr algn="ctr" indent="0" marL="0">
+            <a:pPr marL="0" indent="0" algn="ctr">
               <a:buNone/>
             </a:pPr>
             <a:r>
@@ -7607,7 +7303,7 @@
           <a:bodyPr wrap="square" lIns="0" tIns="0" rIns="0" bIns="0" rtlCol="0" anchor="ctr"/>
           <a:lstStyle/>
           <a:p>
-            <a:pPr indent="0" marL="0">
+            <a:pPr marL="0" indent="0">
               <a:buNone/>
             </a:pPr>
             <a:r>
@@ -7646,7 +7342,7 @@
           <a:bodyPr wrap="square" lIns="0" tIns="0" rIns="0" bIns="0" rtlCol="0" anchor="ctr"/>
           <a:lstStyle/>
           <a:p>
-            <a:pPr indent="0" marL="0">
+            <a:pPr marL="0" indent="0">
               <a:buNone/>
             </a:pPr>
             <a:r>
@@ -7680,6 +7376,7 @@
         <a:solidFill>
           <a:srgbClr val="0D0B1E"/>
         </a:solidFill>
+        <a:effectLst/>
       </p:bgPr>
     </p:bg>
     <p:spTree>
@@ -7717,11 +7414,11 @@
           <a:bodyPr wrap="square" lIns="0" tIns="0" rIns="0" bIns="0" rtlCol="0" anchor="ctr"/>
           <a:lstStyle/>
           <a:p>
-            <a:pPr indent="0" marL="0">
-              <a:buNone/>
-            </a:pPr>
-            <a:r>
-              <a:rPr lang="en-US" sz="1300" b="1" spc="400" kern="0" dirty="0">
+            <a:pPr marL="0" indent="0">
+              <a:buNone/>
+            </a:pPr>
+            <a:r>
+              <a:rPr lang="en-US" sz="1300" b="1" kern="0" spc="400" dirty="0">
                 <a:solidFill>
                   <a:srgbClr val="A29BFE"/>
                 </a:solidFill>
@@ -7756,7 +7453,7 @@
           <a:bodyPr wrap="square" lIns="0" tIns="0" rIns="0" bIns="0" rtlCol="0" anchor="ctr"/>
           <a:lstStyle/>
           <a:p>
-            <a:pPr indent="0" marL="0">
+            <a:pPr marL="0" indent="0">
               <a:buNone/>
             </a:pPr>
             <a:r>
@@ -7840,7 +7537,7 @@
           <a:bodyPr wrap="square" lIns="0" tIns="0" rIns="0" bIns="0" rtlCol="0" anchor="ctr"/>
           <a:lstStyle/>
           <a:p>
-            <a:pPr algn="ctr" indent="0" marL="0">
+            <a:pPr marL="0" indent="0" algn="ctr">
               <a:buNone/>
             </a:pPr>
             <a:r>
@@ -7879,7 +7576,7 @@
           <a:bodyPr wrap="square" lIns="0" tIns="0" rIns="0" bIns="0" rtlCol="0" anchor="ctr"/>
           <a:lstStyle/>
           <a:p>
-            <a:pPr indent="0" marL="0">
+            <a:pPr marL="0" indent="0">
               <a:buNone/>
             </a:pPr>
             <a:r>
@@ -7918,7 +7615,7 @@
           <a:bodyPr wrap="square" lIns="0" tIns="0" rIns="0" bIns="0" rtlCol="0" anchor="ctr"/>
           <a:lstStyle/>
           <a:p>
-            <a:pPr indent="0" marL="0">
+            <a:pPr marL="0" indent="0">
               <a:buNone/>
             </a:pPr>
             <a:r>
@@ -7982,7 +7679,7 @@
           <a:bodyPr wrap="square" lIns="0" tIns="0" rIns="0" bIns="0" rtlCol="0" anchor="ctr"/>
           <a:lstStyle/>
           <a:p>
-            <a:pPr algn="ctr" indent="0" marL="0">
+            <a:pPr marL="0" indent="0" algn="ctr">
               <a:buNone/>
             </a:pPr>
             <a:r>
@@ -8021,7 +7718,7 @@
           <a:bodyPr wrap="square" lIns="0" tIns="0" rIns="0" bIns="0" rtlCol="0" anchor="ctr"/>
           <a:lstStyle/>
           <a:p>
-            <a:pPr indent="0" marL="0">
+            <a:pPr marL="0" indent="0">
               <a:buNone/>
             </a:pPr>
             <a:r>
@@ -8060,7 +7757,7 @@
           <a:bodyPr wrap="square" lIns="0" tIns="0" rIns="0" bIns="0" rtlCol="0" anchor="ctr"/>
           <a:lstStyle/>
           <a:p>
-            <a:pPr indent="0" marL="0">
+            <a:pPr marL="0" indent="0">
               <a:buNone/>
             </a:pPr>
             <a:r>
@@ -8124,7 +7821,7 @@
           <a:bodyPr wrap="square" lIns="0" tIns="0" rIns="0" bIns="0" rtlCol="0" anchor="ctr"/>
           <a:lstStyle/>
           <a:p>
-            <a:pPr algn="ctr" indent="0" marL="0">
+            <a:pPr marL="0" indent="0" algn="ctr">
               <a:buNone/>
             </a:pPr>
             <a:r>
@@ -8163,7 +7860,7 @@
           <a:bodyPr wrap="square" lIns="0" tIns="0" rIns="0" bIns="0" rtlCol="0" anchor="ctr"/>
           <a:lstStyle/>
           <a:p>
-            <a:pPr indent="0" marL="0">
+            <a:pPr marL="0" indent="0">
               <a:buNone/>
             </a:pPr>
             <a:r>
@@ -8202,7 +7899,7 @@
           <a:bodyPr wrap="square" lIns="0" tIns="0" rIns="0" bIns="0" rtlCol="0" anchor="ctr"/>
           <a:lstStyle/>
           <a:p>
-            <a:pPr indent="0" marL="0">
+            <a:pPr marL="0" indent="0">
               <a:buNone/>
             </a:pPr>
             <a:r>
@@ -8266,7 +7963,7 @@
           <a:bodyPr wrap="square" lIns="0" tIns="0" rIns="0" bIns="0" rtlCol="0" anchor="ctr"/>
           <a:lstStyle/>
           <a:p>
-            <a:pPr algn="ctr" indent="0" marL="0">
+            <a:pPr marL="0" indent="0" algn="ctr">
               <a:buNone/>
             </a:pPr>
             <a:r>
@@ -8305,7 +8002,7 @@
           <a:bodyPr wrap="square" lIns="0" tIns="0" rIns="0" bIns="0" rtlCol="0" anchor="ctr"/>
           <a:lstStyle/>
           <a:p>
-            <a:pPr indent="0" marL="0">
+            <a:pPr marL="0" indent="0">
               <a:buNone/>
             </a:pPr>
             <a:r>
@@ -8344,7 +8041,7 @@
           <a:bodyPr wrap="square" lIns="0" tIns="0" rIns="0" bIns="0" rtlCol="0" anchor="ctr"/>
           <a:lstStyle/>
           <a:p>
-            <a:pPr indent="0" marL="0">
+            <a:pPr marL="0" indent="0">
               <a:buNone/>
             </a:pPr>
             <a:r>
@@ -8408,7 +8105,7 @@
           <a:bodyPr wrap="square" lIns="0" tIns="0" rIns="0" bIns="0" rtlCol="0" anchor="ctr"/>
           <a:lstStyle/>
           <a:p>
-            <a:pPr algn="ctr" indent="0" marL="0">
+            <a:pPr marL="0" indent="0" algn="ctr">
               <a:buNone/>
             </a:pPr>
             <a:r>
@@ -8447,7 +8144,7 @@
           <a:bodyPr wrap="square" lIns="0" tIns="0" rIns="0" bIns="0" rtlCol="0" anchor="ctr"/>
           <a:lstStyle/>
           <a:p>
-            <a:pPr indent="0" marL="0">
+            <a:pPr marL="0" indent="0">
               <a:buNone/>
             </a:pPr>
             <a:r>
@@ -8486,7 +8183,7 @@
           <a:bodyPr wrap="square" lIns="0" tIns="0" rIns="0" bIns="0" rtlCol="0" anchor="ctr"/>
           <a:lstStyle/>
           <a:p>
-            <a:pPr indent="0" marL="0">
+            <a:pPr marL="0" indent="0">
               <a:buNone/>
             </a:pPr>
             <a:r>
@@ -9127,7 +8824,7 @@
           <a:bodyPr wrap="square" lIns="0" tIns="0" rIns="0" bIns="0" rtlCol="0" anchor="ctr"/>
           <a:lstStyle/>
           <a:p>
-            <a:pPr algn="ctr" indent="0" marL="0">
+            <a:pPr marL="0" indent="0" algn="ctr">
               <a:buNone/>
             </a:pPr>
             <a:r>
@@ -9213,7 +8910,7 @@
           <a:bodyPr wrap="square" lIns="0" tIns="0" rIns="0" bIns="0" rtlCol="0" anchor="ctr"/>
           <a:lstStyle/>
           <a:p>
-            <a:pPr indent="0" marL="0">
+            <a:pPr marL="0" indent="0">
               <a:buNone/>
             </a:pPr>
             <a:r>
@@ -9299,7 +8996,7 @@
           <a:bodyPr wrap="square" lIns="0" tIns="0" rIns="0" bIns="0" rtlCol="0" anchor="ctr"/>
           <a:lstStyle/>
           <a:p>
-            <a:pPr indent="0" marL="0">
+            <a:pPr marL="0" indent="0">
               <a:buNone/>
             </a:pPr>
             <a:r>
@@ -9333,6 +9030,7 @@
         <a:solidFill>
           <a:srgbClr val="0D0B1E"/>
         </a:solidFill>
+        <a:effectLst/>
       </p:bgPr>
     </p:bg>
     <p:spTree>
@@ -9370,11 +9068,11 @@
           <a:bodyPr wrap="square" lIns="0" tIns="0" rIns="0" bIns="0" rtlCol="0" anchor="ctr"/>
           <a:lstStyle/>
           <a:p>
-            <a:pPr indent="0" marL="0">
-              <a:buNone/>
-            </a:pPr>
-            <a:r>
-              <a:rPr lang="en-US" sz="1300" b="1" spc="400" kern="0" dirty="0">
+            <a:pPr marL="0" indent="0">
+              <a:buNone/>
+            </a:pPr>
+            <a:r>
+              <a:rPr lang="en-US" sz="1300" b="1" kern="0" spc="400" dirty="0">
                 <a:solidFill>
                   <a:srgbClr val="A29BFE"/>
                 </a:solidFill>
@@ -9409,7 +9107,7 @@
           <a:bodyPr wrap="square" lIns="0" tIns="0" rIns="0" bIns="0" rtlCol="0" anchor="ctr"/>
           <a:lstStyle/>
           <a:p>
-            <a:pPr indent="0" marL="0">
+            <a:pPr marL="0" indent="0">
               <a:buNone/>
             </a:pPr>
             <a:r>
@@ -9515,7 +9213,7 @@
           <a:bodyPr wrap="square" lIns="0" tIns="0" rIns="0" bIns="0" rtlCol="0" anchor="ctr"/>
           <a:lstStyle/>
           <a:p>
-            <a:pPr indent="0" marL="0">
+            <a:pPr marL="0" indent="0">
               <a:buNone/>
             </a:pPr>
             <a:r>
@@ -9554,7 +9252,7 @@
           <a:bodyPr wrap="square" lIns="0" tIns="0" rIns="0" bIns="0" rtlCol="0" anchor="ctr"/>
           <a:lstStyle/>
           <a:p>
-            <a:pPr indent="0" marL="0">
+            <a:pPr marL="0" indent="0">
               <a:buNone/>
             </a:pPr>
             <a:r>
@@ -9593,7 +9291,7 @@
           <a:bodyPr wrap="square" lIns="0" tIns="0" rIns="0" bIns="0" rtlCol="0" anchor="ctr"/>
           <a:lstStyle/>
           <a:p>
-            <a:pPr indent="0" marL="0">
+            <a:pPr marL="0" indent="0">
               <a:buNone/>
             </a:pPr>
             <a:r>
@@ -9679,7 +9377,7 @@
           <a:bodyPr wrap="square" lIns="0" tIns="0" rIns="0" bIns="0" rtlCol="0" anchor="ctr"/>
           <a:lstStyle/>
           <a:p>
-            <a:pPr indent="0" marL="0">
+            <a:pPr marL="0" indent="0">
               <a:buNone/>
             </a:pPr>
             <a:r>
@@ -9718,7 +9416,7 @@
           <a:bodyPr wrap="square" lIns="0" tIns="0" rIns="0" bIns="0" rtlCol="0" anchor="ctr"/>
           <a:lstStyle/>
           <a:p>
-            <a:pPr indent="0" marL="0">
+            <a:pPr marL="0" indent="0">
               <a:buNone/>
             </a:pPr>
             <a:r>
@@ -9757,7 +9455,7 @@
           <a:bodyPr wrap="square" lIns="0" tIns="0" rIns="0" bIns="0" rtlCol="0" anchor="ctr"/>
           <a:lstStyle/>
           <a:p>
-            <a:pPr indent="0" marL="0">
+            <a:pPr marL="0" indent="0">
               <a:buNone/>
             </a:pPr>
             <a:r>
@@ -9843,7 +9541,7 @@
           <a:bodyPr wrap="square" lIns="0" tIns="0" rIns="0" bIns="0" rtlCol="0" anchor="ctr"/>
           <a:lstStyle/>
           <a:p>
-            <a:pPr indent="0" marL="0">
+            <a:pPr marL="0" indent="0">
               <a:buNone/>
             </a:pPr>
             <a:r>
@@ -9882,7 +9580,7 @@
           <a:bodyPr wrap="square" lIns="0" tIns="0" rIns="0" bIns="0" rtlCol="0" anchor="ctr"/>
           <a:lstStyle/>
           <a:p>
-            <a:pPr indent="0" marL="0">
+            <a:pPr marL="0" indent="0">
               <a:buNone/>
             </a:pPr>
             <a:r>
@@ -9921,7 +9619,7 @@
           <a:bodyPr wrap="square" lIns="0" tIns="0" rIns="0" bIns="0" rtlCol="0" anchor="ctr"/>
           <a:lstStyle/>
           <a:p>
-            <a:pPr indent="0" marL="0">
+            <a:pPr marL="0" indent="0">
               <a:buNone/>
             </a:pPr>
             <a:r>
@@ -9960,7 +9658,7 @@
           <a:bodyPr wrap="square" lIns="0" tIns="0" rIns="0" bIns="0" rtlCol="0" anchor="ctr"/>
           <a:lstStyle/>
           <a:p>
-            <a:pPr algn="ctr" indent="0" marL="0">
+            <a:pPr marL="0" indent="0" algn="ctr">
               <a:buNone/>
             </a:pPr>
             <a:r>
@@ -9994,6 +9692,7 @@
         <a:solidFill>
           <a:srgbClr val="0D0B1E"/>
         </a:solidFill>
+        <a:effectLst/>
       </p:bgPr>
     </p:bg>
     <p:spTree>
@@ -10031,11 +9730,11 @@
           <a:bodyPr wrap="square" lIns="0" tIns="0" rIns="0" bIns="0" rtlCol="0" anchor="ctr"/>
           <a:lstStyle/>
           <a:p>
-            <a:pPr indent="0" marL="0">
-              <a:buNone/>
-            </a:pPr>
-            <a:r>
-              <a:rPr lang="en-US" sz="1300" b="1" spc="400" kern="0" dirty="0">
+            <a:pPr marL="0" indent="0">
+              <a:buNone/>
+            </a:pPr>
+            <a:r>
+              <a:rPr lang="en-US" sz="1300" b="1" kern="0" spc="400" dirty="0">
                 <a:solidFill>
                   <a:srgbClr val="A29BFE"/>
                 </a:solidFill>
@@ -10070,7 +9769,7 @@
           <a:bodyPr wrap="square" lIns="0" tIns="0" rIns="0" bIns="0" rtlCol="0" anchor="ctr"/>
           <a:lstStyle/>
           <a:p>
-            <a:pPr indent="0" marL="0">
+            <a:pPr marL="0" indent="0">
               <a:buNone/>
             </a:pPr>
             <a:r>
@@ -10176,7 +9875,7 @@
           <a:bodyPr wrap="square" lIns="0" tIns="0" rIns="0" bIns="0" rtlCol="0" anchor="ctr"/>
           <a:lstStyle/>
           <a:p>
-            <a:pPr indent="0" marL="0">
+            <a:pPr marL="0" indent="0">
               <a:buNone/>
             </a:pPr>
             <a:r>
@@ -10215,7 +9914,7 @@
           <a:bodyPr wrap="square" lIns="0" tIns="0" rIns="0" bIns="0" rtlCol="0" anchor="ctr"/>
           <a:lstStyle/>
           <a:p>
-            <a:pPr indent="0" marL="0">
+            <a:pPr marL="0" indent="0">
               <a:buNone/>
             </a:pPr>
             <a:r>
@@ -10301,7 +10000,7 @@
           <a:bodyPr wrap="square" lIns="0" tIns="0" rIns="0" bIns="0" rtlCol="0" anchor="ctr"/>
           <a:lstStyle/>
           <a:p>
-            <a:pPr indent="0" marL="0">
+            <a:pPr marL="0" indent="0">
               <a:buNone/>
             </a:pPr>
             <a:r>
@@ -10340,7 +10039,7 @@
           <a:bodyPr wrap="square" lIns="0" tIns="0" rIns="0" bIns="0" rtlCol="0" anchor="ctr"/>
           <a:lstStyle/>
           <a:p>
-            <a:pPr indent="0" marL="0">
+            <a:pPr marL="0" indent="0">
               <a:buNone/>
             </a:pPr>
             <a:r>
@@ -10426,7 +10125,7 @@
           <a:bodyPr wrap="square" lIns="0" tIns="0" rIns="0" bIns="0" rtlCol="0" anchor="ctr"/>
           <a:lstStyle/>
           <a:p>
-            <a:pPr indent="0" marL="0">
+            <a:pPr marL="0" indent="0">
               <a:buNone/>
             </a:pPr>
             <a:r>
@@ -10465,7 +10164,7 @@
           <a:bodyPr wrap="square" lIns="0" tIns="0" rIns="0" bIns="0" rtlCol="0" anchor="ctr"/>
           <a:lstStyle/>
           <a:p>
-            <a:pPr indent="0" marL="0">
+            <a:pPr marL="0" indent="0">
               <a:buNone/>
             </a:pPr>
             <a:r>
@@ -10526,7 +10225,7 @@
           <a:bodyPr wrap="square" lIns="0" tIns="0" rIns="0" bIns="0" rtlCol="0" anchor="ctr"/>
           <a:lstStyle/>
           <a:p>
-            <a:pPr indent="0" marL="0">
+            <a:pPr marL="0" indent="0">
               <a:buNone/>
             </a:pPr>
             <a:r>
@@ -10587,7 +10286,7 @@
           <a:bodyPr wrap="square" lIns="0" tIns="0" rIns="0" bIns="0" rtlCol="0" anchor="ctr"/>
           <a:lstStyle/>
           <a:p>
-            <a:pPr indent="0" marL="0">
+            <a:pPr marL="0" indent="0">
               <a:buNone/>
             </a:pPr>
             <a:r>
@@ -10706,7 +10405,7 @@
           <a:bodyPr wrap="square" lIns="0" tIns="0" rIns="0" bIns="0" rtlCol="0" anchor="ctr"/>
           <a:lstStyle/>
           <a:p>
-            <a:pPr indent="0" marL="0">
+            <a:pPr marL="0" indent="0">
               <a:buNone/>
             </a:pPr>
             <a:r>
@@ -10768,7 +10467,7 @@
           <a:bodyPr wrap="square" lIns="0" tIns="0" rIns="0" bIns="0" rtlCol="0" anchor="ctr"/>
           <a:lstStyle/>
           <a:p>
-            <a:pPr indent="0" marL="0">
+            <a:pPr marL="0" indent="0">
               <a:buNone/>
             </a:pPr>
             <a:r>
@@ -10802,6 +10501,7 @@
         <a:solidFill>
           <a:srgbClr val="0D0B1E"/>
         </a:solidFill>
+        <a:effectLst/>
       </p:bgPr>
     </p:bg>
     <p:spTree>
@@ -10839,11 +10539,11 @@
           <a:bodyPr wrap="square" lIns="0" tIns="0" rIns="0" bIns="0" rtlCol="0" anchor="ctr"/>
           <a:lstStyle/>
           <a:p>
-            <a:pPr indent="0" marL="0">
-              <a:buNone/>
-            </a:pPr>
-            <a:r>
-              <a:rPr lang="en-US" sz="1300" b="1" spc="400" kern="0" dirty="0">
+            <a:pPr marL="0" indent="0">
+              <a:buNone/>
+            </a:pPr>
+            <a:r>
+              <a:rPr lang="en-US" sz="1300" b="1" kern="0" spc="400" dirty="0">
                 <a:solidFill>
                   <a:srgbClr val="A29BFE"/>
                 </a:solidFill>
@@ -10878,7 +10578,7 @@
           <a:bodyPr wrap="square" lIns="0" tIns="0" rIns="0" bIns="0" rtlCol="0" anchor="ctr"/>
           <a:lstStyle/>
           <a:p>
-            <a:pPr indent="0" marL="0">
+            <a:pPr marL="0" indent="0">
               <a:buNone/>
             </a:pPr>
             <a:r>
@@ -10984,7 +10684,7 @@
           <a:bodyPr wrap="square" lIns="0" tIns="0" rIns="0" bIns="0" rtlCol="0" anchor="ctr"/>
           <a:lstStyle/>
           <a:p>
-            <a:pPr indent="0" marL="0">
+            <a:pPr marL="0" indent="0">
               <a:buNone/>
             </a:pPr>
             <a:r>
@@ -11023,7 +10723,7 @@
           <a:bodyPr wrap="square" lIns="0" tIns="0" rIns="0" bIns="0" rtlCol="0" anchor="ctr"/>
           <a:lstStyle/>
           <a:p>
-            <a:pPr indent="0" marL="0">
+            <a:pPr marL="0" indent="0">
               <a:buNone/>
             </a:pPr>
             <a:r>
@@ -11109,7 +10809,7 @@
           <a:bodyPr wrap="square" lIns="0" tIns="0" rIns="0" bIns="0" rtlCol="0" anchor="ctr"/>
           <a:lstStyle/>
           <a:p>
-            <a:pPr indent="0" marL="0">
+            <a:pPr marL="0" indent="0">
               <a:buNone/>
             </a:pPr>
             <a:r>
@@ -11148,7 +10848,7 @@
           <a:bodyPr wrap="square" lIns="0" tIns="0" rIns="0" bIns="0" rtlCol="0" anchor="ctr"/>
           <a:lstStyle/>
           <a:p>
-            <a:pPr indent="0" marL="0">
+            <a:pPr marL="0" indent="0">
               <a:buNone/>
             </a:pPr>
             <a:r>
@@ -11234,7 +10934,7 @@
           <a:bodyPr wrap="square" lIns="0" tIns="0" rIns="0" bIns="0" rtlCol="0" anchor="ctr"/>
           <a:lstStyle/>
           <a:p>
-            <a:pPr indent="0" marL="0">
+            <a:pPr marL="0" indent="0">
               <a:buNone/>
             </a:pPr>
             <a:r>
@@ -11273,7 +10973,7 @@
           <a:bodyPr wrap="square" lIns="0" tIns="0" rIns="0" bIns="0" rtlCol="0" anchor="ctr"/>
           <a:lstStyle/>
           <a:p>
-            <a:pPr indent="0" marL="0">
+            <a:pPr marL="0" indent="0">
               <a:buNone/>
             </a:pPr>
             <a:r>
@@ -11359,7 +11059,7 @@
           <a:bodyPr wrap="square" lIns="0" tIns="0" rIns="0" bIns="0" rtlCol="0" anchor="ctr"/>
           <a:lstStyle/>
           <a:p>
-            <a:pPr indent="0" marL="0">
+            <a:pPr marL="0" indent="0">
               <a:buNone/>
             </a:pPr>
             <a:r>
@@ -11398,7 +11098,7 @@
           <a:bodyPr wrap="square" lIns="0" tIns="0" rIns="0" bIns="0" rtlCol="0" anchor="ctr"/>
           <a:lstStyle/>
           <a:p>
-            <a:pPr indent="0" marL="0">
+            <a:pPr marL="0" indent="0">
               <a:buNone/>
             </a:pPr>
             <a:r>
@@ -11484,7 +11184,7 @@
           <a:bodyPr wrap="square" lIns="0" tIns="0" rIns="0" bIns="0" rtlCol="0" anchor="ctr"/>
           <a:lstStyle/>
           <a:p>
-            <a:pPr indent="0" marL="0">
+            <a:pPr marL="0" indent="0">
               <a:buNone/>
             </a:pPr>
             <a:r>
@@ -11523,7 +11223,7 @@
           <a:bodyPr wrap="square" lIns="0" tIns="0" rIns="0" bIns="0" rtlCol="0" anchor="ctr"/>
           <a:lstStyle/>
           <a:p>
-            <a:pPr indent="0" marL="0">
+            <a:pPr marL="0" indent="0">
               <a:buNone/>
             </a:pPr>
             <a:r>
@@ -11609,7 +11309,7 @@
           <a:bodyPr wrap="square" lIns="0" tIns="0" rIns="0" bIns="0" rtlCol="0" anchor="ctr"/>
           <a:lstStyle/>
           <a:p>
-            <a:pPr indent="0" marL="0">
+            <a:pPr marL="0" indent="0">
               <a:buNone/>
             </a:pPr>
             <a:r>
@@ -11648,7 +11348,7 @@
           <a:bodyPr wrap="square" lIns="0" tIns="0" rIns="0" bIns="0" rtlCol="0" anchor="ctr"/>
           <a:lstStyle/>
           <a:p>
-            <a:pPr indent="0" marL="0">
+            <a:pPr marL="0" indent="0">
               <a:buNone/>
             </a:pPr>
             <a:r>
@@ -11967,4 +11667,299 @@
     </a:ext>
   </a:extLst>
 </a:theme>
+</file>
+
+<file path=ppt/theme/theme2.xml><?xml version="1.0" encoding="utf-8"?>
+<a:theme xmlns:a="http://schemas.openxmlformats.org/drawingml/2006/main" name="Office Theme">
+  <a:themeElements>
+    <a:clrScheme name="Office">
+      <a:dk1>
+        <a:sysClr val="windowText" lastClr="000000"/>
+      </a:dk1>
+      <a:lt1>
+        <a:sysClr val="window" lastClr="FFFFFF"/>
+      </a:lt1>
+      <a:dk2>
+        <a:srgbClr val="44546A"/>
+      </a:dk2>
+      <a:lt2>
+        <a:srgbClr val="E7E6E6"/>
+      </a:lt2>
+      <a:accent1>
+        <a:srgbClr val="4472C4"/>
+      </a:accent1>
+      <a:accent2>
+        <a:srgbClr val="ED7D31"/>
+      </a:accent2>
+      <a:accent3>
+        <a:srgbClr val="A5A5A5"/>
+      </a:accent3>
+      <a:accent4>
+        <a:srgbClr val="FFC000"/>
+      </a:accent4>
+      <a:accent5>
+        <a:srgbClr val="5B9BD5"/>
+      </a:accent5>
+      <a:accent6>
+        <a:srgbClr val="70AD47"/>
+      </a:accent6>
+      <a:hlink>
+        <a:srgbClr val="0563C1"/>
+      </a:hlink>
+      <a:folHlink>
+        <a:srgbClr val="954F72"/>
+      </a:folHlink>
+    </a:clrScheme>
+    <a:fontScheme name="Office">
+      <a:majorFont>
+        <a:latin typeface="Calibri Light" panose="020F0302020204030204"/>
+        <a:ea typeface=""/>
+        <a:cs typeface=""/>
+        <a:font script="Jpan" typeface="游ゴシック Light"/>
+        <a:font script="Hang" typeface="맑은 고딕"/>
+        <a:font script="Hans" typeface="等线 Light"/>
+        <a:font script="Hant" typeface="新細明體"/>
+        <a:font script="Arab" typeface="Times New Roman"/>
+        <a:font script="Hebr" typeface="Times New Roman"/>
+        <a:font script="Thai" typeface="Angsana New"/>
+        <a:font script="Ethi" typeface="Nyala"/>
+        <a:font script="Beng" typeface="Vrinda"/>
+        <a:font script="Gujr" typeface="Shruti"/>
+        <a:font script="Khmr" typeface="MoolBoran"/>
+        <a:font script="Knda" typeface="Tunga"/>
+        <a:font script="Guru" typeface="Raavi"/>
+        <a:font script="Cans" typeface="Euphemia"/>
+        <a:font script="Cher" typeface="Plantagenet Cherokee"/>
+        <a:font script="Yiii" typeface="Microsoft Yi Baiti"/>
+        <a:font script="Tibt" typeface="Microsoft Himalaya"/>
+        <a:font script="Thaa" typeface="MV Boli"/>
+        <a:font script="Deva" typeface="Mangal"/>
+        <a:font script="Telu" typeface="Gautami"/>
+        <a:font script="Taml" typeface="Latha"/>
+        <a:font script="Syrc" typeface="Estrangelo Edessa"/>
+        <a:font script="Orya" typeface="Kalinga"/>
+        <a:font script="Mlym" typeface="Kartika"/>
+        <a:font script="Laoo" typeface="DokChampa"/>
+        <a:font script="Sinh" typeface="Iskoola Pota"/>
+        <a:font script="Mong" typeface="Mongolian Baiti"/>
+        <a:font script="Viet" typeface="Times New Roman"/>
+        <a:font script="Uigh" typeface="Microsoft Uighur"/>
+        <a:font script="Geor" typeface="Sylfaen"/>
+        <a:font script="Armn" typeface="Arial"/>
+        <a:font script="Bugi" typeface="Leelawadee UI"/>
+        <a:font script="Bopo" typeface="Microsoft JhengHei"/>
+        <a:font script="Java" typeface="Javanese Text"/>
+        <a:font script="Lisu" typeface="Segoe UI"/>
+        <a:font script="Mymr" typeface="Myanmar Text"/>
+        <a:font script="Nkoo" typeface="Ebrima"/>
+        <a:font script="Olck" typeface="Nirmala UI"/>
+        <a:font script="Osma" typeface="Ebrima"/>
+        <a:font script="Phag" typeface="Phagspa"/>
+        <a:font script="Syrn" typeface="Estrangelo Edessa"/>
+        <a:font script="Syrj" typeface="Estrangelo Edessa"/>
+        <a:font script="Syre" typeface="Estrangelo Edessa"/>
+        <a:font script="Sora" typeface="Nirmala UI"/>
+        <a:font script="Tale" typeface="Microsoft Tai Le"/>
+        <a:font script="Talu" typeface="Microsoft New Tai Lue"/>
+        <a:font script="Tfng" typeface="Ebrima"/>
+      </a:majorFont>
+      <a:minorFont>
+        <a:latin typeface="Calibri" panose="020F0502020204030204"/>
+        <a:ea typeface=""/>
+        <a:cs typeface=""/>
+        <a:font script="Jpan" typeface="游ゴシック"/>
+        <a:font script="Hang" typeface="맑은 고딕"/>
+        <a:font script="Hans" typeface="等线"/>
+        <a:font script="Hant" typeface="新細明體"/>
+        <a:font script="Arab" typeface="Arial"/>
+        <a:font script="Hebr" typeface="Arial"/>
+        <a:font script="Thai" typeface="Cordia New"/>
+        <a:font script="Ethi" typeface="Nyala"/>
+        <a:font script="Beng" typeface="Vrinda"/>
+        <a:font script="Gujr" typeface="Shruti"/>
+        <a:font script="Khmr" typeface="DaunPenh"/>
+        <a:font script="Knda" typeface="Tunga"/>
+        <a:font script="Guru" typeface="Raavi"/>
+        <a:font script="Cans" typeface="Euphemia"/>
+        <a:font script="Cher" typeface="Plantagenet Cherokee"/>
+        <a:font script="Yiii" typeface="Microsoft Yi Baiti"/>
+        <a:font script="Tibt" typeface="Microsoft Himalaya"/>
+        <a:font script="Thaa" typeface="MV Boli"/>
+        <a:font script="Deva" typeface="Mangal"/>
+        <a:font script="Telu" typeface="Gautami"/>
+        <a:font script="Taml" typeface="Latha"/>
+        <a:font script="Syrc" typeface="Estrangelo Edessa"/>
+        <a:font script="Orya" typeface="Kalinga"/>
+        <a:font script="Mlym" typeface="Kartika"/>
+        <a:font script="Laoo" typeface="DokChampa"/>
+        <a:font script="Sinh" typeface="Iskoola Pota"/>
+        <a:font script="Mong" typeface="Mongolian Baiti"/>
+        <a:font script="Viet" typeface="Arial"/>
+        <a:font script="Uigh" typeface="Microsoft Uighur"/>
+        <a:font script="Geor" typeface="Sylfaen"/>
+        <a:font script="Armn" typeface="Arial"/>
+        <a:font script="Bugi" typeface="Leelawadee UI"/>
+        <a:font script="Bopo" typeface="Microsoft JhengHei"/>
+        <a:font script="Java" typeface="Javanese Text"/>
+        <a:font script="Lisu" typeface="Segoe UI"/>
+        <a:font script="Mymr" typeface="Myanmar Text"/>
+        <a:font script="Nkoo" typeface="Ebrima"/>
+        <a:font script="Olck" typeface="Nirmala UI"/>
+        <a:font script="Osma" typeface="Ebrima"/>
+        <a:font script="Phag" typeface="Phagspa"/>
+        <a:font script="Syrn" typeface="Estrangelo Edessa"/>
+        <a:font script="Syrj" typeface="Estrangelo Edessa"/>
+        <a:font script="Syre" typeface="Estrangelo Edessa"/>
+        <a:font script="Sora" typeface="Nirmala UI"/>
+        <a:font script="Tale" typeface="Microsoft Tai Le"/>
+        <a:font script="Talu" typeface="Microsoft New Tai Lue"/>
+        <a:font script="Tfng" typeface="Ebrima"/>
+      </a:minorFont>
+    </a:fontScheme>
+    <a:fmtScheme name="Office">
+      <a:fillStyleLst>
+        <a:solidFill>
+          <a:schemeClr val="phClr"/>
+        </a:solidFill>
+        <a:gradFill rotWithShape="1">
+          <a:gsLst>
+            <a:gs pos="0">
+              <a:schemeClr val="phClr">
+                <a:lumMod val="110000"/>
+                <a:satMod val="105000"/>
+                <a:tint val="67000"/>
+              </a:schemeClr>
+            </a:gs>
+            <a:gs pos="50000">
+              <a:schemeClr val="phClr">
+                <a:lumMod val="105000"/>
+                <a:satMod val="103000"/>
+                <a:tint val="73000"/>
+              </a:schemeClr>
+            </a:gs>
+            <a:gs pos="100000">
+              <a:schemeClr val="phClr">
+                <a:lumMod val="105000"/>
+                <a:satMod val="109000"/>
+                <a:tint val="81000"/>
+              </a:schemeClr>
+            </a:gs>
+          </a:gsLst>
+          <a:lin ang="5400000" scaled="0"/>
+        </a:gradFill>
+        <a:gradFill rotWithShape="1">
+          <a:gsLst>
+            <a:gs pos="0">
+              <a:schemeClr val="phClr">
+                <a:satMod val="103000"/>
+                <a:lumMod val="102000"/>
+                <a:tint val="94000"/>
+              </a:schemeClr>
+            </a:gs>
+            <a:gs pos="50000">
+              <a:schemeClr val="phClr">
+                <a:satMod val="110000"/>
+                <a:lumMod val="100000"/>
+                <a:shade val="100000"/>
+              </a:schemeClr>
+            </a:gs>
+            <a:gs pos="100000">
+              <a:schemeClr val="phClr">
+                <a:lumMod val="99000"/>
+                <a:satMod val="120000"/>
+                <a:shade val="78000"/>
+              </a:schemeClr>
+            </a:gs>
+          </a:gsLst>
+          <a:lin ang="5400000" scaled="0"/>
+        </a:gradFill>
+      </a:fillStyleLst>
+      <a:lnStyleLst>
+        <a:ln w="6350" cap="flat" cmpd="sng" algn="ctr">
+          <a:solidFill>
+            <a:schemeClr val="phClr"/>
+          </a:solidFill>
+          <a:prstDash val="solid"/>
+          <a:miter lim="800000"/>
+        </a:ln>
+        <a:ln w="12700" cap="flat" cmpd="sng" algn="ctr">
+          <a:solidFill>
+            <a:schemeClr val="phClr"/>
+          </a:solidFill>
+          <a:prstDash val="solid"/>
+          <a:miter lim="800000"/>
+        </a:ln>
+        <a:ln w="19050" cap="flat" cmpd="sng" algn="ctr">
+          <a:solidFill>
+            <a:schemeClr val="phClr"/>
+          </a:solidFill>
+          <a:prstDash val="solid"/>
+          <a:miter lim="800000"/>
+        </a:ln>
+      </a:lnStyleLst>
+      <a:effectStyleLst>
+        <a:effectStyle>
+          <a:effectLst/>
+        </a:effectStyle>
+        <a:effectStyle>
+          <a:effectLst/>
+        </a:effectStyle>
+        <a:effectStyle>
+          <a:effectLst>
+            <a:outerShdw blurRad="57150" dist="19050" dir="5400000" algn="ctr" rotWithShape="0">
+              <a:srgbClr val="000000">
+                <a:alpha val="63000"/>
+              </a:srgbClr>
+            </a:outerShdw>
+          </a:effectLst>
+        </a:effectStyle>
+      </a:effectStyleLst>
+      <a:bgFillStyleLst>
+        <a:solidFill>
+          <a:schemeClr val="phClr"/>
+        </a:solidFill>
+        <a:solidFill>
+          <a:schemeClr val="phClr">
+            <a:tint val="95000"/>
+            <a:satMod val="170000"/>
+          </a:schemeClr>
+        </a:solidFill>
+        <a:gradFill rotWithShape="1">
+          <a:gsLst>
+            <a:gs pos="0">
+              <a:schemeClr val="phClr">
+                <a:tint val="93000"/>
+                <a:satMod val="150000"/>
+                <a:shade val="98000"/>
+                <a:lumMod val="102000"/>
+              </a:schemeClr>
+            </a:gs>
+            <a:gs pos="50000">
+              <a:schemeClr val="phClr">
+                <a:tint val="98000"/>
+                <a:satMod val="130000"/>
+                <a:shade val="90000"/>
+                <a:lumMod val="103000"/>
+              </a:schemeClr>
+            </a:gs>
+            <a:gs pos="100000">
+              <a:schemeClr val="phClr">
+                <a:shade val="63000"/>
+                <a:satMod val="120000"/>
+              </a:schemeClr>
+            </a:gs>
+          </a:gsLst>
+          <a:lin ang="5400000" scaled="0"/>
+        </a:gradFill>
+      </a:bgFillStyleLst>
+    </a:fmtScheme>
+  </a:themeElements>
+  <a:objectDefaults/>
+  <a:extraClrSchemeLst/>
+  <a:extLst>
+    <a:ext uri="{05A4C25C-085E-4340-85A3-A5531E510DB2}">
+      <thm15:themeFamily xmlns:thm15="http://schemas.microsoft.com/office/thememl/2012/main" name="Office Theme" id="{62F939B6-93AF-4DB8-9C6B-D6C7DFDC589F}" vid="{4A3C46E8-61CC-4603-A589-7422A47A8E4A}"/>
+    </a:ext>
+  </a:extLst>
+</a:theme>
 </file>
--- a/FrontRow-Presentation.pptx
+++ b/FrontRow-Presentation.pptx
@@ -5,7 +5,7 @@
     <p:sldMasterId id="2147483648" r:id="rId1"/>
   </p:sldMasterIdLst>
   <p:notesMasterIdLst>
-    <p:notesMasterId r:id="rId14"/>
+    <p:notesMasterId r:id="rId15"/>
   </p:notesMasterIdLst>
   <p:sldIdLst>
     <p:sldId id="256" r:id="rId2"/>
@@ -14,12 +14,13 @@
     <p:sldId id="259" r:id="rId5"/>
     <p:sldId id="260" r:id="rId6"/>
     <p:sldId id="261" r:id="rId7"/>
-    <p:sldId id="262" r:id="rId8"/>
-    <p:sldId id="263" r:id="rId9"/>
-    <p:sldId id="264" r:id="rId10"/>
+    <p:sldId id="264" r:id="rId8"/>
+    <p:sldId id="262" r:id="rId9"/>
+    <p:sldId id="263" r:id="rId10"/>
     <p:sldId id="265" r:id="rId11"/>
     <p:sldId id="266" r:id="rId12"/>
     <p:sldId id="267" r:id="rId13"/>
+    <p:sldId id="268" r:id="rId14"/>
   </p:sldIdLst>
   <p:sldSz cx="9144000" cy="5143500" type="screen16x9"/>
   <p:notesSz cx="5143500" cy="9144000"/>
@@ -148,7 +149,7 @@
     </p:spTree>
     <p:extLst>
       <p:ext uri="{BB962C8B-B14F-4D97-AF65-F5344CB8AC3E}">
-        <p14:creationId xmlns:p14="http://schemas.microsoft.com/office/powerpoint/2010/main" val="2984908180"/>
+        <p14:creationId xmlns:p14="http://schemas.microsoft.com/office/powerpoint/2010/main" val="2327939157"/>
       </p:ext>
     </p:extLst>
   </p:cSld>
@@ -584,6 +585,90 @@
 </p:notes>
 </file>
 
+<file path=ppt/notesSlides/notesSlide13.xml><?xml version="1.0" encoding="utf-8"?>
+<p:notes xmlns:a="http://schemas.openxmlformats.org/drawingml/2006/main" xmlns:r="http://schemas.openxmlformats.org/officeDocument/2006/relationships" xmlns:p="http://schemas.openxmlformats.org/presentationml/2006/main">
+  <p:cSld>
+    <p:spTree>
+      <p:nvGrpSpPr>
+        <p:cNvPr id="1" name=""/>
+        <p:cNvGrpSpPr/>
+        <p:nvPr/>
+      </p:nvGrpSpPr>
+      <p:grpSpPr>
+        <a:xfrm>
+          <a:off x="0" y="0"/>
+          <a:ext cx="0" cy="0"/>
+          <a:chOff x="0" y="0"/>
+          <a:chExt cx="0" cy="0"/>
+        </a:xfrm>
+      </p:grpSpPr>
+      <p:sp>
+        <p:nvSpPr>
+          <p:cNvPr id="2" name="Slide Image Placeholder 1"/>
+          <p:cNvSpPr>
+            <a:spLocks noGrp="1" noRot="1" noChangeAspect="1"/>
+          </p:cNvSpPr>
+          <p:nvPr>
+            <p:ph type="sldImg"/>
+          </p:nvPr>
+        </p:nvSpPr>
+        <p:spPr/>
+      </p:sp>
+      <p:sp>
+        <p:nvSpPr>
+          <p:cNvPr id="3" name="Notes Placeholder 2"/>
+          <p:cNvSpPr>
+            <a:spLocks noGrp="1"/>
+          </p:cNvSpPr>
+          <p:nvPr>
+            <p:ph type="body" idx="1"/>
+          </p:nvPr>
+        </p:nvSpPr>
+        <p:spPr/>
+        <p:txBody>
+          <a:bodyPr/>
+          <a:lstStyle/>
+          <a:p>
+            <a:endParaRPr lang="en-US" dirty="0"/>
+          </a:p>
+        </p:txBody>
+      </p:sp>
+      <p:sp>
+        <p:nvSpPr>
+          <p:cNvPr id="4" name="Slide Number Placeholder 3"/>
+          <p:cNvSpPr>
+            <a:spLocks noGrp="1"/>
+          </p:cNvSpPr>
+          <p:nvPr>
+            <p:ph type="sldNum" sz="quarter" idx="10"/>
+          </p:nvPr>
+        </p:nvSpPr>
+        <p:spPr/>
+        <p:txBody>
+          <a:bodyPr/>
+          <a:lstStyle/>
+          <a:p>
+            <a:fld id="{F7021451-1387-4CA6-816F-3879F97B5CBC}" type="slidenum">
+              <a:rPr lang="en-US"/>
+              <a:t>13</a:t>
+            </a:fld>
+            <a:endParaRPr lang="en-US"/>
+          </a:p>
+        </p:txBody>
+      </p:sp>
+    </p:spTree>
+    <p:extLst>
+      <p:ext uri="{BB962C8B-B14F-4D97-AF65-F5344CB8AC3E}">
+        <p14:creationId xmlns:p14="http://schemas.microsoft.com/office/powerpoint/2010/main" val="1024086991"/>
+      </p:ext>
+    </p:extLst>
+  </p:cSld>
+  <p:clrMapOvr>
+    <a:masterClrMapping/>
+  </p:clrMapOvr>
+</p:notes>
+</file>
+
 <file path=ppt/notesSlides/notesSlide2.xml><?xml version="1.0" encoding="utf-8"?>
 <p:notes xmlns:a="http://schemas.openxmlformats.org/drawingml/2006/main" xmlns:r="http://schemas.openxmlformats.org/officeDocument/2006/relationships" xmlns:p="http://schemas.openxmlformats.org/presentationml/2006/main">
   <p:cSld>
@@ -1836,7 +1921,6 @@
               </a:rPr>
               <a:t>Berbecar David</a:t>
             </a:r>
-            <a:endParaRPr lang="en-US" sz="1200" dirty="0"/>
           </a:p>
         </p:txBody>
       </p:sp>
@@ -1906,7 +1990,7 @@
                 <a:ea typeface="Calibri" pitchFamily="34" charset="-122"/>
                 <a:cs typeface="Calibri" pitchFamily="34" charset="-120"/>
               </a:rPr>
-              <a:t>FOR ORGANIZERS</a:t>
+              <a:t>FEATURE</a:t>
             </a:r>
             <a:endParaRPr lang="en-US" sz="1300" dirty="0"/>
           </a:p>
@@ -1945,7 +2029,7 @@
                 <a:ea typeface="Calibri" pitchFamily="34" charset="-122"/>
                 <a:cs typeface="Calibri" pitchFamily="34" charset="-120"/>
               </a:rPr>
-              <a:t>Admin &amp; Organizer Tools</a:t>
+              <a:t>Security &amp; Trust</a:t>
             </a:r>
             <a:endParaRPr lang="en-US" sz="3100" dirty="0"/>
           </a:p>
@@ -1980,11 +2064,11 @@
         <p:spPr>
           <a:xfrm>
             <a:off x="502920" y="1371600"/>
-            <a:ext cx="2587752" cy="1600200"/>
+            <a:ext cx="2587752" cy="1645920"/>
           </a:xfrm>
           <a:prstGeom prst="roundRect">
             <a:avLst>
-              <a:gd name="adj" fmla="val 4000"/>
+              <a:gd name="adj" fmla="val 3889"/>
             </a:avLst>
           </a:prstGeom>
           <a:solidFill>
@@ -2006,8 +2090,8 @@
         </p:nvSpPr>
         <p:spPr>
           <a:xfrm>
-            <a:off x="502920" y="1371600"/>
-            <a:ext cx="2587752" cy="54864"/>
+            <a:off x="685800" y="1609344"/>
+            <a:ext cx="320040" cy="54864"/>
           </a:xfrm>
           <a:prstGeom prst="rect">
             <a:avLst/>
@@ -2026,7 +2110,7 @@
         </p:nvSpPr>
         <p:spPr>
           <a:xfrm>
-            <a:off x="685800" y="1591056"/>
+            <a:off x="685800" y="1755648"/>
             <a:ext cx="2221992" cy="292608"/>
           </a:xfrm>
           <a:prstGeom prst="rect">
@@ -2045,13 +2129,13 @@
             <a:r>
               <a:rPr lang="en-US" sz="1400" b="1" dirty="0">
                 <a:solidFill>
-                  <a:srgbClr val="A29BFE"/>
-                </a:solidFill>
-                <a:latin typeface="Calibri" pitchFamily="34" charset="0"/>
-                <a:ea typeface="Calibri" pitchFamily="34" charset="-122"/>
-                <a:cs typeface="Calibri" pitchFamily="34" charset="-120"/>
-              </a:rPr>
-              <a:t>Revenue dashboard</a:t>
+                  <a:srgbClr val="FFFFFF"/>
+                </a:solidFill>
+                <a:latin typeface="Calibri" pitchFamily="34" charset="0"/>
+                <a:ea typeface="Calibri" pitchFamily="34" charset="-122"/>
+                <a:cs typeface="Calibri" pitchFamily="34" charset="-120"/>
+              </a:rPr>
+              <a:t>JWT sessions</a:t>
             </a:r>
             <a:endParaRPr lang="en-US" sz="1400" dirty="0"/>
           </a:p>
@@ -2065,8 +2149,8 @@
         </p:nvSpPr>
         <p:spPr>
           <a:xfrm>
-            <a:off x="685800" y="1938528"/>
-            <a:ext cx="2221992" cy="777240"/>
+            <a:off x="685800" y="2103120"/>
+            <a:ext cx="2221992" cy="731520"/>
           </a:xfrm>
           <a:prstGeom prst="rect">
             <a:avLst/>
@@ -2084,13 +2168,13 @@
             <a:r>
               <a:rPr lang="en-US" sz="1100" dirty="0">
                 <a:solidFill>
-                  <a:srgbClr val="E8E4F9"/>
-                </a:solidFill>
-                <a:latin typeface="Calibri" pitchFamily="34" charset="0"/>
-                <a:ea typeface="Calibri" pitchFamily="34" charset="-122"/>
-                <a:cs typeface="Calibri" pitchFamily="34" charset="-120"/>
-              </a:rPr>
-              <a:t>sales, totals and purchase history at a glance</a:t>
+                  <a:srgbClr val="8892A4"/>
+                </a:solidFill>
+                <a:latin typeface="Calibri" pitchFamily="34" charset="0"/>
+                <a:ea typeface="Calibri" pitchFamily="34" charset="-122"/>
+                <a:cs typeface="Calibri" pitchFamily="34" charset="-120"/>
+              </a:rPr>
+              <a:t>sliding window + rotating refresh tokens</a:t>
             </a:r>
             <a:endParaRPr lang="en-US" sz="1100" dirty="0"/>
           </a:p>
@@ -2105,11 +2189,11 @@
         <p:spPr>
           <a:xfrm>
             <a:off x="3278124" y="1371600"/>
-            <a:ext cx="2587752" cy="1600200"/>
+            <a:ext cx="2587752" cy="1645920"/>
           </a:xfrm>
           <a:prstGeom prst="roundRect">
             <a:avLst>
-              <a:gd name="adj" fmla="val 4000"/>
+              <a:gd name="adj" fmla="val 3889"/>
             </a:avLst>
           </a:prstGeom>
           <a:solidFill>
@@ -2131,8 +2215,8 @@
         </p:nvSpPr>
         <p:spPr>
           <a:xfrm>
-            <a:off x="3278124" y="1371600"/>
-            <a:ext cx="2587752" cy="54864"/>
+            <a:off x="3461004" y="1609344"/>
+            <a:ext cx="320040" cy="54864"/>
           </a:xfrm>
           <a:prstGeom prst="rect">
             <a:avLst/>
@@ -2151,7 +2235,7 @@
         </p:nvSpPr>
         <p:spPr>
           <a:xfrm>
-            <a:off x="3461004" y="1591056"/>
+            <a:off x="3461004" y="1755648"/>
             <a:ext cx="2221992" cy="292608"/>
           </a:xfrm>
           <a:prstGeom prst="rect">
@@ -2170,13 +2254,13 @@
             <a:r>
               <a:rPr lang="en-US" sz="1400" b="1" dirty="0">
                 <a:solidFill>
-                  <a:srgbClr val="A29BFE"/>
-                </a:solidFill>
-                <a:latin typeface="Calibri" pitchFamily="34" charset="0"/>
-                <a:ea typeface="Calibri" pitchFamily="34" charset="-122"/>
-                <a:cs typeface="Calibri" pitchFamily="34" charset="-120"/>
-              </a:rPr>
-              <a:t>Check-in scanner</a:t>
+                  <a:srgbClr val="FFFFFF"/>
+                </a:solidFill>
+                <a:latin typeface="Calibri" pitchFamily="34" charset="0"/>
+                <a:ea typeface="Calibri" pitchFamily="34" charset="-122"/>
+                <a:cs typeface="Calibri" pitchFamily="34" charset="-120"/>
+              </a:rPr>
+              <a:t>Email 2FA</a:t>
             </a:r>
             <a:endParaRPr lang="en-US" sz="1400" dirty="0"/>
           </a:p>
@@ -2190,8 +2274,8 @@
         </p:nvSpPr>
         <p:spPr>
           <a:xfrm>
-            <a:off x="3461004" y="1938528"/>
-            <a:ext cx="2221992" cy="777240"/>
+            <a:off x="3461004" y="2103120"/>
+            <a:ext cx="2221992" cy="731520"/>
           </a:xfrm>
           <a:prstGeom prst="rect">
             <a:avLst/>
@@ -2209,13 +2293,13 @@
             <a:r>
               <a:rPr lang="en-US" sz="1100" dirty="0">
                 <a:solidFill>
-                  <a:srgbClr val="E8E4F9"/>
-                </a:solidFill>
-                <a:latin typeface="Calibri" pitchFamily="34" charset="0"/>
-                <a:ea typeface="Calibri" pitchFamily="34" charset="-122"/>
-                <a:cs typeface="Calibri" pitchFamily="34" charset="-120"/>
-              </a:rPr>
-              <a:t>validate tickets at the door in seconds</a:t>
+                  <a:srgbClr val="8892A4"/>
+                </a:solidFill>
+                <a:latin typeface="Calibri" pitchFamily="34" charset="0"/>
+                <a:ea typeface="Calibri" pitchFamily="34" charset="-122"/>
+                <a:cs typeface="Calibri" pitchFamily="34" charset="-120"/>
+              </a:rPr>
+              <a:t>verification code required on registration</a:t>
             </a:r>
             <a:endParaRPr lang="en-US" sz="1100" dirty="0"/>
           </a:p>
@@ -2230,11 +2314,11 @@
         <p:spPr>
           <a:xfrm>
             <a:off x="6053328" y="1371600"/>
-            <a:ext cx="2587752" cy="1600200"/>
+            <a:ext cx="2587752" cy="1645920"/>
           </a:xfrm>
           <a:prstGeom prst="roundRect">
             <a:avLst>
-              <a:gd name="adj" fmla="val 4000"/>
+              <a:gd name="adj" fmla="val 3889"/>
             </a:avLst>
           </a:prstGeom>
           <a:solidFill>
@@ -2256,8 +2340,8 @@
         </p:nvSpPr>
         <p:spPr>
           <a:xfrm>
-            <a:off x="6053328" y="1371600"/>
-            <a:ext cx="2587752" cy="54864"/>
+            <a:off x="6236208" y="1609344"/>
+            <a:ext cx="320040" cy="54864"/>
           </a:xfrm>
           <a:prstGeom prst="rect">
             <a:avLst/>
@@ -2276,7 +2360,7 @@
         </p:nvSpPr>
         <p:spPr>
           <a:xfrm>
-            <a:off x="6236208" y="1591056"/>
+            <a:off x="6236208" y="1755648"/>
             <a:ext cx="2221992" cy="292608"/>
           </a:xfrm>
           <a:prstGeom prst="rect">
@@ -2295,13 +2379,13 @@
             <a:r>
               <a:rPr lang="en-US" sz="1400" b="1" dirty="0">
                 <a:solidFill>
-                  <a:srgbClr val="A29BFE"/>
-                </a:solidFill>
-                <a:latin typeface="Calibri" pitchFamily="34" charset="0"/>
-                <a:ea typeface="Calibri" pitchFamily="34" charset="-122"/>
-                <a:cs typeface="Calibri" pitchFamily="34" charset="-120"/>
-              </a:rPr>
-              <a:t>Observations</a:t>
+                  <a:srgbClr val="FFFFFF"/>
+                </a:solidFill>
+                <a:latin typeface="Calibri" pitchFamily="34" charset="0"/>
+                <a:ea typeface="Calibri" pitchFamily="34" charset="-122"/>
+                <a:cs typeface="Calibri" pitchFamily="34" charset="-120"/>
+              </a:rPr>
+              <a:t>OAuth sign-in</a:t>
             </a:r>
             <a:endParaRPr lang="en-US" sz="1400" dirty="0"/>
           </a:p>
@@ -2315,8 +2399,8 @@
         </p:nvSpPr>
         <p:spPr>
           <a:xfrm>
-            <a:off x="6236208" y="1938528"/>
-            <a:ext cx="2221992" cy="777240"/>
+            <a:off x="6236208" y="2103120"/>
+            <a:ext cx="2221992" cy="731520"/>
           </a:xfrm>
           <a:prstGeom prst="rect">
             <a:avLst/>
@@ -2334,13 +2418,13 @@
             <a:r>
               <a:rPr lang="en-US" sz="1100" dirty="0">
                 <a:solidFill>
-                  <a:srgbClr val="E8E4F9"/>
-                </a:solidFill>
-                <a:latin typeface="Calibri" pitchFamily="34" charset="0"/>
-                <a:ea typeface="Calibri" pitchFamily="34" charset="-122"/>
-                <a:cs typeface="Calibri" pitchFamily="34" charset="-120"/>
-              </a:rPr>
-              <a:t>flagged users with AI-written narratives</a:t>
+                  <a:srgbClr val="8892A4"/>
+                </a:solidFill>
+                <a:latin typeface="Calibri" pitchFamily="34" charset="0"/>
+                <a:ea typeface="Calibri" pitchFamily="34" charset="-122"/>
+                <a:cs typeface="Calibri" pitchFamily="34" charset="-120"/>
+              </a:rPr>
+              <a:t>Google and GitHub via Passport</a:t>
             </a:r>
             <a:endParaRPr lang="en-US" sz="1100" dirty="0"/>
           </a:p>
@@ -2355,11 +2439,11 @@
         <p:spPr>
           <a:xfrm>
             <a:off x="502920" y="3200400"/>
-            <a:ext cx="3977640" cy="1417320"/>
+            <a:ext cx="2587752" cy="1645920"/>
           </a:xfrm>
           <a:prstGeom prst="roundRect">
             <a:avLst>
-              <a:gd name="adj" fmla="val 4516"/>
+              <a:gd name="adj" fmla="val 3889"/>
             </a:avLst>
           </a:prstGeom>
           <a:solidFill>
@@ -2381,8 +2465,8 @@
         </p:nvSpPr>
         <p:spPr>
           <a:xfrm>
-            <a:off x="502920" y="3200400"/>
-            <a:ext cx="3977640" cy="54864"/>
+            <a:off x="685800" y="3438144"/>
+            <a:ext cx="320040" cy="54864"/>
           </a:xfrm>
           <a:prstGeom prst="rect">
             <a:avLst/>
@@ -2401,8 +2485,8 @@
         </p:nvSpPr>
         <p:spPr>
           <a:xfrm>
-            <a:off x="731520" y="3419856"/>
-            <a:ext cx="3520440" cy="292608"/>
+            <a:off x="685800" y="3584448"/>
+            <a:ext cx="2221992" cy="292608"/>
           </a:xfrm>
           <a:prstGeom prst="rect">
             <a:avLst/>
@@ -2420,13 +2504,13 @@
             <a:r>
               <a:rPr lang="en-US" sz="1400" b="1" dirty="0">
                 <a:solidFill>
-                  <a:srgbClr val="A29BFE"/>
-                </a:solidFill>
-                <a:latin typeface="Calibri" pitchFamily="34" charset="0"/>
-                <a:ea typeface="Calibri" pitchFamily="34" charset="-122"/>
-                <a:cs typeface="Calibri" pitchFamily="34" charset="-120"/>
-              </a:rPr>
-              <a:t>Event &amp; ticket management</a:t>
+                  <a:srgbClr val="FFFFFF"/>
+                </a:solidFill>
+                <a:latin typeface="Calibri" pitchFamily="34" charset="0"/>
+                <a:ea typeface="Calibri" pitchFamily="34" charset="-122"/>
+                <a:cs typeface="Calibri" pitchFamily="34" charset="-120"/>
+              </a:rPr>
+              <a:t>Roles &amp; permissions</a:t>
             </a:r>
             <a:endParaRPr lang="en-US" sz="1400" dirty="0"/>
           </a:p>
@@ -2440,8 +2524,8 @@
         </p:nvSpPr>
         <p:spPr>
           <a:xfrm>
-            <a:off x="731520" y="3767328"/>
-            <a:ext cx="3520440" cy="640080"/>
+            <a:off x="685800" y="3931920"/>
+            <a:ext cx="2221992" cy="731520"/>
           </a:xfrm>
           <a:prstGeom prst="rect">
             <a:avLst/>
@@ -2459,13 +2543,13 @@
             <a:r>
               <a:rPr lang="en-US" sz="1100" dirty="0">
                 <a:solidFill>
-                  <a:srgbClr val="E8E4F9"/>
-                </a:solidFill>
-                <a:latin typeface="Calibri" pitchFamily="34" charset="0"/>
-                <a:ea typeface="Calibri" pitchFamily="34" charset="-122"/>
-                <a:cs typeface="Calibri" pitchFamily="34" charset="-120"/>
-              </a:rPr>
-              <a:t>full create / update / delete with server-side validation</a:t>
+                  <a:srgbClr val="8892A4"/>
+                </a:solidFill>
+                <a:latin typeface="Calibri" pitchFamily="34" charset="0"/>
+                <a:ea typeface="Calibri" pitchFamily="34" charset="-122"/>
+                <a:cs typeface="Calibri" pitchFamily="34" charset="-120"/>
+              </a:rPr>
+              <a:t>granular access control per endpoint</a:t>
             </a:r>
             <a:endParaRPr lang="en-US" sz="1100" dirty="0"/>
           </a:p>
@@ -2479,12 +2563,12 @@
         </p:nvSpPr>
         <p:spPr>
           <a:xfrm>
-            <a:off x="4663440" y="3200400"/>
-            <a:ext cx="3977640" cy="1417320"/>
+            <a:off x="3278124" y="3200400"/>
+            <a:ext cx="2587752" cy="1645920"/>
           </a:xfrm>
           <a:prstGeom prst="roundRect">
             <a:avLst>
-              <a:gd name="adj" fmla="val 4516"/>
+              <a:gd name="adj" fmla="val 3889"/>
             </a:avLst>
           </a:prstGeom>
           <a:solidFill>
@@ -2506,8 +2590,8 @@
         </p:nvSpPr>
         <p:spPr>
           <a:xfrm>
-            <a:off x="4663440" y="3200400"/>
-            <a:ext cx="3977640" cy="54864"/>
+            <a:off x="3461004" y="3438144"/>
+            <a:ext cx="320040" cy="54864"/>
           </a:xfrm>
           <a:prstGeom prst="rect">
             <a:avLst/>
@@ -2526,8 +2610,8 @@
         </p:nvSpPr>
         <p:spPr>
           <a:xfrm>
-            <a:off x="4892040" y="3419856"/>
-            <a:ext cx="3520440" cy="292608"/>
+            <a:off x="3461004" y="3584448"/>
+            <a:ext cx="2221992" cy="292608"/>
           </a:xfrm>
           <a:prstGeom prst="rect">
             <a:avLst/>
@@ -2545,13 +2629,13 @@
             <a:r>
               <a:rPr lang="en-US" sz="1400" b="1" dirty="0">
                 <a:solidFill>
-                  <a:srgbClr val="A29BFE"/>
-                </a:solidFill>
-                <a:latin typeface="Calibri" pitchFamily="34" charset="0"/>
-                <a:ea typeface="Calibri" pitchFamily="34" charset="-122"/>
-                <a:cs typeface="Calibri" pitchFamily="34" charset="-120"/>
-              </a:rPr>
-              <a:t>Demo simulator</a:t>
+                  <a:srgbClr val="FFFFFF"/>
+                </a:solidFill>
+                <a:latin typeface="Calibri" pitchFamily="34" charset="0"/>
+                <a:ea typeface="Calibri" pitchFamily="34" charset="-122"/>
+                <a:cs typeface="Calibri" pitchFamily="34" charset="-120"/>
+              </a:rPr>
+              <a:t>Threat detection</a:t>
             </a:r>
             <a:endParaRPr lang="en-US" sz="1400" dirty="0"/>
           </a:p>
@@ -2565,8 +2649,8 @@
         </p:nvSpPr>
         <p:spPr>
           <a:xfrm>
-            <a:off x="4892040" y="3767328"/>
-            <a:ext cx="3520440" cy="640080"/>
+            <a:off x="3461004" y="3931920"/>
+            <a:ext cx="2221992" cy="731520"/>
           </a:xfrm>
           <a:prstGeom prst="rect">
             <a:avLst/>
@@ -2584,13 +2668,138 @@
             <a:r>
               <a:rPr lang="en-US" sz="1100" dirty="0">
                 <a:solidFill>
-                  <a:srgbClr val="E8E4F9"/>
-                </a:solidFill>
-                <a:latin typeface="Calibri" pitchFamily="34" charset="0"/>
-                <a:ea typeface="Calibri" pitchFamily="34" charset="-122"/>
-                <a:cs typeface="Calibri" pitchFamily="34" charset="-120"/>
-              </a:rPr>
-              <a:t>trigger suspicious behavior live to showcase detection</a:t>
+                  <a:srgbClr val="8892A4"/>
+                </a:solidFill>
+                <a:latin typeface="Calibri" pitchFamily="34" charset="0"/>
+                <a:ea typeface="Calibri" pitchFamily="34" charset="-122"/>
+                <a:cs typeface="Calibri" pitchFamily="34" charset="-120"/>
+              </a:rPr>
+              <a:t>rate spikes and privilege probing auto-flagged</a:t>
+            </a:r>
+            <a:endParaRPr lang="en-US" sz="1100" dirty="0"/>
+          </a:p>
+        </p:txBody>
+      </p:sp>
+      <p:sp>
+        <p:nvSpPr>
+          <p:cNvPr id="25" name="Shape 23"/>
+          <p:cNvSpPr/>
+          <p:nvPr/>
+        </p:nvSpPr>
+        <p:spPr>
+          <a:xfrm>
+            <a:off x="6053328" y="3200400"/>
+            <a:ext cx="2587752" cy="1645920"/>
+          </a:xfrm>
+          <a:prstGeom prst="roundRect">
+            <a:avLst>
+              <a:gd name="adj" fmla="val 3889"/>
+            </a:avLst>
+          </a:prstGeom>
+          <a:solidFill>
+            <a:srgbClr val="1A1535"/>
+          </a:solidFill>
+          <a:ln w="12700">
+            <a:solidFill>
+              <a:srgbClr val="2A2050"/>
+            </a:solidFill>
+            <a:prstDash val="solid"/>
+          </a:ln>
+        </p:spPr>
+      </p:sp>
+      <p:sp>
+        <p:nvSpPr>
+          <p:cNvPr id="26" name="Shape 24"/>
+          <p:cNvSpPr/>
+          <p:nvPr/>
+        </p:nvSpPr>
+        <p:spPr>
+          <a:xfrm>
+            <a:off x="6236208" y="3438144"/>
+            <a:ext cx="320040" cy="54864"/>
+          </a:xfrm>
+          <a:prstGeom prst="rect">
+            <a:avLst/>
+          </a:prstGeom>
+          <a:solidFill>
+            <a:srgbClr val="6C5CE7"/>
+          </a:solidFill>
+          <a:ln/>
+        </p:spPr>
+      </p:sp>
+      <p:sp>
+        <p:nvSpPr>
+          <p:cNvPr id="27" name="Text 25"/>
+          <p:cNvSpPr/>
+          <p:nvPr/>
+        </p:nvSpPr>
+        <p:spPr>
+          <a:xfrm>
+            <a:off x="6236208" y="3584448"/>
+            <a:ext cx="2221992" cy="292608"/>
+          </a:xfrm>
+          <a:prstGeom prst="rect">
+            <a:avLst/>
+          </a:prstGeom>
+          <a:noFill/>
+          <a:ln/>
+        </p:spPr>
+        <p:txBody>
+          <a:bodyPr wrap="square" lIns="0" tIns="0" rIns="0" bIns="0" rtlCol="0" anchor="ctr"/>
+          <a:lstStyle/>
+          <a:p>
+            <a:pPr marL="0" indent="0">
+              <a:buNone/>
+            </a:pPr>
+            <a:r>
+              <a:rPr lang="en-US" sz="1400" b="1" dirty="0">
+                <a:solidFill>
+                  <a:srgbClr val="FFFFFF"/>
+                </a:solidFill>
+                <a:latin typeface="Calibri" pitchFamily="34" charset="0"/>
+                <a:ea typeface="Calibri" pitchFamily="34" charset="-122"/>
+                <a:cs typeface="Calibri" pitchFamily="34" charset="-120"/>
+              </a:rPr>
+              <a:t>Audit log + HTTPS</a:t>
+            </a:r>
+            <a:endParaRPr lang="en-US" sz="1400" dirty="0"/>
+          </a:p>
+        </p:txBody>
+      </p:sp>
+      <p:sp>
+        <p:nvSpPr>
+          <p:cNvPr id="28" name="Text 26"/>
+          <p:cNvSpPr/>
+          <p:nvPr/>
+        </p:nvSpPr>
+        <p:spPr>
+          <a:xfrm>
+            <a:off x="6236208" y="3931920"/>
+            <a:ext cx="2221992" cy="731520"/>
+          </a:xfrm>
+          <a:prstGeom prst="rect">
+            <a:avLst/>
+          </a:prstGeom>
+          <a:noFill/>
+          <a:ln/>
+        </p:spPr>
+        <p:txBody>
+          <a:bodyPr wrap="square" lIns="0" tIns="0" rIns="0" bIns="0" rtlCol="0" anchor="ctr"/>
+          <a:lstStyle/>
+          <a:p>
+            <a:pPr marL="0" indent="0">
+              <a:buNone/>
+            </a:pPr>
+            <a:r>
+              <a:rPr lang="en-US" sz="1100" dirty="0">
+                <a:solidFill>
+                  <a:srgbClr val="8892A4"/>
+                </a:solidFill>
+                <a:latin typeface="Calibri" pitchFamily="34" charset="0"/>
+                <a:ea typeface="Calibri" pitchFamily="34" charset="-122"/>
+                <a:cs typeface="Calibri" pitchFamily="34" charset="-120"/>
+              </a:rPr>
+              <a:t>every authenticated action recorded</a:t>
             </a:r>
             <a:endParaRPr lang="en-US" sz="1100" dirty="0"/>
           </a:p>
@@ -2662,7 +2871,7 @@
                 <a:ea typeface="Calibri" pitchFamily="34" charset="-122"/>
                 <a:cs typeface="Calibri" pitchFamily="34" charset="-120"/>
               </a:rPr>
-              <a:t>UNDER THE HOOD</a:t>
+              <a:t>FOR ORGANIZERS</a:t>
             </a:r>
             <a:endParaRPr lang="en-US" sz="1300" dirty="0"/>
           </a:p>
@@ -2701,7 +2910,7 @@
                 <a:ea typeface="Calibri" pitchFamily="34" charset="-122"/>
                 <a:cs typeface="Calibri" pitchFamily="34" charset="-120"/>
               </a:rPr>
-              <a:t>Tech Stack</a:t>
+              <a:t>Admin &amp; Organizer Tools</a:t>
             </a:r>
             <a:endParaRPr lang="en-US" sz="3100" dirty="0"/>
           </a:p>
@@ -2736,11 +2945,11 @@
         <p:spPr>
           <a:xfrm>
             <a:off x="502920" y="1371600"/>
-            <a:ext cx="3977640" cy="3401568"/>
+            <a:ext cx="2587752" cy="1600200"/>
           </a:xfrm>
           <a:prstGeom prst="roundRect">
             <a:avLst>
-              <a:gd name="adj" fmla="val 1882"/>
+              <a:gd name="adj" fmla="val 4000"/>
             </a:avLst>
           </a:prstGeom>
           <a:solidFill>
@@ -2756,30 +2965,50 @@
       </p:sp>
       <p:sp>
         <p:nvSpPr>
-          <p:cNvPr id="6" name="Text 4"/>
-          <p:cNvSpPr/>
-          <p:nvPr/>
-        </p:nvSpPr>
-        <p:spPr>
-          <a:xfrm>
-            <a:off x="731520" y="1554480"/>
-            <a:ext cx="3520440" cy="329184"/>
-          </a:xfrm>
-          <a:prstGeom prst="rect">
-            <a:avLst/>
-          </a:prstGeom>
-          <a:noFill/>
-          <a:ln/>
-        </p:spPr>
-        <p:txBody>
-          <a:bodyPr wrap="square" lIns="0" tIns="0" rIns="0" bIns="0" rtlCol="0" anchor="ctr"/>
-          <a:lstStyle/>
-          <a:p>
-            <a:pPr marL="0" indent="0">
-              <a:buNone/>
-            </a:pPr>
-            <a:r>
-              <a:rPr lang="en-US" sz="1700" b="1" dirty="0">
+          <p:cNvPr id="6" name="Shape 4"/>
+          <p:cNvSpPr/>
+          <p:nvPr/>
+        </p:nvSpPr>
+        <p:spPr>
+          <a:xfrm>
+            <a:off x="502920" y="1371600"/>
+            <a:ext cx="2587752" cy="54864"/>
+          </a:xfrm>
+          <a:prstGeom prst="rect">
+            <a:avLst/>
+          </a:prstGeom>
+          <a:solidFill>
+            <a:srgbClr val="6C5CE7"/>
+          </a:solidFill>
+          <a:ln/>
+        </p:spPr>
+      </p:sp>
+      <p:sp>
+        <p:nvSpPr>
+          <p:cNvPr id="7" name="Text 5"/>
+          <p:cNvSpPr/>
+          <p:nvPr/>
+        </p:nvSpPr>
+        <p:spPr>
+          <a:xfrm>
+            <a:off x="685800" y="1591056"/>
+            <a:ext cx="2221992" cy="292608"/>
+          </a:xfrm>
+          <a:prstGeom prst="rect">
+            <a:avLst/>
+          </a:prstGeom>
+          <a:noFill/>
+          <a:ln/>
+        </p:spPr>
+        <p:txBody>
+          <a:bodyPr wrap="square" lIns="0" tIns="0" rIns="0" bIns="0" rtlCol="0" anchor="ctr"/>
+          <a:lstStyle/>
+          <a:p>
+            <a:pPr marL="0" indent="0">
+              <a:buNone/>
+            </a:pPr>
+            <a:r>
+              <a:rPr lang="en-US" sz="1400" b="1" dirty="0">
                 <a:solidFill>
                   <a:srgbClr val="A29BFE"/>
                 </a:solidFill>
@@ -2787,31 +3016,11 @@
                 <a:ea typeface="Calibri" pitchFamily="34" charset="-122"/>
                 <a:cs typeface="Calibri" pitchFamily="34" charset="-120"/>
               </a:rPr>
-              <a:t>Frontend</a:t>
-            </a:r>
-            <a:endParaRPr lang="en-US" sz="1700" dirty="0"/>
-          </a:p>
-        </p:txBody>
-      </p:sp>
-      <p:sp>
-        <p:nvSpPr>
-          <p:cNvPr id="7" name="Shape 5"/>
-          <p:cNvSpPr/>
-          <p:nvPr/>
-        </p:nvSpPr>
-        <p:spPr>
-          <a:xfrm>
-            <a:off x="749808" y="2121408"/>
-            <a:ext cx="164592" cy="45720"/>
-          </a:xfrm>
-          <a:prstGeom prst="rect">
-            <a:avLst/>
-          </a:prstGeom>
-          <a:solidFill>
-            <a:srgbClr val="6C5CE7"/>
-          </a:solidFill>
-          <a:ln/>
-        </p:spPr>
+              <a:t>Revenue dashboard</a:t>
+            </a:r>
+            <a:endParaRPr lang="en-US" sz="1400" dirty="0"/>
+          </a:p>
+        </p:txBody>
       </p:sp>
       <p:sp>
         <p:nvSpPr>
@@ -2821,8 +3030,8 @@
         </p:nvSpPr>
         <p:spPr>
           <a:xfrm>
-            <a:off x="1033272" y="2057400"/>
-            <a:ext cx="3246120" cy="502920"/>
+            <a:off x="685800" y="1938528"/>
+            <a:ext cx="2221992" cy="777240"/>
           </a:xfrm>
           <a:prstGeom prst="rect">
             <a:avLst/>
@@ -2846,7 +3055,7 @@
                 <a:ea typeface="Calibri" pitchFamily="34" charset="-122"/>
                 <a:cs typeface="Calibri" pitchFamily="34" charset="-120"/>
               </a:rPr>
-              <a:t>React 19 + Vite</a:t>
+              <a:t>sales, totals and purchase history at a glance</a:t>
             </a:r>
             <a:endParaRPr lang="en-US" sz="1100" dirty="0"/>
           </a:p>
@@ -2860,248 +3069,12 @@
         </p:nvSpPr>
         <p:spPr>
           <a:xfrm>
-            <a:off x="749808" y="2651760"/>
-            <a:ext cx="164592" cy="45720"/>
-          </a:xfrm>
-          <a:prstGeom prst="rect">
-            <a:avLst/>
-          </a:prstGeom>
-          <a:solidFill>
-            <a:srgbClr val="6C5CE7"/>
-          </a:solidFill>
-          <a:ln/>
-        </p:spPr>
-      </p:sp>
-      <p:sp>
-        <p:nvSpPr>
-          <p:cNvPr id="10" name="Text 8"/>
-          <p:cNvSpPr/>
-          <p:nvPr/>
-        </p:nvSpPr>
-        <p:spPr>
-          <a:xfrm>
-            <a:off x="1033272" y="2587752"/>
-            <a:ext cx="3246120" cy="502920"/>
-          </a:xfrm>
-          <a:prstGeom prst="rect">
-            <a:avLst/>
-          </a:prstGeom>
-          <a:noFill/>
-          <a:ln/>
-        </p:spPr>
-        <p:txBody>
-          <a:bodyPr wrap="square" lIns="0" tIns="0" rIns="0" bIns="0" rtlCol="0" anchor="ctr"/>
-          <a:lstStyle/>
-          <a:p>
-            <a:pPr marL="0" indent="0">
-              <a:buNone/>
-            </a:pPr>
-            <a:r>
-              <a:rPr lang="en-US" sz="1100" dirty="0">
-                <a:solidFill>
-                  <a:srgbClr val="E8E4F9"/>
-                </a:solidFill>
-                <a:latin typeface="Calibri" pitchFamily="34" charset="0"/>
-                <a:ea typeface="Calibri" pitchFamily="34" charset="-122"/>
-                <a:cs typeface="Calibri" pitchFamily="34" charset="-120"/>
-              </a:rPr>
-              <a:t>React Router 7</a:t>
-            </a:r>
-            <a:endParaRPr lang="en-US" sz="1100" dirty="0"/>
-          </a:p>
-        </p:txBody>
-      </p:sp>
-      <p:sp>
-        <p:nvSpPr>
-          <p:cNvPr id="11" name="Shape 9"/>
-          <p:cNvSpPr/>
-          <p:nvPr/>
-        </p:nvSpPr>
-        <p:spPr>
-          <a:xfrm>
-            <a:off x="749808" y="3182112"/>
-            <a:ext cx="164592" cy="45720"/>
-          </a:xfrm>
-          <a:prstGeom prst="rect">
-            <a:avLst/>
-          </a:prstGeom>
-          <a:solidFill>
-            <a:srgbClr val="6C5CE7"/>
-          </a:solidFill>
-          <a:ln/>
-        </p:spPr>
-      </p:sp>
-      <p:sp>
-        <p:nvSpPr>
-          <p:cNvPr id="12" name="Text 10"/>
-          <p:cNvSpPr/>
-          <p:nvPr/>
-        </p:nvSpPr>
-        <p:spPr>
-          <a:xfrm>
-            <a:off x="1033272" y="3118104"/>
-            <a:ext cx="3246120" cy="502920"/>
-          </a:xfrm>
-          <a:prstGeom prst="rect">
-            <a:avLst/>
-          </a:prstGeom>
-          <a:noFill/>
-          <a:ln/>
-        </p:spPr>
-        <p:txBody>
-          <a:bodyPr wrap="square" lIns="0" tIns="0" rIns="0" bIns="0" rtlCol="0" anchor="ctr"/>
-          <a:lstStyle/>
-          <a:p>
-            <a:pPr marL="0" indent="0">
-              <a:buNone/>
-            </a:pPr>
-            <a:r>
-              <a:rPr lang="en-US" sz="1100" dirty="0">
-                <a:solidFill>
-                  <a:srgbClr val="E8E4F9"/>
-                </a:solidFill>
-                <a:latin typeface="Calibri" pitchFamily="34" charset="0"/>
-                <a:ea typeface="Calibri" pitchFamily="34" charset="-122"/>
-                <a:cs typeface="Calibri" pitchFamily="34" charset="-120"/>
-              </a:rPr>
-              <a:t>Chart.js visualizations</a:t>
-            </a:r>
-            <a:endParaRPr lang="en-US" sz="1100" dirty="0"/>
-          </a:p>
-        </p:txBody>
-      </p:sp>
-      <p:sp>
-        <p:nvSpPr>
-          <p:cNvPr id="13" name="Shape 11"/>
-          <p:cNvSpPr/>
-          <p:nvPr/>
-        </p:nvSpPr>
-        <p:spPr>
-          <a:xfrm>
-            <a:off x="749808" y="3712464"/>
-            <a:ext cx="164592" cy="45720"/>
-          </a:xfrm>
-          <a:prstGeom prst="rect">
-            <a:avLst/>
-          </a:prstGeom>
-          <a:solidFill>
-            <a:srgbClr val="6C5CE7"/>
-          </a:solidFill>
-          <a:ln/>
-        </p:spPr>
-      </p:sp>
-      <p:sp>
-        <p:nvSpPr>
-          <p:cNvPr id="14" name="Text 12"/>
-          <p:cNvSpPr/>
-          <p:nvPr/>
-        </p:nvSpPr>
-        <p:spPr>
-          <a:xfrm>
-            <a:off x="1033272" y="3648456"/>
-            <a:ext cx="3246120" cy="502920"/>
-          </a:xfrm>
-          <a:prstGeom prst="rect">
-            <a:avLst/>
-          </a:prstGeom>
-          <a:noFill/>
-          <a:ln/>
-        </p:spPr>
-        <p:txBody>
-          <a:bodyPr wrap="square" lIns="0" tIns="0" rIns="0" bIns="0" rtlCol="0" anchor="ctr"/>
-          <a:lstStyle/>
-          <a:p>
-            <a:pPr marL="0" indent="0">
-              <a:buNone/>
-            </a:pPr>
-            <a:r>
-              <a:rPr lang="en-US" sz="1100" dirty="0">
-                <a:solidFill>
-                  <a:srgbClr val="E8E4F9"/>
-                </a:solidFill>
-                <a:latin typeface="Calibri" pitchFamily="34" charset="0"/>
-                <a:ea typeface="Calibri" pitchFamily="34" charset="-122"/>
-                <a:cs typeface="Calibri" pitchFamily="34" charset="-120"/>
-              </a:rPr>
-              <a:t>CSS Modules</a:t>
-            </a:r>
-            <a:endParaRPr lang="en-US" sz="1100" dirty="0"/>
-          </a:p>
-        </p:txBody>
-      </p:sp>
-      <p:sp>
-        <p:nvSpPr>
-          <p:cNvPr id="15" name="Shape 13"/>
-          <p:cNvSpPr/>
-          <p:nvPr/>
-        </p:nvSpPr>
-        <p:spPr>
-          <a:xfrm>
-            <a:off x="749808" y="4242816"/>
-            <a:ext cx="164592" cy="45720"/>
-          </a:xfrm>
-          <a:prstGeom prst="rect">
-            <a:avLst/>
-          </a:prstGeom>
-          <a:solidFill>
-            <a:srgbClr val="6C5CE7"/>
-          </a:solidFill>
-          <a:ln/>
-        </p:spPr>
-      </p:sp>
-      <p:sp>
-        <p:nvSpPr>
-          <p:cNvPr id="16" name="Text 14"/>
-          <p:cNvSpPr/>
-          <p:nvPr/>
-        </p:nvSpPr>
-        <p:spPr>
-          <a:xfrm>
-            <a:off x="1033272" y="4178808"/>
-            <a:ext cx="3246120" cy="502920"/>
-          </a:xfrm>
-          <a:prstGeom prst="rect">
-            <a:avLst/>
-          </a:prstGeom>
-          <a:noFill/>
-          <a:ln/>
-        </p:spPr>
-        <p:txBody>
-          <a:bodyPr wrap="square" lIns="0" tIns="0" rIns="0" bIns="0" rtlCol="0" anchor="ctr"/>
-          <a:lstStyle/>
-          <a:p>
-            <a:pPr marL="0" indent="0">
-              <a:buNone/>
-            </a:pPr>
-            <a:r>
-              <a:rPr lang="en-US" sz="1100" dirty="0">
-                <a:solidFill>
-                  <a:srgbClr val="E8E4F9"/>
-                </a:solidFill>
-                <a:latin typeface="Calibri" pitchFamily="34" charset="0"/>
-                <a:ea typeface="Calibri" pitchFamily="34" charset="-122"/>
-                <a:cs typeface="Calibri" pitchFamily="34" charset="-120"/>
-              </a:rPr>
-              <a:t>Tested: Vitest · Testing Library · Playwright</a:t>
-            </a:r>
-            <a:endParaRPr lang="en-US" sz="1100" dirty="0"/>
-          </a:p>
-        </p:txBody>
-      </p:sp>
-      <p:sp>
-        <p:nvSpPr>
-          <p:cNvPr id="17" name="Shape 15"/>
-          <p:cNvSpPr/>
-          <p:nvPr/>
-        </p:nvSpPr>
-        <p:spPr>
-          <a:xfrm>
-            <a:off x="4663440" y="1371600"/>
-            <a:ext cx="3977640" cy="3401568"/>
+            <a:off x="3278124" y="1371600"/>
+            <a:ext cx="2587752" cy="1600200"/>
           </a:xfrm>
           <a:prstGeom prst="roundRect">
             <a:avLst>
-              <a:gd name="adj" fmla="val 1882"/>
+              <a:gd name="adj" fmla="val 4000"/>
             </a:avLst>
           </a:prstGeom>
           <a:solidFill>
@@ -3117,30 +3090,50 @@
       </p:sp>
       <p:sp>
         <p:nvSpPr>
-          <p:cNvPr id="18" name="Text 16"/>
-          <p:cNvSpPr/>
-          <p:nvPr/>
-        </p:nvSpPr>
-        <p:spPr>
-          <a:xfrm>
-            <a:off x="4892040" y="1554480"/>
-            <a:ext cx="3520440" cy="329184"/>
-          </a:xfrm>
-          <a:prstGeom prst="rect">
-            <a:avLst/>
-          </a:prstGeom>
-          <a:noFill/>
-          <a:ln/>
-        </p:spPr>
-        <p:txBody>
-          <a:bodyPr wrap="square" lIns="0" tIns="0" rIns="0" bIns="0" rtlCol="0" anchor="ctr"/>
-          <a:lstStyle/>
-          <a:p>
-            <a:pPr marL="0" indent="0">
-              <a:buNone/>
-            </a:pPr>
-            <a:r>
-              <a:rPr lang="en-US" sz="1700" b="1" dirty="0">
+          <p:cNvPr id="10" name="Shape 8"/>
+          <p:cNvSpPr/>
+          <p:nvPr/>
+        </p:nvSpPr>
+        <p:spPr>
+          <a:xfrm>
+            <a:off x="3278124" y="1371600"/>
+            <a:ext cx="2587752" cy="54864"/>
+          </a:xfrm>
+          <a:prstGeom prst="rect">
+            <a:avLst/>
+          </a:prstGeom>
+          <a:solidFill>
+            <a:srgbClr val="6C5CE7"/>
+          </a:solidFill>
+          <a:ln/>
+        </p:spPr>
+      </p:sp>
+      <p:sp>
+        <p:nvSpPr>
+          <p:cNvPr id="11" name="Text 9"/>
+          <p:cNvSpPr/>
+          <p:nvPr/>
+        </p:nvSpPr>
+        <p:spPr>
+          <a:xfrm>
+            <a:off x="3461004" y="1591056"/>
+            <a:ext cx="2221992" cy="292608"/>
+          </a:xfrm>
+          <a:prstGeom prst="rect">
+            <a:avLst/>
+          </a:prstGeom>
+          <a:noFill/>
+          <a:ln/>
+        </p:spPr>
+        <p:txBody>
+          <a:bodyPr wrap="square" lIns="0" tIns="0" rIns="0" bIns="0" rtlCol="0" anchor="ctr"/>
+          <a:lstStyle/>
+          <a:p>
+            <a:pPr marL="0" indent="0">
+              <a:buNone/>
+            </a:pPr>
+            <a:r>
+              <a:rPr lang="en-US" sz="1400" b="1" dirty="0">
                 <a:solidFill>
                   <a:srgbClr val="A29BFE"/>
                 </a:solidFill>
@@ -3148,22 +3141,88 @@
                 <a:ea typeface="Calibri" pitchFamily="34" charset="-122"/>
                 <a:cs typeface="Calibri" pitchFamily="34" charset="-120"/>
               </a:rPr>
-              <a:t>Backend</a:t>
-            </a:r>
-            <a:endParaRPr lang="en-US" sz="1700" dirty="0"/>
-          </a:p>
-        </p:txBody>
-      </p:sp>
-      <p:sp>
-        <p:nvSpPr>
-          <p:cNvPr id="19" name="Shape 17"/>
-          <p:cNvSpPr/>
-          <p:nvPr/>
-        </p:nvSpPr>
-        <p:spPr>
-          <a:xfrm>
-            <a:off x="4910328" y="2121408"/>
-            <a:ext cx="164592" cy="45720"/>
+              <a:t>Check-in scanner</a:t>
+            </a:r>
+            <a:endParaRPr lang="en-US" sz="1400" dirty="0"/>
+          </a:p>
+        </p:txBody>
+      </p:sp>
+      <p:sp>
+        <p:nvSpPr>
+          <p:cNvPr id="12" name="Text 10"/>
+          <p:cNvSpPr/>
+          <p:nvPr/>
+        </p:nvSpPr>
+        <p:spPr>
+          <a:xfrm>
+            <a:off x="3461004" y="1938528"/>
+            <a:ext cx="2221992" cy="777240"/>
+          </a:xfrm>
+          <a:prstGeom prst="rect">
+            <a:avLst/>
+          </a:prstGeom>
+          <a:noFill/>
+          <a:ln/>
+        </p:spPr>
+        <p:txBody>
+          <a:bodyPr wrap="square" lIns="0" tIns="0" rIns="0" bIns="0" rtlCol="0" anchor="ctr"/>
+          <a:lstStyle/>
+          <a:p>
+            <a:pPr marL="0" indent="0">
+              <a:buNone/>
+            </a:pPr>
+            <a:r>
+              <a:rPr lang="en-US" sz="1100" dirty="0">
+                <a:solidFill>
+                  <a:srgbClr val="E8E4F9"/>
+                </a:solidFill>
+                <a:latin typeface="Calibri" pitchFamily="34" charset="0"/>
+                <a:ea typeface="Calibri" pitchFamily="34" charset="-122"/>
+                <a:cs typeface="Calibri" pitchFamily="34" charset="-120"/>
+              </a:rPr>
+              <a:t>validate tickets at the door in seconds</a:t>
+            </a:r>
+            <a:endParaRPr lang="en-US" sz="1100" dirty="0"/>
+          </a:p>
+        </p:txBody>
+      </p:sp>
+      <p:sp>
+        <p:nvSpPr>
+          <p:cNvPr id="13" name="Shape 11"/>
+          <p:cNvSpPr/>
+          <p:nvPr/>
+        </p:nvSpPr>
+        <p:spPr>
+          <a:xfrm>
+            <a:off x="6053328" y="1371600"/>
+            <a:ext cx="2587752" cy="1600200"/>
+          </a:xfrm>
+          <a:prstGeom prst="roundRect">
+            <a:avLst>
+              <a:gd name="adj" fmla="val 4000"/>
+            </a:avLst>
+          </a:prstGeom>
+          <a:solidFill>
+            <a:srgbClr val="1A1535"/>
+          </a:solidFill>
+          <a:ln w="12700">
+            <a:solidFill>
+              <a:srgbClr val="2A2050"/>
+            </a:solidFill>
+            <a:prstDash val="solid"/>
+          </a:ln>
+        </p:spPr>
+      </p:sp>
+      <p:sp>
+        <p:nvSpPr>
+          <p:cNvPr id="14" name="Shape 12"/>
+          <p:cNvSpPr/>
+          <p:nvPr/>
+        </p:nvSpPr>
+        <p:spPr>
+          <a:xfrm>
+            <a:off x="6053328" y="1371600"/>
+            <a:ext cx="2587752" cy="54864"/>
           </a:xfrm>
           <a:prstGeom prst="rect">
             <a:avLst/>
@@ -3176,14 +3235,178 @@
       </p:sp>
       <p:sp>
         <p:nvSpPr>
+          <p:cNvPr id="15" name="Text 13"/>
+          <p:cNvSpPr/>
+          <p:nvPr/>
+        </p:nvSpPr>
+        <p:spPr>
+          <a:xfrm>
+            <a:off x="6236208" y="1591056"/>
+            <a:ext cx="2221992" cy="292608"/>
+          </a:xfrm>
+          <a:prstGeom prst="rect">
+            <a:avLst/>
+          </a:prstGeom>
+          <a:noFill/>
+          <a:ln/>
+        </p:spPr>
+        <p:txBody>
+          <a:bodyPr wrap="square" lIns="0" tIns="0" rIns="0" bIns="0" rtlCol="0" anchor="ctr"/>
+          <a:lstStyle/>
+          <a:p>
+            <a:pPr marL="0" indent="0">
+              <a:buNone/>
+            </a:pPr>
+            <a:r>
+              <a:rPr lang="en-US" sz="1400" b="1" dirty="0">
+                <a:solidFill>
+                  <a:srgbClr val="A29BFE"/>
+                </a:solidFill>
+                <a:latin typeface="Calibri" pitchFamily="34" charset="0"/>
+                <a:ea typeface="Calibri" pitchFamily="34" charset="-122"/>
+                <a:cs typeface="Calibri" pitchFamily="34" charset="-120"/>
+              </a:rPr>
+              <a:t>Observations</a:t>
+            </a:r>
+            <a:endParaRPr lang="en-US" sz="1400" dirty="0"/>
+          </a:p>
+        </p:txBody>
+      </p:sp>
+      <p:sp>
+        <p:nvSpPr>
+          <p:cNvPr id="16" name="Text 14"/>
+          <p:cNvSpPr/>
+          <p:nvPr/>
+        </p:nvSpPr>
+        <p:spPr>
+          <a:xfrm>
+            <a:off x="6236208" y="1938528"/>
+            <a:ext cx="2221992" cy="777240"/>
+          </a:xfrm>
+          <a:prstGeom prst="rect">
+            <a:avLst/>
+          </a:prstGeom>
+          <a:noFill/>
+          <a:ln/>
+        </p:spPr>
+        <p:txBody>
+          <a:bodyPr wrap="square" lIns="0" tIns="0" rIns="0" bIns="0" rtlCol="0" anchor="ctr"/>
+          <a:lstStyle/>
+          <a:p>
+            <a:pPr marL="0" indent="0">
+              <a:buNone/>
+            </a:pPr>
+            <a:r>
+              <a:rPr lang="en-US" sz="1100" dirty="0">
+                <a:solidFill>
+                  <a:srgbClr val="E8E4F9"/>
+                </a:solidFill>
+                <a:latin typeface="Calibri" pitchFamily="34" charset="0"/>
+                <a:ea typeface="Calibri" pitchFamily="34" charset="-122"/>
+                <a:cs typeface="Calibri" pitchFamily="34" charset="-120"/>
+              </a:rPr>
+              <a:t>flagged users with AI-written narratives</a:t>
+            </a:r>
+            <a:endParaRPr lang="en-US" sz="1100" dirty="0"/>
+          </a:p>
+        </p:txBody>
+      </p:sp>
+      <p:sp>
+        <p:nvSpPr>
+          <p:cNvPr id="17" name="Shape 15"/>
+          <p:cNvSpPr/>
+          <p:nvPr/>
+        </p:nvSpPr>
+        <p:spPr>
+          <a:xfrm>
+            <a:off x="502920" y="3200400"/>
+            <a:ext cx="2587752" cy="1417320"/>
+          </a:xfrm>
+          <a:prstGeom prst="roundRect">
+            <a:avLst>
+              <a:gd name="adj" fmla="val 4516"/>
+            </a:avLst>
+          </a:prstGeom>
+          <a:solidFill>
+            <a:srgbClr val="1A1535"/>
+          </a:solidFill>
+          <a:ln w="12700">
+            <a:solidFill>
+              <a:srgbClr val="2A2050"/>
+            </a:solidFill>
+            <a:prstDash val="solid"/>
+          </a:ln>
+        </p:spPr>
+      </p:sp>
+      <p:sp>
+        <p:nvSpPr>
+          <p:cNvPr id="18" name="Shape 16"/>
+          <p:cNvSpPr/>
+          <p:nvPr/>
+        </p:nvSpPr>
+        <p:spPr>
+          <a:xfrm>
+            <a:off x="502920" y="3200400"/>
+            <a:ext cx="2587752" cy="54864"/>
+          </a:xfrm>
+          <a:prstGeom prst="rect">
+            <a:avLst/>
+          </a:prstGeom>
+          <a:solidFill>
+            <a:srgbClr val="6C5CE7"/>
+          </a:solidFill>
+          <a:ln/>
+        </p:spPr>
+      </p:sp>
+      <p:sp>
+        <p:nvSpPr>
+          <p:cNvPr id="19" name="Text 17"/>
+          <p:cNvSpPr/>
+          <p:nvPr/>
+        </p:nvSpPr>
+        <p:spPr>
+          <a:xfrm>
+            <a:off x="685800" y="3419856"/>
+            <a:ext cx="2221992" cy="292608"/>
+          </a:xfrm>
+          <a:prstGeom prst="rect">
+            <a:avLst/>
+          </a:prstGeom>
+          <a:noFill/>
+          <a:ln/>
+        </p:spPr>
+        <p:txBody>
+          <a:bodyPr wrap="square" lIns="0" tIns="0" rIns="0" bIns="0" rtlCol="0" anchor="ctr"/>
+          <a:lstStyle/>
+          <a:p>
+            <a:pPr marL="0" indent="0">
+              <a:buNone/>
+            </a:pPr>
+            <a:r>
+              <a:rPr lang="en-US" sz="1300" b="1" dirty="0">
+                <a:solidFill>
+                  <a:srgbClr val="A29BFE"/>
+                </a:solidFill>
+                <a:latin typeface="Calibri" pitchFamily="34" charset="0"/>
+                <a:ea typeface="Calibri" pitchFamily="34" charset="-122"/>
+                <a:cs typeface="Calibri" pitchFamily="34" charset="-120"/>
+              </a:rPr>
+              <a:t>Event &amp; ticket management</a:t>
+            </a:r>
+            <a:endParaRPr lang="en-US" sz="1300" dirty="0"/>
+          </a:p>
+        </p:txBody>
+      </p:sp>
+      <p:sp>
+        <p:nvSpPr>
           <p:cNvPr id="20" name="Text 18"/>
           <p:cNvSpPr/>
           <p:nvPr/>
         </p:nvSpPr>
         <p:spPr>
           <a:xfrm>
-            <a:off x="5193792" y="2057400"/>
-            <a:ext cx="3246120" cy="502920"/>
+            <a:off x="685800" y="3767328"/>
+            <a:ext cx="2221992" cy="777240"/>
           </a:xfrm>
           <a:prstGeom prst="rect">
             <a:avLst/>
@@ -3207,7 +3430,7 @@
                 <a:ea typeface="Calibri" pitchFamily="34" charset="-122"/>
                 <a:cs typeface="Calibri" pitchFamily="34" charset="-120"/>
               </a:rPr>
-              <a:t>Node.js + Express 5 — layered: routes / controllers / services / repositories</a:t>
+              <a:t>full create / update / delete with server-side validation</a:t>
             </a:r>
             <a:endParaRPr lang="en-US" sz="1100" dirty="0"/>
           </a:p>
@@ -3221,8 +3444,35 @@
         </p:nvSpPr>
         <p:spPr>
           <a:xfrm>
-            <a:off x="4910328" y="2651760"/>
-            <a:ext cx="164592" cy="45720"/>
+            <a:off x="3278124" y="3200400"/>
+            <a:ext cx="2587752" cy="1417320"/>
+          </a:xfrm>
+          <a:prstGeom prst="roundRect">
+            <a:avLst>
+              <a:gd name="adj" fmla="val 4516"/>
+            </a:avLst>
+          </a:prstGeom>
+          <a:solidFill>
+            <a:srgbClr val="1A1535"/>
+          </a:solidFill>
+          <a:ln w="12700">
+            <a:solidFill>
+              <a:srgbClr val="2A2050"/>
+            </a:solidFill>
+            <a:prstDash val="solid"/>
+          </a:ln>
+        </p:spPr>
+      </p:sp>
+      <p:sp>
+        <p:nvSpPr>
+          <p:cNvPr id="22" name="Shape 20"/>
+          <p:cNvSpPr/>
+          <p:nvPr/>
+        </p:nvSpPr>
+        <p:spPr>
+          <a:xfrm>
+            <a:off x="3278124" y="3200400"/>
+            <a:ext cx="2587752" cy="54864"/>
           </a:xfrm>
           <a:prstGeom prst="rect">
             <a:avLst/>
@@ -3235,14 +3485,53 @@
       </p:sp>
       <p:sp>
         <p:nvSpPr>
-          <p:cNvPr id="22" name="Text 20"/>
-          <p:cNvSpPr/>
-          <p:nvPr/>
-        </p:nvSpPr>
-        <p:spPr>
-          <a:xfrm>
-            <a:off x="5193792" y="2587752"/>
-            <a:ext cx="3246120" cy="502920"/>
+          <p:cNvPr id="23" name="Text 21"/>
+          <p:cNvSpPr/>
+          <p:nvPr/>
+        </p:nvSpPr>
+        <p:spPr>
+          <a:xfrm>
+            <a:off x="3461004" y="3419856"/>
+            <a:ext cx="2221992" cy="292608"/>
+          </a:xfrm>
+          <a:prstGeom prst="rect">
+            <a:avLst/>
+          </a:prstGeom>
+          <a:noFill/>
+          <a:ln/>
+        </p:spPr>
+        <p:txBody>
+          <a:bodyPr wrap="square" lIns="0" tIns="0" rIns="0" bIns="0" rtlCol="0" anchor="ctr"/>
+          <a:lstStyle/>
+          <a:p>
+            <a:pPr marL="0" indent="0">
+              <a:buNone/>
+            </a:pPr>
+            <a:r>
+              <a:rPr lang="en-US" sz="1300" b="1" dirty="0">
+                <a:solidFill>
+                  <a:srgbClr val="A29BFE"/>
+                </a:solidFill>
+                <a:latin typeface="Calibri" pitchFamily="34" charset="0"/>
+                <a:ea typeface="Calibri" pitchFamily="34" charset="-122"/>
+                <a:cs typeface="Calibri" pitchFamily="34" charset="-120"/>
+              </a:rPr>
+              <a:t>Prize draw launcher</a:t>
+            </a:r>
+            <a:endParaRPr lang="en-US" sz="1300" dirty="0"/>
+          </a:p>
+        </p:txBody>
+      </p:sp>
+      <p:sp>
+        <p:nvSpPr>
+          <p:cNvPr id="24" name="Text 22"/>
+          <p:cNvSpPr/>
+          <p:nvPr/>
+        </p:nvSpPr>
+        <p:spPr>
+          <a:xfrm>
+            <a:off x="3461004" y="3767328"/>
+            <a:ext cx="2221992" cy="777240"/>
           </a:xfrm>
           <a:prstGeom prst="rect">
             <a:avLst/>
@@ -3266,7 +3555,7 @@
                 <a:ea typeface="Calibri" pitchFamily="34" charset="-122"/>
                 <a:cs typeface="Calibri" pitchFamily="34" charset="-120"/>
               </a:rPr>
-              <a:t>PostgreSQL (Sequelize) · MongoDB for chat &amp; logs</a:t>
+              <a:t>start timed draws and review past winners</a:t>
             </a:r>
             <a:endParaRPr lang="en-US" sz="1100" dirty="0"/>
           </a:p>
@@ -3274,14 +3563,41 @@
       </p:sp>
       <p:sp>
         <p:nvSpPr>
-          <p:cNvPr id="23" name="Shape 21"/>
-          <p:cNvSpPr/>
-          <p:nvPr/>
-        </p:nvSpPr>
-        <p:spPr>
-          <a:xfrm>
-            <a:off x="4910328" y="3182112"/>
-            <a:ext cx="164592" cy="45720"/>
+          <p:cNvPr id="25" name="Shape 23"/>
+          <p:cNvSpPr/>
+          <p:nvPr/>
+        </p:nvSpPr>
+        <p:spPr>
+          <a:xfrm>
+            <a:off x="6053328" y="3200400"/>
+            <a:ext cx="2587752" cy="1417320"/>
+          </a:xfrm>
+          <a:prstGeom prst="roundRect">
+            <a:avLst>
+              <a:gd name="adj" fmla="val 4516"/>
+            </a:avLst>
+          </a:prstGeom>
+          <a:solidFill>
+            <a:srgbClr val="1A1535"/>
+          </a:solidFill>
+          <a:ln w="12700">
+            <a:solidFill>
+              <a:srgbClr val="2A2050"/>
+            </a:solidFill>
+            <a:prstDash val="solid"/>
+          </a:ln>
+        </p:spPr>
+      </p:sp>
+      <p:sp>
+        <p:nvSpPr>
+          <p:cNvPr id="26" name="Shape 24"/>
+          <p:cNvSpPr/>
+          <p:nvPr/>
+        </p:nvSpPr>
+        <p:spPr>
+          <a:xfrm>
+            <a:off x="6053328" y="3200400"/>
+            <a:ext cx="2587752" cy="54864"/>
           </a:xfrm>
           <a:prstGeom prst="rect">
             <a:avLst/>
@@ -3294,14 +3610,53 @@
       </p:sp>
       <p:sp>
         <p:nvSpPr>
-          <p:cNvPr id="24" name="Text 22"/>
-          <p:cNvSpPr/>
-          <p:nvPr/>
-        </p:nvSpPr>
-        <p:spPr>
-          <a:xfrm>
-            <a:off x="5193792" y="3118104"/>
-            <a:ext cx="3246120" cy="502920"/>
+          <p:cNvPr id="27" name="Text 25"/>
+          <p:cNvSpPr/>
+          <p:nvPr/>
+        </p:nvSpPr>
+        <p:spPr>
+          <a:xfrm>
+            <a:off x="6236208" y="3419856"/>
+            <a:ext cx="2221992" cy="292608"/>
+          </a:xfrm>
+          <a:prstGeom prst="rect">
+            <a:avLst/>
+          </a:prstGeom>
+          <a:noFill/>
+          <a:ln/>
+        </p:spPr>
+        <p:txBody>
+          <a:bodyPr wrap="square" lIns="0" tIns="0" rIns="0" bIns="0" rtlCol="0" anchor="ctr"/>
+          <a:lstStyle/>
+          <a:p>
+            <a:pPr marL="0" indent="0">
+              <a:buNone/>
+            </a:pPr>
+            <a:r>
+              <a:rPr lang="en-US" sz="1300" b="1" dirty="0">
+                <a:solidFill>
+                  <a:srgbClr val="A29BFE"/>
+                </a:solidFill>
+                <a:latin typeface="Calibri" pitchFamily="34" charset="0"/>
+                <a:ea typeface="Calibri" pitchFamily="34" charset="-122"/>
+                <a:cs typeface="Calibri" pitchFamily="34" charset="-120"/>
+              </a:rPr>
+              <a:t>Demo simulator</a:t>
+            </a:r>
+            <a:endParaRPr lang="en-US" sz="1300" dirty="0"/>
+          </a:p>
+        </p:txBody>
+      </p:sp>
+      <p:sp>
+        <p:nvSpPr>
+          <p:cNvPr id="28" name="Text 26"/>
+          <p:cNvSpPr/>
+          <p:nvPr/>
+        </p:nvSpPr>
+        <p:spPr>
+          <a:xfrm>
+            <a:off x="6236208" y="3767328"/>
+            <a:ext cx="2221992" cy="777240"/>
           </a:xfrm>
           <a:prstGeom prst="rect">
             <a:avLst/>
@@ -3325,125 +3680,7 @@
                 <a:ea typeface="Calibri" pitchFamily="34" charset="-122"/>
                 <a:cs typeface="Calibri" pitchFamily="34" charset="-120"/>
               </a:rPr>
-              <a:t>GraphQL alongside REST · WebSockets</a:t>
-            </a:r>
-            <a:endParaRPr lang="en-US" sz="1100" dirty="0"/>
-          </a:p>
-        </p:txBody>
-      </p:sp>
-      <p:sp>
-        <p:nvSpPr>
-          <p:cNvPr id="25" name="Shape 23"/>
-          <p:cNvSpPr/>
-          <p:nvPr/>
-        </p:nvSpPr>
-        <p:spPr>
-          <a:xfrm>
-            <a:off x="4910328" y="3712464"/>
-            <a:ext cx="164592" cy="45720"/>
-          </a:xfrm>
-          <a:prstGeom prst="rect">
-            <a:avLst/>
-          </a:prstGeom>
-          <a:solidFill>
-            <a:srgbClr val="6C5CE7"/>
-          </a:solidFill>
-          <a:ln/>
-        </p:spPr>
-      </p:sp>
-      <p:sp>
-        <p:nvSpPr>
-          <p:cNvPr id="26" name="Text 24"/>
-          <p:cNvSpPr/>
-          <p:nvPr/>
-        </p:nvSpPr>
-        <p:spPr>
-          <a:xfrm>
-            <a:off x="5193792" y="3648456"/>
-            <a:ext cx="3246120" cy="502920"/>
-          </a:xfrm>
-          <a:prstGeom prst="rect">
-            <a:avLst/>
-          </a:prstGeom>
-          <a:noFill/>
-          <a:ln/>
-        </p:spPr>
-        <p:txBody>
-          <a:bodyPr wrap="square" lIns="0" tIns="0" rIns="0" bIns="0" rtlCol="0" anchor="ctr"/>
-          <a:lstStyle/>
-          <a:p>
-            <a:pPr marL="0" indent="0">
-              <a:buNone/>
-            </a:pPr>
-            <a:r>
-              <a:rPr lang="en-US" sz="1100" dirty="0">
-                <a:solidFill>
-                  <a:srgbClr val="E8E4F9"/>
-                </a:solidFill>
-                <a:latin typeface="Calibri" pitchFamily="34" charset="0"/>
-                <a:ea typeface="Calibri" pitchFamily="34" charset="-122"/>
-                <a:cs typeface="Calibri" pitchFamily="34" charset="-120"/>
-              </a:rPr>
-              <a:t>Passport (local + OAuth) · Hugging Face inference</a:t>
-            </a:r>
-            <a:endParaRPr lang="en-US" sz="1100" dirty="0"/>
-          </a:p>
-        </p:txBody>
-      </p:sp>
-      <p:sp>
-        <p:nvSpPr>
-          <p:cNvPr id="27" name="Shape 25"/>
-          <p:cNvSpPr/>
-          <p:nvPr/>
-        </p:nvSpPr>
-        <p:spPr>
-          <a:xfrm>
-            <a:off x="4910328" y="4242816"/>
-            <a:ext cx="164592" cy="45720"/>
-          </a:xfrm>
-          <a:prstGeom prst="rect">
-            <a:avLst/>
-          </a:prstGeom>
-          <a:solidFill>
-            <a:srgbClr val="6C5CE7"/>
-          </a:solidFill>
-          <a:ln/>
-        </p:spPr>
-      </p:sp>
-      <p:sp>
-        <p:nvSpPr>
-          <p:cNvPr id="28" name="Text 26"/>
-          <p:cNvSpPr/>
-          <p:nvPr/>
-        </p:nvSpPr>
-        <p:spPr>
-          <a:xfrm>
-            <a:off x="5193792" y="4178808"/>
-            <a:ext cx="3246120" cy="502920"/>
-          </a:xfrm>
-          <a:prstGeom prst="rect">
-            <a:avLst/>
-          </a:prstGeom>
-          <a:noFill/>
-          <a:ln/>
-        </p:spPr>
-        <p:txBody>
-          <a:bodyPr wrap="square" lIns="0" tIns="0" rIns="0" bIns="0" rtlCol="0" anchor="ctr"/>
-          <a:lstStyle/>
-          <a:p>
-            <a:pPr marL="0" indent="0">
-              <a:buNone/>
-            </a:pPr>
-            <a:r>
-              <a:rPr lang="en-US" sz="1100" dirty="0">
-                <a:solidFill>
-                  <a:srgbClr val="E8E4F9"/>
-                </a:solidFill>
-                <a:latin typeface="Calibri" pitchFamily="34" charset="0"/>
-                <a:ea typeface="Calibri" pitchFamily="34" charset="-122"/>
-                <a:cs typeface="Calibri" pitchFamily="34" charset="-120"/>
-              </a:rPr>
-              <a:t>Tested: Jest · Supertest</a:t>
+              <a:t>trigger suspicious behavior live to showcase detection</a:t>
             </a:r>
             <a:endParaRPr lang="en-US" sz="1100" dirty="0"/>
           </a:p>
@@ -3484,6 +3721,859 @@
       </p:grpSpPr>
       <p:sp>
         <p:nvSpPr>
+          <p:cNvPr id="2" name="Text 0"/>
+          <p:cNvSpPr/>
+          <p:nvPr/>
+        </p:nvSpPr>
+        <p:spPr>
+          <a:xfrm>
+            <a:off x="502920" y="274320"/>
+            <a:ext cx="8138160" cy="237744"/>
+          </a:xfrm>
+          <a:prstGeom prst="rect">
+            <a:avLst/>
+          </a:prstGeom>
+          <a:noFill/>
+          <a:ln/>
+        </p:spPr>
+        <p:txBody>
+          <a:bodyPr wrap="square" lIns="0" tIns="0" rIns="0" bIns="0" rtlCol="0" anchor="ctr"/>
+          <a:lstStyle/>
+          <a:p>
+            <a:pPr marL="0" indent="0">
+              <a:buNone/>
+            </a:pPr>
+            <a:r>
+              <a:rPr lang="en-US" sz="1300" b="1" kern="0" spc="400" dirty="0">
+                <a:solidFill>
+                  <a:srgbClr val="A29BFE"/>
+                </a:solidFill>
+                <a:latin typeface="Calibri" pitchFamily="34" charset="0"/>
+                <a:ea typeface="Calibri" pitchFamily="34" charset="-122"/>
+                <a:cs typeface="Calibri" pitchFamily="34" charset="-120"/>
+              </a:rPr>
+              <a:t>UNDER THE HOOD</a:t>
+            </a:r>
+            <a:endParaRPr lang="en-US" sz="1300" dirty="0"/>
+          </a:p>
+        </p:txBody>
+      </p:sp>
+      <p:sp>
+        <p:nvSpPr>
+          <p:cNvPr id="3" name="Text 1"/>
+          <p:cNvSpPr/>
+          <p:nvPr/>
+        </p:nvSpPr>
+        <p:spPr>
+          <a:xfrm>
+            <a:off x="502920" y="512064"/>
+            <a:ext cx="8138160" cy="530352"/>
+          </a:xfrm>
+          <a:prstGeom prst="rect">
+            <a:avLst/>
+          </a:prstGeom>
+          <a:noFill/>
+          <a:ln/>
+        </p:spPr>
+        <p:txBody>
+          <a:bodyPr wrap="square" lIns="0" tIns="0" rIns="0" bIns="0" rtlCol="0" anchor="ctr"/>
+          <a:lstStyle/>
+          <a:p>
+            <a:pPr marL="0" indent="0">
+              <a:buNone/>
+            </a:pPr>
+            <a:r>
+              <a:rPr lang="en-US" sz="3100" b="1" dirty="0">
+                <a:solidFill>
+                  <a:srgbClr val="FFFFFF"/>
+                </a:solidFill>
+                <a:latin typeface="Calibri" pitchFamily="34" charset="0"/>
+                <a:ea typeface="Calibri" pitchFamily="34" charset="-122"/>
+                <a:cs typeface="Calibri" pitchFamily="34" charset="-120"/>
+              </a:rPr>
+              <a:t>Tech Stack</a:t>
+            </a:r>
+            <a:endParaRPr lang="en-US" sz="3100" dirty="0"/>
+          </a:p>
+        </p:txBody>
+      </p:sp>
+      <p:sp>
+        <p:nvSpPr>
+          <p:cNvPr id="4" name="Shape 2"/>
+          <p:cNvSpPr/>
+          <p:nvPr/>
+        </p:nvSpPr>
+        <p:spPr>
+          <a:xfrm>
+            <a:off x="502920" y="1097280"/>
+            <a:ext cx="1051560" cy="73152"/>
+          </a:xfrm>
+          <a:prstGeom prst="rect">
+            <a:avLst/>
+          </a:prstGeom>
+          <a:solidFill>
+            <a:srgbClr val="6C5CE7"/>
+          </a:solidFill>
+          <a:ln/>
+        </p:spPr>
+      </p:sp>
+      <p:sp>
+        <p:nvSpPr>
+          <p:cNvPr id="5" name="Shape 3"/>
+          <p:cNvSpPr/>
+          <p:nvPr/>
+        </p:nvSpPr>
+        <p:spPr>
+          <a:xfrm>
+            <a:off x="502920" y="1371600"/>
+            <a:ext cx="3977640" cy="3401568"/>
+          </a:xfrm>
+          <a:prstGeom prst="roundRect">
+            <a:avLst>
+              <a:gd name="adj" fmla="val 1882"/>
+            </a:avLst>
+          </a:prstGeom>
+          <a:solidFill>
+            <a:srgbClr val="1A1535"/>
+          </a:solidFill>
+          <a:ln w="12700">
+            <a:solidFill>
+              <a:srgbClr val="2A2050"/>
+            </a:solidFill>
+            <a:prstDash val="solid"/>
+          </a:ln>
+        </p:spPr>
+      </p:sp>
+      <p:sp>
+        <p:nvSpPr>
+          <p:cNvPr id="6" name="Text 4"/>
+          <p:cNvSpPr/>
+          <p:nvPr/>
+        </p:nvSpPr>
+        <p:spPr>
+          <a:xfrm>
+            <a:off x="731520" y="1554480"/>
+            <a:ext cx="3520440" cy="329184"/>
+          </a:xfrm>
+          <a:prstGeom prst="rect">
+            <a:avLst/>
+          </a:prstGeom>
+          <a:noFill/>
+          <a:ln/>
+        </p:spPr>
+        <p:txBody>
+          <a:bodyPr wrap="square" lIns="0" tIns="0" rIns="0" bIns="0" rtlCol="0" anchor="ctr"/>
+          <a:lstStyle/>
+          <a:p>
+            <a:pPr marL="0" indent="0">
+              <a:buNone/>
+            </a:pPr>
+            <a:r>
+              <a:rPr lang="en-US" sz="1700" b="1" dirty="0">
+                <a:solidFill>
+                  <a:srgbClr val="A29BFE"/>
+                </a:solidFill>
+                <a:latin typeface="Calibri" pitchFamily="34" charset="0"/>
+                <a:ea typeface="Calibri" pitchFamily="34" charset="-122"/>
+                <a:cs typeface="Calibri" pitchFamily="34" charset="-120"/>
+              </a:rPr>
+              <a:t>Frontend</a:t>
+            </a:r>
+            <a:endParaRPr lang="en-US" sz="1700" dirty="0"/>
+          </a:p>
+        </p:txBody>
+      </p:sp>
+      <p:sp>
+        <p:nvSpPr>
+          <p:cNvPr id="7" name="Shape 5"/>
+          <p:cNvSpPr/>
+          <p:nvPr/>
+        </p:nvSpPr>
+        <p:spPr>
+          <a:xfrm>
+            <a:off x="749808" y="2121408"/>
+            <a:ext cx="164592" cy="45720"/>
+          </a:xfrm>
+          <a:prstGeom prst="rect">
+            <a:avLst/>
+          </a:prstGeom>
+          <a:solidFill>
+            <a:srgbClr val="6C5CE7"/>
+          </a:solidFill>
+          <a:ln/>
+        </p:spPr>
+      </p:sp>
+      <p:sp>
+        <p:nvSpPr>
+          <p:cNvPr id="8" name="Text 6"/>
+          <p:cNvSpPr/>
+          <p:nvPr/>
+        </p:nvSpPr>
+        <p:spPr>
+          <a:xfrm>
+            <a:off x="1033272" y="2057400"/>
+            <a:ext cx="3246120" cy="502920"/>
+          </a:xfrm>
+          <a:prstGeom prst="rect">
+            <a:avLst/>
+          </a:prstGeom>
+          <a:noFill/>
+          <a:ln/>
+        </p:spPr>
+        <p:txBody>
+          <a:bodyPr wrap="square" lIns="0" tIns="0" rIns="0" bIns="0" rtlCol="0" anchor="ctr"/>
+          <a:lstStyle/>
+          <a:p>
+            <a:pPr marL="0" indent="0">
+              <a:buNone/>
+            </a:pPr>
+            <a:r>
+              <a:rPr lang="en-US" sz="1100" dirty="0">
+                <a:solidFill>
+                  <a:srgbClr val="E8E4F9"/>
+                </a:solidFill>
+                <a:latin typeface="Calibri" pitchFamily="34" charset="0"/>
+                <a:ea typeface="Calibri" pitchFamily="34" charset="-122"/>
+                <a:cs typeface="Calibri" pitchFamily="34" charset="-120"/>
+              </a:rPr>
+              <a:t>React 19 + Vite</a:t>
+            </a:r>
+            <a:endParaRPr lang="en-US" sz="1100" dirty="0"/>
+          </a:p>
+        </p:txBody>
+      </p:sp>
+      <p:sp>
+        <p:nvSpPr>
+          <p:cNvPr id="9" name="Shape 7"/>
+          <p:cNvSpPr/>
+          <p:nvPr/>
+        </p:nvSpPr>
+        <p:spPr>
+          <a:xfrm>
+            <a:off x="749808" y="2651760"/>
+            <a:ext cx="164592" cy="45720"/>
+          </a:xfrm>
+          <a:prstGeom prst="rect">
+            <a:avLst/>
+          </a:prstGeom>
+          <a:solidFill>
+            <a:srgbClr val="6C5CE7"/>
+          </a:solidFill>
+          <a:ln/>
+        </p:spPr>
+      </p:sp>
+      <p:sp>
+        <p:nvSpPr>
+          <p:cNvPr id="10" name="Text 8"/>
+          <p:cNvSpPr/>
+          <p:nvPr/>
+        </p:nvSpPr>
+        <p:spPr>
+          <a:xfrm>
+            <a:off x="1033272" y="2587752"/>
+            <a:ext cx="3246120" cy="502920"/>
+          </a:xfrm>
+          <a:prstGeom prst="rect">
+            <a:avLst/>
+          </a:prstGeom>
+          <a:noFill/>
+          <a:ln/>
+        </p:spPr>
+        <p:txBody>
+          <a:bodyPr wrap="square" lIns="0" tIns="0" rIns="0" bIns="0" rtlCol="0" anchor="ctr"/>
+          <a:lstStyle/>
+          <a:p>
+            <a:pPr marL="0" indent="0">
+              <a:buNone/>
+            </a:pPr>
+            <a:r>
+              <a:rPr lang="en-US" sz="1100" dirty="0">
+                <a:solidFill>
+                  <a:srgbClr val="E8E4F9"/>
+                </a:solidFill>
+                <a:latin typeface="Calibri" pitchFamily="34" charset="0"/>
+                <a:ea typeface="Calibri" pitchFamily="34" charset="-122"/>
+                <a:cs typeface="Calibri" pitchFamily="34" charset="-120"/>
+              </a:rPr>
+              <a:t>React Router 7</a:t>
+            </a:r>
+            <a:endParaRPr lang="en-US" sz="1100" dirty="0"/>
+          </a:p>
+        </p:txBody>
+      </p:sp>
+      <p:sp>
+        <p:nvSpPr>
+          <p:cNvPr id="11" name="Shape 9"/>
+          <p:cNvSpPr/>
+          <p:nvPr/>
+        </p:nvSpPr>
+        <p:spPr>
+          <a:xfrm>
+            <a:off x="749808" y="3182112"/>
+            <a:ext cx="164592" cy="45720"/>
+          </a:xfrm>
+          <a:prstGeom prst="rect">
+            <a:avLst/>
+          </a:prstGeom>
+          <a:solidFill>
+            <a:srgbClr val="6C5CE7"/>
+          </a:solidFill>
+          <a:ln/>
+        </p:spPr>
+      </p:sp>
+      <p:sp>
+        <p:nvSpPr>
+          <p:cNvPr id="12" name="Text 10"/>
+          <p:cNvSpPr/>
+          <p:nvPr/>
+        </p:nvSpPr>
+        <p:spPr>
+          <a:xfrm>
+            <a:off x="1033272" y="3118104"/>
+            <a:ext cx="3246120" cy="502920"/>
+          </a:xfrm>
+          <a:prstGeom prst="rect">
+            <a:avLst/>
+          </a:prstGeom>
+          <a:noFill/>
+          <a:ln/>
+        </p:spPr>
+        <p:txBody>
+          <a:bodyPr wrap="square" lIns="0" tIns="0" rIns="0" bIns="0" rtlCol="0" anchor="ctr"/>
+          <a:lstStyle/>
+          <a:p>
+            <a:pPr marL="0" indent="0">
+              <a:buNone/>
+            </a:pPr>
+            <a:r>
+              <a:rPr lang="en-US" sz="1100" dirty="0">
+                <a:solidFill>
+                  <a:srgbClr val="E8E4F9"/>
+                </a:solidFill>
+                <a:latin typeface="Calibri" pitchFamily="34" charset="0"/>
+                <a:ea typeface="Calibri" pitchFamily="34" charset="-122"/>
+                <a:cs typeface="Calibri" pitchFamily="34" charset="-120"/>
+              </a:rPr>
+              <a:t>Chart.js visualizations</a:t>
+            </a:r>
+            <a:endParaRPr lang="en-US" sz="1100" dirty="0"/>
+          </a:p>
+        </p:txBody>
+      </p:sp>
+      <p:sp>
+        <p:nvSpPr>
+          <p:cNvPr id="13" name="Shape 11"/>
+          <p:cNvSpPr/>
+          <p:nvPr/>
+        </p:nvSpPr>
+        <p:spPr>
+          <a:xfrm>
+            <a:off x="749808" y="3712464"/>
+            <a:ext cx="164592" cy="45720"/>
+          </a:xfrm>
+          <a:prstGeom prst="rect">
+            <a:avLst/>
+          </a:prstGeom>
+          <a:solidFill>
+            <a:srgbClr val="6C5CE7"/>
+          </a:solidFill>
+          <a:ln/>
+        </p:spPr>
+      </p:sp>
+      <p:sp>
+        <p:nvSpPr>
+          <p:cNvPr id="14" name="Text 12"/>
+          <p:cNvSpPr/>
+          <p:nvPr/>
+        </p:nvSpPr>
+        <p:spPr>
+          <a:xfrm>
+            <a:off x="1033272" y="3648456"/>
+            <a:ext cx="3246120" cy="502920"/>
+          </a:xfrm>
+          <a:prstGeom prst="rect">
+            <a:avLst/>
+          </a:prstGeom>
+          <a:noFill/>
+          <a:ln/>
+        </p:spPr>
+        <p:txBody>
+          <a:bodyPr wrap="square" lIns="0" tIns="0" rIns="0" bIns="0" rtlCol="0" anchor="ctr"/>
+          <a:lstStyle/>
+          <a:p>
+            <a:pPr marL="0" indent="0">
+              <a:buNone/>
+            </a:pPr>
+            <a:r>
+              <a:rPr lang="en-US" sz="1100" dirty="0">
+                <a:solidFill>
+                  <a:srgbClr val="E8E4F9"/>
+                </a:solidFill>
+                <a:latin typeface="Calibri" pitchFamily="34" charset="0"/>
+                <a:ea typeface="Calibri" pitchFamily="34" charset="-122"/>
+                <a:cs typeface="Calibri" pitchFamily="34" charset="-120"/>
+              </a:rPr>
+              <a:t>CSS Modules</a:t>
+            </a:r>
+            <a:endParaRPr lang="en-US" sz="1100" dirty="0"/>
+          </a:p>
+        </p:txBody>
+      </p:sp>
+      <p:sp>
+        <p:nvSpPr>
+          <p:cNvPr id="15" name="Shape 13"/>
+          <p:cNvSpPr/>
+          <p:nvPr/>
+        </p:nvSpPr>
+        <p:spPr>
+          <a:xfrm>
+            <a:off x="749808" y="4242816"/>
+            <a:ext cx="164592" cy="45720"/>
+          </a:xfrm>
+          <a:prstGeom prst="rect">
+            <a:avLst/>
+          </a:prstGeom>
+          <a:solidFill>
+            <a:srgbClr val="6C5CE7"/>
+          </a:solidFill>
+          <a:ln/>
+        </p:spPr>
+      </p:sp>
+      <p:sp>
+        <p:nvSpPr>
+          <p:cNvPr id="16" name="Text 14"/>
+          <p:cNvSpPr/>
+          <p:nvPr/>
+        </p:nvSpPr>
+        <p:spPr>
+          <a:xfrm>
+            <a:off x="1033272" y="4178808"/>
+            <a:ext cx="3246120" cy="502920"/>
+          </a:xfrm>
+          <a:prstGeom prst="rect">
+            <a:avLst/>
+          </a:prstGeom>
+          <a:noFill/>
+          <a:ln/>
+        </p:spPr>
+        <p:txBody>
+          <a:bodyPr wrap="square" lIns="0" tIns="0" rIns="0" bIns="0" rtlCol="0" anchor="ctr"/>
+          <a:lstStyle/>
+          <a:p>
+            <a:pPr marL="0" indent="0">
+              <a:buNone/>
+            </a:pPr>
+            <a:r>
+              <a:rPr lang="en-US" sz="1100" dirty="0">
+                <a:solidFill>
+                  <a:srgbClr val="E8E4F9"/>
+                </a:solidFill>
+                <a:latin typeface="Calibri" pitchFamily="34" charset="0"/>
+                <a:ea typeface="Calibri" pitchFamily="34" charset="-122"/>
+                <a:cs typeface="Calibri" pitchFamily="34" charset="-120"/>
+              </a:rPr>
+              <a:t>Tested: Vitest · Testing Library · Playwright</a:t>
+            </a:r>
+            <a:endParaRPr lang="en-US" sz="1100" dirty="0"/>
+          </a:p>
+        </p:txBody>
+      </p:sp>
+      <p:sp>
+        <p:nvSpPr>
+          <p:cNvPr id="17" name="Shape 15"/>
+          <p:cNvSpPr/>
+          <p:nvPr/>
+        </p:nvSpPr>
+        <p:spPr>
+          <a:xfrm>
+            <a:off x="4663440" y="1371600"/>
+            <a:ext cx="3977640" cy="3401568"/>
+          </a:xfrm>
+          <a:prstGeom prst="roundRect">
+            <a:avLst>
+              <a:gd name="adj" fmla="val 1882"/>
+            </a:avLst>
+          </a:prstGeom>
+          <a:solidFill>
+            <a:srgbClr val="1A1535"/>
+          </a:solidFill>
+          <a:ln w="12700">
+            <a:solidFill>
+              <a:srgbClr val="2A2050"/>
+            </a:solidFill>
+            <a:prstDash val="solid"/>
+          </a:ln>
+        </p:spPr>
+      </p:sp>
+      <p:sp>
+        <p:nvSpPr>
+          <p:cNvPr id="18" name="Text 16"/>
+          <p:cNvSpPr/>
+          <p:nvPr/>
+        </p:nvSpPr>
+        <p:spPr>
+          <a:xfrm>
+            <a:off x="4892040" y="1554480"/>
+            <a:ext cx="3520440" cy="329184"/>
+          </a:xfrm>
+          <a:prstGeom prst="rect">
+            <a:avLst/>
+          </a:prstGeom>
+          <a:noFill/>
+          <a:ln/>
+        </p:spPr>
+        <p:txBody>
+          <a:bodyPr wrap="square" lIns="0" tIns="0" rIns="0" bIns="0" rtlCol="0" anchor="ctr"/>
+          <a:lstStyle/>
+          <a:p>
+            <a:pPr marL="0" indent="0">
+              <a:buNone/>
+            </a:pPr>
+            <a:r>
+              <a:rPr lang="en-US" sz="1700" b="1" dirty="0">
+                <a:solidFill>
+                  <a:srgbClr val="A29BFE"/>
+                </a:solidFill>
+                <a:latin typeface="Calibri" pitchFamily="34" charset="0"/>
+                <a:ea typeface="Calibri" pitchFamily="34" charset="-122"/>
+                <a:cs typeface="Calibri" pitchFamily="34" charset="-120"/>
+              </a:rPr>
+              <a:t>Backend</a:t>
+            </a:r>
+            <a:endParaRPr lang="en-US" sz="1700" dirty="0"/>
+          </a:p>
+        </p:txBody>
+      </p:sp>
+      <p:sp>
+        <p:nvSpPr>
+          <p:cNvPr id="19" name="Shape 17"/>
+          <p:cNvSpPr/>
+          <p:nvPr/>
+        </p:nvSpPr>
+        <p:spPr>
+          <a:xfrm>
+            <a:off x="4910328" y="2121408"/>
+            <a:ext cx="164592" cy="45720"/>
+          </a:xfrm>
+          <a:prstGeom prst="rect">
+            <a:avLst/>
+          </a:prstGeom>
+          <a:solidFill>
+            <a:srgbClr val="6C5CE7"/>
+          </a:solidFill>
+          <a:ln/>
+        </p:spPr>
+      </p:sp>
+      <p:sp>
+        <p:nvSpPr>
+          <p:cNvPr id="20" name="Text 18"/>
+          <p:cNvSpPr/>
+          <p:nvPr/>
+        </p:nvSpPr>
+        <p:spPr>
+          <a:xfrm>
+            <a:off x="5193792" y="2057400"/>
+            <a:ext cx="3246120" cy="502920"/>
+          </a:xfrm>
+          <a:prstGeom prst="rect">
+            <a:avLst/>
+          </a:prstGeom>
+          <a:noFill/>
+          <a:ln/>
+        </p:spPr>
+        <p:txBody>
+          <a:bodyPr wrap="square" lIns="0" tIns="0" rIns="0" bIns="0" rtlCol="0" anchor="ctr"/>
+          <a:lstStyle/>
+          <a:p>
+            <a:pPr marL="0" indent="0">
+              <a:buNone/>
+            </a:pPr>
+            <a:r>
+              <a:rPr lang="en-US" sz="1100" dirty="0">
+                <a:solidFill>
+                  <a:srgbClr val="E8E4F9"/>
+                </a:solidFill>
+                <a:latin typeface="Calibri" pitchFamily="34" charset="0"/>
+                <a:ea typeface="Calibri" pitchFamily="34" charset="-122"/>
+                <a:cs typeface="Calibri" pitchFamily="34" charset="-120"/>
+              </a:rPr>
+              <a:t>Node.js + Express 5 — layered: routes / controllers / services / repositories</a:t>
+            </a:r>
+            <a:endParaRPr lang="en-US" sz="1100" dirty="0"/>
+          </a:p>
+        </p:txBody>
+      </p:sp>
+      <p:sp>
+        <p:nvSpPr>
+          <p:cNvPr id="21" name="Shape 19"/>
+          <p:cNvSpPr/>
+          <p:nvPr/>
+        </p:nvSpPr>
+        <p:spPr>
+          <a:xfrm>
+            <a:off x="4910328" y="2651760"/>
+            <a:ext cx="164592" cy="45720"/>
+          </a:xfrm>
+          <a:prstGeom prst="rect">
+            <a:avLst/>
+          </a:prstGeom>
+          <a:solidFill>
+            <a:srgbClr val="6C5CE7"/>
+          </a:solidFill>
+          <a:ln/>
+        </p:spPr>
+      </p:sp>
+      <p:sp>
+        <p:nvSpPr>
+          <p:cNvPr id="22" name="Text 20"/>
+          <p:cNvSpPr/>
+          <p:nvPr/>
+        </p:nvSpPr>
+        <p:spPr>
+          <a:xfrm>
+            <a:off x="5193792" y="2587752"/>
+            <a:ext cx="3246120" cy="502920"/>
+          </a:xfrm>
+          <a:prstGeom prst="rect">
+            <a:avLst/>
+          </a:prstGeom>
+          <a:noFill/>
+          <a:ln/>
+        </p:spPr>
+        <p:txBody>
+          <a:bodyPr wrap="square" lIns="0" tIns="0" rIns="0" bIns="0" rtlCol="0" anchor="ctr"/>
+          <a:lstStyle/>
+          <a:p>
+            <a:pPr marL="0" indent="0">
+              <a:buNone/>
+            </a:pPr>
+            <a:r>
+              <a:rPr lang="en-US" sz="1100" dirty="0">
+                <a:solidFill>
+                  <a:srgbClr val="E8E4F9"/>
+                </a:solidFill>
+                <a:latin typeface="Calibri" pitchFamily="34" charset="0"/>
+                <a:ea typeface="Calibri" pitchFamily="34" charset="-122"/>
+                <a:cs typeface="Calibri" pitchFamily="34" charset="-120"/>
+              </a:rPr>
+              <a:t>PostgreSQL (Sequelize) · MongoDB for chat &amp; logs</a:t>
+            </a:r>
+            <a:endParaRPr lang="en-US" sz="1100" dirty="0"/>
+          </a:p>
+        </p:txBody>
+      </p:sp>
+      <p:sp>
+        <p:nvSpPr>
+          <p:cNvPr id="23" name="Shape 21"/>
+          <p:cNvSpPr/>
+          <p:nvPr/>
+        </p:nvSpPr>
+        <p:spPr>
+          <a:xfrm>
+            <a:off x="4910328" y="3182112"/>
+            <a:ext cx="164592" cy="45720"/>
+          </a:xfrm>
+          <a:prstGeom prst="rect">
+            <a:avLst/>
+          </a:prstGeom>
+          <a:solidFill>
+            <a:srgbClr val="6C5CE7"/>
+          </a:solidFill>
+          <a:ln/>
+        </p:spPr>
+      </p:sp>
+      <p:sp>
+        <p:nvSpPr>
+          <p:cNvPr id="24" name="Text 22"/>
+          <p:cNvSpPr/>
+          <p:nvPr/>
+        </p:nvSpPr>
+        <p:spPr>
+          <a:xfrm>
+            <a:off x="5193792" y="3118104"/>
+            <a:ext cx="3246120" cy="502920"/>
+          </a:xfrm>
+          <a:prstGeom prst="rect">
+            <a:avLst/>
+          </a:prstGeom>
+          <a:noFill/>
+          <a:ln/>
+        </p:spPr>
+        <p:txBody>
+          <a:bodyPr wrap="square" lIns="0" tIns="0" rIns="0" bIns="0" rtlCol="0" anchor="ctr"/>
+          <a:lstStyle/>
+          <a:p>
+            <a:pPr marL="0" indent="0">
+              <a:buNone/>
+            </a:pPr>
+            <a:r>
+              <a:rPr lang="en-US" sz="1100" dirty="0">
+                <a:solidFill>
+                  <a:srgbClr val="E8E4F9"/>
+                </a:solidFill>
+                <a:latin typeface="Calibri" pitchFamily="34" charset="0"/>
+                <a:ea typeface="Calibri" pitchFamily="34" charset="-122"/>
+                <a:cs typeface="Calibri" pitchFamily="34" charset="-120"/>
+              </a:rPr>
+              <a:t>GraphQL alongside REST · WebSockets</a:t>
+            </a:r>
+            <a:endParaRPr lang="en-US" sz="1100" dirty="0"/>
+          </a:p>
+        </p:txBody>
+      </p:sp>
+      <p:sp>
+        <p:nvSpPr>
+          <p:cNvPr id="25" name="Shape 23"/>
+          <p:cNvSpPr/>
+          <p:nvPr/>
+        </p:nvSpPr>
+        <p:spPr>
+          <a:xfrm>
+            <a:off x="4910328" y="3712464"/>
+            <a:ext cx="164592" cy="45720"/>
+          </a:xfrm>
+          <a:prstGeom prst="rect">
+            <a:avLst/>
+          </a:prstGeom>
+          <a:solidFill>
+            <a:srgbClr val="6C5CE7"/>
+          </a:solidFill>
+          <a:ln/>
+        </p:spPr>
+      </p:sp>
+      <p:sp>
+        <p:nvSpPr>
+          <p:cNvPr id="26" name="Text 24"/>
+          <p:cNvSpPr/>
+          <p:nvPr/>
+        </p:nvSpPr>
+        <p:spPr>
+          <a:xfrm>
+            <a:off x="5193792" y="3648456"/>
+            <a:ext cx="3246120" cy="502920"/>
+          </a:xfrm>
+          <a:prstGeom prst="rect">
+            <a:avLst/>
+          </a:prstGeom>
+          <a:noFill/>
+          <a:ln/>
+        </p:spPr>
+        <p:txBody>
+          <a:bodyPr wrap="square" lIns="0" tIns="0" rIns="0" bIns="0" rtlCol="0" anchor="ctr"/>
+          <a:lstStyle/>
+          <a:p>
+            <a:pPr marL="0" indent="0">
+              <a:buNone/>
+            </a:pPr>
+            <a:r>
+              <a:rPr lang="en-US" sz="1100" dirty="0">
+                <a:solidFill>
+                  <a:srgbClr val="E8E4F9"/>
+                </a:solidFill>
+                <a:latin typeface="Calibri" pitchFamily="34" charset="0"/>
+                <a:ea typeface="Calibri" pitchFamily="34" charset="-122"/>
+                <a:cs typeface="Calibri" pitchFamily="34" charset="-120"/>
+              </a:rPr>
+              <a:t>Passport (local + OAuth) · Hugging Face inference</a:t>
+            </a:r>
+            <a:endParaRPr lang="en-US" sz="1100" dirty="0"/>
+          </a:p>
+        </p:txBody>
+      </p:sp>
+      <p:sp>
+        <p:nvSpPr>
+          <p:cNvPr id="27" name="Shape 25"/>
+          <p:cNvSpPr/>
+          <p:nvPr/>
+        </p:nvSpPr>
+        <p:spPr>
+          <a:xfrm>
+            <a:off x="4910328" y="4242816"/>
+            <a:ext cx="164592" cy="45720"/>
+          </a:xfrm>
+          <a:prstGeom prst="rect">
+            <a:avLst/>
+          </a:prstGeom>
+          <a:solidFill>
+            <a:srgbClr val="6C5CE7"/>
+          </a:solidFill>
+          <a:ln/>
+        </p:spPr>
+      </p:sp>
+      <p:sp>
+        <p:nvSpPr>
+          <p:cNvPr id="28" name="Text 26"/>
+          <p:cNvSpPr/>
+          <p:nvPr/>
+        </p:nvSpPr>
+        <p:spPr>
+          <a:xfrm>
+            <a:off x="5193792" y="4178808"/>
+            <a:ext cx="3246120" cy="502920"/>
+          </a:xfrm>
+          <a:prstGeom prst="rect">
+            <a:avLst/>
+          </a:prstGeom>
+          <a:noFill/>
+          <a:ln/>
+        </p:spPr>
+        <p:txBody>
+          <a:bodyPr wrap="square" lIns="0" tIns="0" rIns="0" bIns="0" rtlCol="0" anchor="ctr"/>
+          <a:lstStyle/>
+          <a:p>
+            <a:pPr marL="0" indent="0">
+              <a:buNone/>
+            </a:pPr>
+            <a:r>
+              <a:rPr lang="en-US" sz="1100" dirty="0">
+                <a:solidFill>
+                  <a:srgbClr val="E8E4F9"/>
+                </a:solidFill>
+                <a:latin typeface="Calibri" pitchFamily="34" charset="0"/>
+                <a:ea typeface="Calibri" pitchFamily="34" charset="-122"/>
+                <a:cs typeface="Calibri" pitchFamily="34" charset="-120"/>
+              </a:rPr>
+              <a:t>Tested: Jest · Supertest</a:t>
+            </a:r>
+            <a:endParaRPr lang="en-US" sz="1100" dirty="0"/>
+          </a:p>
+        </p:txBody>
+      </p:sp>
+    </p:spTree>
+  </p:cSld>
+  <p:clrMapOvr>
+    <a:masterClrMapping/>
+  </p:clrMapOvr>
+</p:sld>
+</file>
+
+<file path=ppt/slides/slide13.xml><?xml version="1.0" encoding="utf-8"?>
+<p:sld xmlns:a="http://schemas.openxmlformats.org/drawingml/2006/main" xmlns:r="http://schemas.openxmlformats.org/officeDocument/2006/relationships" xmlns:p="http://schemas.openxmlformats.org/presentationml/2006/main">
+  <p:cSld name="Slide 13">
+    <p:bg>
+      <p:bgPr>
+        <a:solidFill>
+          <a:srgbClr val="0D0B1E"/>
+        </a:solidFill>
+        <a:effectLst/>
+      </p:bgPr>
+    </p:bg>
+    <p:spTree>
+      <p:nvGrpSpPr>
+        <p:cNvPr id="1" name=""/>
+        <p:cNvGrpSpPr/>
+        <p:nvPr/>
+      </p:nvGrpSpPr>
+      <p:grpSpPr>
+        <a:xfrm>
+          <a:off x="0" y="0"/>
+          <a:ext cx="0" cy="0"/>
+          <a:chOff x="0" y="0"/>
+          <a:chExt cx="0" cy="0"/>
+        </a:xfrm>
+      </p:grpSpPr>
+      <p:sp>
+        <p:nvSpPr>
           <p:cNvPr id="2" name="Shape 0"/>
           <p:cNvSpPr/>
           <p:nvPr/>
@@ -3530,7 +4620,7 @@
         </p:nvSpPr>
         <p:spPr>
           <a:xfrm>
-            <a:off x="502920" y="1716786"/>
+            <a:off x="502920" y="1682496"/>
             <a:ext cx="8138160" cy="1005840"/>
           </a:xfrm>
           <a:prstGeom prst="rect">
@@ -3580,7 +4670,7 @@
         </p:nvSpPr>
         <p:spPr>
           <a:xfrm>
-            <a:off x="502920" y="2880360"/>
+            <a:off x="502920" y="2688336"/>
             <a:ext cx="8138160" cy="384048"/>
           </a:xfrm>
           <a:prstGeom prst="rect">
@@ -5468,17 +6558,6 @@
             <a:pPr marL="0" indent="0" algn="ctr">
               <a:buNone/>
             </a:pPr>
-            <a:r>
-              <a:rPr lang="en-US" sz="1200" i="1" dirty="0">
-                <a:solidFill>
-                  <a:srgbClr val="8892A4"/>
-                </a:solidFill>
-                <a:latin typeface="Calibri" pitchFamily="34" charset="0"/>
-                <a:ea typeface="Calibri" pitchFamily="34" charset="-122"/>
-                <a:cs typeface="Calibri" pitchFamily="34" charset="-120"/>
-              </a:rPr>
-              <a:t>Every step lives in the same product — one account, one source of truth.</a:t>
-            </a:r>
             <a:endParaRPr lang="en-US" sz="1200" dirty="0"/>
           </a:p>
         </p:txBody>
@@ -5622,7 +6701,7 @@
         </p:nvSpPr>
         <p:spPr>
           <a:xfrm>
-            <a:off x="502920" y="1371600"/>
+            <a:off x="457200" y="1382829"/>
             <a:ext cx="3977640" cy="3401568"/>
           </a:xfrm>
           <a:prstGeom prst="roundRect">
@@ -5747,7 +6826,7 @@
         </p:nvSpPr>
         <p:spPr>
           <a:xfrm>
-            <a:off x="749808" y="2478024"/>
+            <a:off x="749808" y="2432304"/>
             <a:ext cx="82296" cy="82296"/>
           </a:xfrm>
           <a:prstGeom prst="ellipse">
@@ -5767,7 +6846,7 @@
         </p:nvSpPr>
         <p:spPr>
           <a:xfrm>
-            <a:off x="960120" y="2414016"/>
+            <a:off x="960120" y="2368296"/>
             <a:ext cx="3291840" cy="310896"/>
           </a:xfrm>
           <a:prstGeom prst="rect">
@@ -5806,7 +6885,7 @@
         </p:nvSpPr>
         <p:spPr>
           <a:xfrm>
-            <a:off x="749808" y="2862072"/>
+            <a:off x="749808" y="2770632"/>
             <a:ext cx="82296" cy="82296"/>
           </a:xfrm>
           <a:prstGeom prst="ellipse">
@@ -5826,7 +6905,7 @@
         </p:nvSpPr>
         <p:spPr>
           <a:xfrm>
-            <a:off x="960120" y="2798064"/>
+            <a:off x="960120" y="2706624"/>
             <a:ext cx="3291840" cy="310896"/>
           </a:xfrm>
           <a:prstGeom prst="rect">
@@ -5865,7 +6944,7 @@
         </p:nvSpPr>
         <p:spPr>
           <a:xfrm>
-            <a:off x="749808" y="3246120"/>
+            <a:off x="749808" y="3108960"/>
             <a:ext cx="82296" cy="82296"/>
           </a:xfrm>
           <a:prstGeom prst="ellipse">
@@ -5885,7 +6964,7 @@
         </p:nvSpPr>
         <p:spPr>
           <a:xfrm>
-            <a:off x="960120" y="3182112"/>
+            <a:off x="960120" y="3044952"/>
             <a:ext cx="3291840" cy="310896"/>
           </a:xfrm>
           <a:prstGeom prst="rect">
@@ -5924,7 +7003,7 @@
         </p:nvSpPr>
         <p:spPr>
           <a:xfrm>
-            <a:off x="749808" y="3630168"/>
+            <a:off x="749808" y="3447288"/>
             <a:ext cx="82296" cy="82296"/>
           </a:xfrm>
           <a:prstGeom prst="ellipse">
@@ -5944,7 +7023,7 @@
         </p:nvSpPr>
         <p:spPr>
           <a:xfrm>
-            <a:off x="960120" y="3566160"/>
+            <a:off x="960120" y="3383280"/>
             <a:ext cx="3291840" cy="310896"/>
           </a:xfrm>
           <a:prstGeom prst="rect">
@@ -5983,7 +7062,7 @@
         </p:nvSpPr>
         <p:spPr>
           <a:xfrm>
-            <a:off x="749808" y="4014216"/>
+            <a:off x="749808" y="3785616"/>
             <a:ext cx="82296" cy="82296"/>
           </a:xfrm>
           <a:prstGeom prst="ellipse">
@@ -6003,7 +7082,7 @@
         </p:nvSpPr>
         <p:spPr>
           <a:xfrm>
-            <a:off x="960120" y="3950208"/>
+            <a:off x="960120" y="3721608"/>
             <a:ext cx="3291840" cy="310896"/>
           </a:xfrm>
           <a:prstGeom prst="rect">
@@ -6042,7 +7121,7 @@
         </p:nvSpPr>
         <p:spPr>
           <a:xfrm>
-            <a:off x="749808" y="4398264"/>
+            <a:off x="749808" y="4123944"/>
             <a:ext cx="82296" cy="82296"/>
           </a:xfrm>
           <a:prstGeom prst="ellipse">
@@ -6062,7 +7141,7 @@
         </p:nvSpPr>
         <p:spPr>
           <a:xfrm>
-            <a:off x="960120" y="4334256"/>
+            <a:off x="960120" y="4059936"/>
             <a:ext cx="3291840" cy="310896"/>
           </a:xfrm>
           <a:prstGeom prst="rect">
@@ -6087,6 +7166,65 @@
                 <a:ea typeface="Calibri" pitchFamily="34" charset="-122"/>
                 <a:cs typeface="Calibri" pitchFamily="34" charset="-120"/>
               </a:rPr>
+              <a:t>Prize pool draws</a:t>
+            </a:r>
+            <a:endParaRPr lang="en-US" sz="1200" dirty="0"/>
+          </a:p>
+        </p:txBody>
+      </p:sp>
+      <p:sp>
+        <p:nvSpPr>
+          <p:cNvPr id="21" name="Shape 19"/>
+          <p:cNvSpPr/>
+          <p:nvPr/>
+        </p:nvSpPr>
+        <p:spPr>
+          <a:xfrm>
+            <a:off x="749808" y="4462272"/>
+            <a:ext cx="82296" cy="82296"/>
+          </a:xfrm>
+          <a:prstGeom prst="ellipse">
+            <a:avLst/>
+          </a:prstGeom>
+          <a:solidFill>
+            <a:srgbClr val="6C5CE7"/>
+          </a:solidFill>
+          <a:ln/>
+        </p:spPr>
+      </p:sp>
+      <p:sp>
+        <p:nvSpPr>
+          <p:cNvPr id="22" name="Text 20"/>
+          <p:cNvSpPr/>
+          <p:nvPr/>
+        </p:nvSpPr>
+        <p:spPr>
+          <a:xfrm>
+            <a:off x="960120" y="4398264"/>
+            <a:ext cx="3291840" cy="310896"/>
+          </a:xfrm>
+          <a:prstGeom prst="rect">
+            <a:avLst/>
+          </a:prstGeom>
+          <a:noFill/>
+          <a:ln/>
+        </p:spPr>
+        <p:txBody>
+          <a:bodyPr wrap="square" lIns="0" tIns="0" rIns="0" bIns="0" rtlCol="0" anchor="ctr"/>
+          <a:lstStyle/>
+          <a:p>
+            <a:pPr marL="0" indent="0">
+              <a:buNone/>
+            </a:pPr>
+            <a:r>
+              <a:rPr lang="en-US" sz="1200" dirty="0">
+                <a:solidFill>
+                  <a:srgbClr val="E8E4F9"/>
+                </a:solidFill>
+                <a:latin typeface="Calibri" pitchFamily="34" charset="0"/>
+                <a:ea typeface="Calibri" pitchFamily="34" charset="-122"/>
+                <a:cs typeface="Calibri" pitchFamily="34" charset="-120"/>
+              </a:rPr>
               <a:t>Public event statistics</a:t>
             </a:r>
             <a:endParaRPr lang="en-US" sz="1200" dirty="0"/>
@@ -6095,7 +7233,7 @@
       </p:sp>
       <p:sp>
         <p:nvSpPr>
-          <p:cNvPr id="21" name="Shape 19"/>
+          <p:cNvPr id="23" name="Shape 21"/>
           <p:cNvSpPr/>
           <p:nvPr/>
         </p:nvSpPr>
@@ -6122,7 +7260,7 @@
       </p:sp>
       <p:sp>
         <p:nvSpPr>
-          <p:cNvPr id="22" name="Text 20"/>
+          <p:cNvPr id="24" name="Text 22"/>
           <p:cNvSpPr/>
           <p:nvPr/>
         </p:nvSpPr>
@@ -6161,7 +7299,7 @@
       </p:sp>
       <p:sp>
         <p:nvSpPr>
-          <p:cNvPr id="23" name="Shape 21"/>
+          <p:cNvPr id="25" name="Shape 23"/>
           <p:cNvSpPr/>
           <p:nvPr/>
         </p:nvSpPr>
@@ -6181,7 +7319,7 @@
       </p:sp>
       <p:sp>
         <p:nvSpPr>
-          <p:cNvPr id="24" name="Text 22"/>
+          <p:cNvPr id="26" name="Text 24"/>
           <p:cNvSpPr/>
           <p:nvPr/>
         </p:nvSpPr>
@@ -6220,13 +7358,13 @@
       </p:sp>
       <p:sp>
         <p:nvSpPr>
-          <p:cNvPr id="25" name="Shape 23"/>
-          <p:cNvSpPr/>
-          <p:nvPr/>
-        </p:nvSpPr>
-        <p:spPr>
-          <a:xfrm>
-            <a:off x="4910328" y="2478024"/>
+          <p:cNvPr id="27" name="Shape 25"/>
+          <p:cNvSpPr/>
+          <p:nvPr/>
+        </p:nvSpPr>
+        <p:spPr>
+          <a:xfrm>
+            <a:off x="4910328" y="2432304"/>
             <a:ext cx="82296" cy="82296"/>
           </a:xfrm>
           <a:prstGeom prst="ellipse">
@@ -6240,13 +7378,13 @@
       </p:sp>
       <p:sp>
         <p:nvSpPr>
-          <p:cNvPr id="26" name="Text 24"/>
-          <p:cNvSpPr/>
-          <p:nvPr/>
-        </p:nvSpPr>
-        <p:spPr>
-          <a:xfrm>
-            <a:off x="5120640" y="2414016"/>
+          <p:cNvPr id="28" name="Text 26"/>
+          <p:cNvSpPr/>
+          <p:nvPr/>
+        </p:nvSpPr>
+        <p:spPr>
+          <a:xfrm>
+            <a:off x="5120640" y="2368296"/>
             <a:ext cx="3291840" cy="310896"/>
           </a:xfrm>
           <a:prstGeom prst="rect">
@@ -6279,13 +7417,13 @@
       </p:sp>
       <p:sp>
         <p:nvSpPr>
-          <p:cNvPr id="27" name="Shape 25"/>
-          <p:cNvSpPr/>
-          <p:nvPr/>
-        </p:nvSpPr>
-        <p:spPr>
-          <a:xfrm>
-            <a:off x="4910328" y="2862072"/>
+          <p:cNvPr id="29" name="Shape 27"/>
+          <p:cNvSpPr/>
+          <p:nvPr/>
+        </p:nvSpPr>
+        <p:spPr>
+          <a:xfrm>
+            <a:off x="4910328" y="2770632"/>
             <a:ext cx="82296" cy="82296"/>
           </a:xfrm>
           <a:prstGeom prst="ellipse">
@@ -6299,13 +7437,13 @@
       </p:sp>
       <p:sp>
         <p:nvSpPr>
-          <p:cNvPr id="28" name="Text 26"/>
-          <p:cNvSpPr/>
-          <p:nvPr/>
-        </p:nvSpPr>
-        <p:spPr>
-          <a:xfrm>
-            <a:off x="5120640" y="2798064"/>
+          <p:cNvPr id="30" name="Text 28"/>
+          <p:cNvSpPr/>
+          <p:nvPr/>
+        </p:nvSpPr>
+        <p:spPr>
+          <a:xfrm>
+            <a:off x="5120640" y="2706624"/>
             <a:ext cx="3291840" cy="310896"/>
           </a:xfrm>
           <a:prstGeom prst="rect">
@@ -6338,13 +7476,13 @@
       </p:sp>
       <p:sp>
         <p:nvSpPr>
-          <p:cNvPr id="29" name="Shape 27"/>
-          <p:cNvSpPr/>
-          <p:nvPr/>
-        </p:nvSpPr>
-        <p:spPr>
-          <a:xfrm>
-            <a:off x="4910328" y="3246120"/>
+          <p:cNvPr id="31" name="Shape 29"/>
+          <p:cNvSpPr/>
+          <p:nvPr/>
+        </p:nvSpPr>
+        <p:spPr>
+          <a:xfrm>
+            <a:off x="4910328" y="3108960"/>
             <a:ext cx="82296" cy="82296"/>
           </a:xfrm>
           <a:prstGeom prst="ellipse">
@@ -6358,13 +7496,72 @@
       </p:sp>
       <p:sp>
         <p:nvSpPr>
-          <p:cNvPr id="30" name="Text 28"/>
-          <p:cNvSpPr/>
-          <p:nvPr/>
-        </p:nvSpPr>
-        <p:spPr>
-          <a:xfrm>
-            <a:off x="5120640" y="3182112"/>
+          <p:cNvPr id="32" name="Text 30"/>
+          <p:cNvSpPr/>
+          <p:nvPr/>
+        </p:nvSpPr>
+        <p:spPr>
+          <a:xfrm>
+            <a:off x="5120640" y="3044952"/>
+            <a:ext cx="3291840" cy="310896"/>
+          </a:xfrm>
+          <a:prstGeom prst="rect">
+            <a:avLst/>
+          </a:prstGeom>
+          <a:noFill/>
+          <a:ln/>
+        </p:spPr>
+        <p:txBody>
+          <a:bodyPr wrap="square" lIns="0" tIns="0" rIns="0" bIns="0" rtlCol="0" anchor="ctr"/>
+          <a:lstStyle/>
+          <a:p>
+            <a:pPr marL="0" indent="0">
+              <a:buNone/>
+            </a:pPr>
+            <a:r>
+              <a:rPr lang="en-US" sz="1200" dirty="0">
+                <a:solidFill>
+                  <a:srgbClr val="E8E4F9"/>
+                </a:solidFill>
+                <a:latin typeface="Calibri" pitchFamily="34" charset="0"/>
+                <a:ea typeface="Calibri" pitchFamily="34" charset="-122"/>
+                <a:cs typeface="Calibri" pitchFamily="34" charset="-120"/>
+              </a:rPr>
+              <a:t>Prize draw launcher</a:t>
+            </a:r>
+            <a:endParaRPr lang="en-US" sz="1200" dirty="0"/>
+          </a:p>
+        </p:txBody>
+      </p:sp>
+      <p:sp>
+        <p:nvSpPr>
+          <p:cNvPr id="33" name="Shape 31"/>
+          <p:cNvSpPr/>
+          <p:nvPr/>
+        </p:nvSpPr>
+        <p:spPr>
+          <a:xfrm>
+            <a:off x="4910328" y="3447288"/>
+            <a:ext cx="82296" cy="82296"/>
+          </a:xfrm>
+          <a:prstGeom prst="ellipse">
+            <a:avLst/>
+          </a:prstGeom>
+          <a:solidFill>
+            <a:srgbClr val="6C5CE7"/>
+          </a:solidFill>
+          <a:ln/>
+        </p:spPr>
+      </p:sp>
+      <p:sp>
+        <p:nvSpPr>
+          <p:cNvPr id="34" name="Text 32"/>
+          <p:cNvSpPr/>
+          <p:nvPr/>
+        </p:nvSpPr>
+        <p:spPr>
+          <a:xfrm>
+            <a:off x="5120640" y="3383280"/>
             <a:ext cx="3291840" cy="310896"/>
           </a:xfrm>
           <a:prstGeom prst="rect">
@@ -9024,6 +10221,998 @@
 
 <file path=ppt/slides/slide7.xml><?xml version="1.0" encoding="utf-8"?>
 <p:sld xmlns:a="http://schemas.openxmlformats.org/drawingml/2006/main" xmlns:r="http://schemas.openxmlformats.org/officeDocument/2006/relationships" xmlns:p="http://schemas.openxmlformats.org/presentationml/2006/main">
+  <p:cSld name="Slide 9">
+    <p:bg>
+      <p:bgPr>
+        <a:solidFill>
+          <a:srgbClr val="0D0B1E"/>
+        </a:solidFill>
+        <a:effectLst/>
+      </p:bgPr>
+    </p:bg>
+    <p:spTree>
+      <p:nvGrpSpPr>
+        <p:cNvPr id="1" name=""/>
+        <p:cNvGrpSpPr/>
+        <p:nvPr/>
+      </p:nvGrpSpPr>
+      <p:grpSpPr>
+        <a:xfrm>
+          <a:off x="0" y="0"/>
+          <a:ext cx="0" cy="0"/>
+          <a:chOff x="0" y="0"/>
+          <a:chExt cx="0" cy="0"/>
+        </a:xfrm>
+      </p:grpSpPr>
+      <p:sp>
+        <p:nvSpPr>
+          <p:cNvPr id="2" name="Text 0"/>
+          <p:cNvSpPr/>
+          <p:nvPr/>
+        </p:nvSpPr>
+        <p:spPr>
+          <a:xfrm>
+            <a:off x="502920" y="274320"/>
+            <a:ext cx="8138160" cy="237744"/>
+          </a:xfrm>
+          <a:prstGeom prst="rect">
+            <a:avLst/>
+          </a:prstGeom>
+          <a:noFill/>
+          <a:ln/>
+        </p:spPr>
+        <p:txBody>
+          <a:bodyPr wrap="square" lIns="0" tIns="0" rIns="0" bIns="0" rtlCol="0" anchor="ctr"/>
+          <a:lstStyle/>
+          <a:p>
+            <a:pPr marL="0" indent="0">
+              <a:buNone/>
+            </a:pPr>
+            <a:r>
+              <a:rPr lang="en-US" sz="1300" b="1" kern="0" spc="400" dirty="0">
+                <a:solidFill>
+                  <a:srgbClr val="A29BFE"/>
+                </a:solidFill>
+                <a:latin typeface="Calibri" pitchFamily="34" charset="0"/>
+                <a:ea typeface="Calibri" pitchFamily="34" charset="-122"/>
+                <a:cs typeface="Calibri" pitchFamily="34" charset="-120"/>
+              </a:rPr>
+              <a:t>FEATURE</a:t>
+            </a:r>
+            <a:endParaRPr lang="en-US" sz="1300" dirty="0"/>
+          </a:p>
+        </p:txBody>
+      </p:sp>
+      <p:sp>
+        <p:nvSpPr>
+          <p:cNvPr id="3" name="Text 1"/>
+          <p:cNvSpPr/>
+          <p:nvPr/>
+        </p:nvSpPr>
+        <p:spPr>
+          <a:xfrm>
+            <a:off x="502920" y="512064"/>
+            <a:ext cx="8138160" cy="530352"/>
+          </a:xfrm>
+          <a:prstGeom prst="rect">
+            <a:avLst/>
+          </a:prstGeom>
+          <a:noFill/>
+          <a:ln/>
+        </p:spPr>
+        <p:txBody>
+          <a:bodyPr wrap="square" lIns="0" tIns="0" rIns="0" bIns="0" rtlCol="0" anchor="ctr"/>
+          <a:lstStyle/>
+          <a:p>
+            <a:pPr marL="0" indent="0">
+              <a:buNone/>
+            </a:pPr>
+            <a:r>
+              <a:rPr lang="en-US" sz="3100" b="1" dirty="0">
+                <a:solidFill>
+                  <a:srgbClr val="FFFFFF"/>
+                </a:solidFill>
+                <a:latin typeface="Calibri" pitchFamily="34" charset="0"/>
+                <a:ea typeface="Calibri" pitchFamily="34" charset="-122"/>
+                <a:cs typeface="Calibri" pitchFamily="34" charset="-120"/>
+              </a:rPr>
+              <a:t>Prize Pool Draw</a:t>
+            </a:r>
+            <a:endParaRPr lang="en-US" sz="3100" dirty="0"/>
+          </a:p>
+        </p:txBody>
+      </p:sp>
+      <p:sp>
+        <p:nvSpPr>
+          <p:cNvPr id="4" name="Shape 2"/>
+          <p:cNvSpPr/>
+          <p:nvPr/>
+        </p:nvSpPr>
+        <p:spPr>
+          <a:xfrm>
+            <a:off x="502920" y="1097280"/>
+            <a:ext cx="1051560" cy="73152"/>
+          </a:xfrm>
+          <a:prstGeom prst="rect">
+            <a:avLst/>
+          </a:prstGeom>
+          <a:solidFill>
+            <a:srgbClr val="6C5CE7"/>
+          </a:solidFill>
+          <a:ln/>
+        </p:spPr>
+      </p:sp>
+      <p:sp>
+        <p:nvSpPr>
+          <p:cNvPr id="5" name="Shape 3"/>
+          <p:cNvSpPr/>
+          <p:nvPr/>
+        </p:nvSpPr>
+        <p:spPr>
+          <a:xfrm>
+            <a:off x="502920" y="1508760"/>
+            <a:ext cx="274320" cy="54864"/>
+          </a:xfrm>
+          <a:prstGeom prst="rect">
+            <a:avLst/>
+          </a:prstGeom>
+          <a:solidFill>
+            <a:srgbClr val="6C5CE7"/>
+          </a:solidFill>
+          <a:ln/>
+        </p:spPr>
+      </p:sp>
+      <p:sp>
+        <p:nvSpPr>
+          <p:cNvPr id="6" name="Text 4"/>
+          <p:cNvSpPr/>
+          <p:nvPr/>
+        </p:nvSpPr>
+        <p:spPr>
+          <a:xfrm>
+            <a:off x="914400" y="1417320"/>
+            <a:ext cx="4114800" cy="274320"/>
+          </a:xfrm>
+          <a:prstGeom prst="rect">
+            <a:avLst/>
+          </a:prstGeom>
+          <a:noFill/>
+          <a:ln/>
+        </p:spPr>
+        <p:txBody>
+          <a:bodyPr wrap="square" lIns="0" tIns="0" rIns="0" bIns="0" rtlCol="0" anchor="ctr"/>
+          <a:lstStyle/>
+          <a:p>
+            <a:pPr marL="0" indent="0">
+              <a:buNone/>
+            </a:pPr>
+            <a:r>
+              <a:rPr lang="en-US" sz="1400" b="1" dirty="0">
+                <a:solidFill>
+                  <a:srgbClr val="FFFFFF"/>
+                </a:solidFill>
+                <a:latin typeface="Calibri" pitchFamily="34" charset="0"/>
+                <a:ea typeface="Calibri" pitchFamily="34" charset="-122"/>
+                <a:cs typeface="Calibri" pitchFamily="34" charset="-120"/>
+              </a:rPr>
+              <a:t>Admin launches a draw</a:t>
+            </a:r>
+            <a:endParaRPr lang="en-US" sz="1400" dirty="0"/>
+          </a:p>
+        </p:txBody>
+      </p:sp>
+      <p:sp>
+        <p:nvSpPr>
+          <p:cNvPr id="7" name="Text 5"/>
+          <p:cNvSpPr/>
+          <p:nvPr/>
+        </p:nvSpPr>
+        <p:spPr>
+          <a:xfrm>
+            <a:off x="914400" y="1691640"/>
+            <a:ext cx="4114800" cy="256032"/>
+          </a:xfrm>
+          <a:prstGeom prst="rect">
+            <a:avLst/>
+          </a:prstGeom>
+          <a:noFill/>
+          <a:ln/>
+        </p:spPr>
+        <p:txBody>
+          <a:bodyPr wrap="square" lIns="0" tIns="0" rIns="0" bIns="0" rtlCol="0" anchor="ctr"/>
+          <a:lstStyle/>
+          <a:p>
+            <a:pPr marL="0" indent="0">
+              <a:buNone/>
+            </a:pPr>
+            <a:r>
+              <a:rPr lang="en-US" sz="1100" dirty="0">
+                <a:solidFill>
+                  <a:srgbClr val="8892A4"/>
+                </a:solidFill>
+                <a:latin typeface="Calibri" pitchFamily="34" charset="0"/>
+                <a:ea typeface="Calibri" pitchFamily="34" charset="-122"/>
+                <a:cs typeface="Calibri" pitchFamily="34" charset="-120"/>
+              </a:rPr>
+              <a:t>event, prize and countdown duration</a:t>
+            </a:r>
+            <a:endParaRPr lang="en-US" sz="1100" dirty="0"/>
+          </a:p>
+        </p:txBody>
+      </p:sp>
+      <p:sp>
+        <p:nvSpPr>
+          <p:cNvPr id="8" name="Shape 6"/>
+          <p:cNvSpPr/>
+          <p:nvPr/>
+        </p:nvSpPr>
+        <p:spPr>
+          <a:xfrm>
+            <a:off x="502920" y="2185416"/>
+            <a:ext cx="274320" cy="54864"/>
+          </a:xfrm>
+          <a:prstGeom prst="rect">
+            <a:avLst/>
+          </a:prstGeom>
+          <a:solidFill>
+            <a:srgbClr val="6C5CE7"/>
+          </a:solidFill>
+          <a:ln/>
+        </p:spPr>
+      </p:sp>
+      <p:sp>
+        <p:nvSpPr>
+          <p:cNvPr id="9" name="Text 7"/>
+          <p:cNvSpPr/>
+          <p:nvPr/>
+        </p:nvSpPr>
+        <p:spPr>
+          <a:xfrm>
+            <a:off x="914400" y="2093976"/>
+            <a:ext cx="4114800" cy="274320"/>
+          </a:xfrm>
+          <a:prstGeom prst="rect">
+            <a:avLst/>
+          </a:prstGeom>
+          <a:noFill/>
+          <a:ln/>
+        </p:spPr>
+        <p:txBody>
+          <a:bodyPr wrap="square" lIns="0" tIns="0" rIns="0" bIns="0" rtlCol="0" anchor="ctr"/>
+          <a:lstStyle/>
+          <a:p>
+            <a:pPr marL="0" indent="0">
+              <a:buNone/>
+            </a:pPr>
+            <a:r>
+              <a:rPr lang="en-US" sz="1400" b="1" dirty="0">
+                <a:solidFill>
+                  <a:srgbClr val="FFFFFF"/>
+                </a:solidFill>
+                <a:latin typeface="Calibri" pitchFamily="34" charset="0"/>
+                <a:ea typeface="Calibri" pitchFamily="34" charset="-122"/>
+                <a:cs typeface="Calibri" pitchFamily="34" charset="-120"/>
+              </a:rPr>
+              <a:t>Everyone sees it live</a:t>
+            </a:r>
+            <a:endParaRPr lang="en-US" sz="1400" dirty="0"/>
+          </a:p>
+        </p:txBody>
+      </p:sp>
+      <p:sp>
+        <p:nvSpPr>
+          <p:cNvPr id="10" name="Text 8"/>
+          <p:cNvSpPr/>
+          <p:nvPr/>
+        </p:nvSpPr>
+        <p:spPr>
+          <a:xfrm>
+            <a:off x="914400" y="2368296"/>
+            <a:ext cx="4114800" cy="256032"/>
+          </a:xfrm>
+          <a:prstGeom prst="rect">
+            <a:avLst/>
+          </a:prstGeom>
+          <a:noFill/>
+          <a:ln/>
+        </p:spPr>
+        <p:txBody>
+          <a:bodyPr wrap="square" lIns="0" tIns="0" rIns="0" bIns="0" rtlCol="0" anchor="ctr"/>
+          <a:lstStyle/>
+          <a:p>
+            <a:pPr marL="0" indent="0">
+              <a:buNone/>
+            </a:pPr>
+            <a:r>
+              <a:rPr lang="en-US" sz="1100" dirty="0">
+                <a:solidFill>
+                  <a:srgbClr val="8892A4"/>
+                </a:solidFill>
+                <a:latin typeface="Calibri" pitchFamily="34" charset="0"/>
+                <a:ea typeface="Calibri" pitchFamily="34" charset="-122"/>
+                <a:cs typeface="Calibri" pitchFamily="34" charset="-120"/>
+              </a:rPr>
+              <a:t>popup broadcast to every device over WebSockets</a:t>
+            </a:r>
+            <a:endParaRPr lang="en-US" sz="1100" dirty="0"/>
+          </a:p>
+        </p:txBody>
+      </p:sp>
+      <p:sp>
+        <p:nvSpPr>
+          <p:cNvPr id="11" name="Shape 9"/>
+          <p:cNvSpPr/>
+          <p:nvPr/>
+        </p:nvSpPr>
+        <p:spPr>
+          <a:xfrm>
+            <a:off x="502920" y="2862072"/>
+            <a:ext cx="274320" cy="54864"/>
+          </a:xfrm>
+          <a:prstGeom prst="rect">
+            <a:avLst/>
+          </a:prstGeom>
+          <a:solidFill>
+            <a:srgbClr val="6C5CE7"/>
+          </a:solidFill>
+          <a:ln/>
+        </p:spPr>
+      </p:sp>
+      <p:sp>
+        <p:nvSpPr>
+          <p:cNvPr id="12" name="Text 10"/>
+          <p:cNvSpPr/>
+          <p:nvPr/>
+        </p:nvSpPr>
+        <p:spPr>
+          <a:xfrm>
+            <a:off x="914400" y="2770632"/>
+            <a:ext cx="4114800" cy="274320"/>
+          </a:xfrm>
+          <a:prstGeom prst="rect">
+            <a:avLst/>
+          </a:prstGeom>
+          <a:noFill/>
+          <a:ln/>
+        </p:spPr>
+        <p:txBody>
+          <a:bodyPr wrap="square" lIns="0" tIns="0" rIns="0" bIns="0" rtlCol="0" anchor="ctr"/>
+          <a:lstStyle/>
+          <a:p>
+            <a:pPr marL="0" indent="0">
+              <a:buNone/>
+            </a:pPr>
+            <a:r>
+              <a:rPr lang="en-US" sz="1400" b="1" dirty="0">
+                <a:solidFill>
+                  <a:srgbClr val="FFFFFF"/>
+                </a:solidFill>
+                <a:latin typeface="Calibri" pitchFamily="34" charset="0"/>
+                <a:ea typeface="Calibri" pitchFamily="34" charset="-122"/>
+                <a:cs typeface="Calibri" pitchFamily="34" charset="-120"/>
+              </a:rPr>
+              <a:t>Free opt-in</a:t>
+            </a:r>
+            <a:endParaRPr lang="en-US" sz="1400" dirty="0"/>
+          </a:p>
+        </p:txBody>
+      </p:sp>
+      <p:sp>
+        <p:nvSpPr>
+          <p:cNvPr id="13" name="Text 11"/>
+          <p:cNvSpPr/>
+          <p:nvPr/>
+        </p:nvSpPr>
+        <p:spPr>
+          <a:xfrm>
+            <a:off x="914400" y="3044952"/>
+            <a:ext cx="4114800" cy="256032"/>
+          </a:xfrm>
+          <a:prstGeom prst="rect">
+            <a:avLst/>
+          </a:prstGeom>
+          <a:noFill/>
+          <a:ln/>
+        </p:spPr>
+        <p:txBody>
+          <a:bodyPr wrap="square" lIns="0" tIns="0" rIns="0" bIns="0" rtlCol="0" anchor="ctr"/>
+          <a:lstStyle/>
+          <a:p>
+            <a:pPr marL="0" indent="0">
+              <a:buNone/>
+            </a:pPr>
+            <a:r>
+              <a:rPr lang="en-US" sz="1100" dirty="0">
+                <a:solidFill>
+                  <a:srgbClr val="8892A4"/>
+                </a:solidFill>
+                <a:latin typeface="Calibri" pitchFamily="34" charset="0"/>
+                <a:ea typeface="Calibri" pitchFamily="34" charset="-122"/>
+                <a:cs typeface="Calibri" pitchFamily="34" charset="-120"/>
+              </a:rPr>
+              <a:t>one tap to enter — one entry per user</a:t>
+            </a:r>
+            <a:endParaRPr lang="en-US" sz="1100" dirty="0"/>
+          </a:p>
+        </p:txBody>
+      </p:sp>
+      <p:sp>
+        <p:nvSpPr>
+          <p:cNvPr id="14" name="Shape 12"/>
+          <p:cNvSpPr/>
+          <p:nvPr/>
+        </p:nvSpPr>
+        <p:spPr>
+          <a:xfrm>
+            <a:off x="502920" y="3538728"/>
+            <a:ext cx="274320" cy="54864"/>
+          </a:xfrm>
+          <a:prstGeom prst="rect">
+            <a:avLst/>
+          </a:prstGeom>
+          <a:solidFill>
+            <a:srgbClr val="6C5CE7"/>
+          </a:solidFill>
+          <a:ln/>
+        </p:spPr>
+      </p:sp>
+      <p:sp>
+        <p:nvSpPr>
+          <p:cNvPr id="15" name="Text 13"/>
+          <p:cNvSpPr/>
+          <p:nvPr/>
+        </p:nvSpPr>
+        <p:spPr>
+          <a:xfrm>
+            <a:off x="914400" y="3447288"/>
+            <a:ext cx="4114800" cy="274320"/>
+          </a:xfrm>
+          <a:prstGeom prst="rect">
+            <a:avLst/>
+          </a:prstGeom>
+          <a:noFill/>
+          <a:ln/>
+        </p:spPr>
+        <p:txBody>
+          <a:bodyPr wrap="square" lIns="0" tIns="0" rIns="0" bIns="0" rtlCol="0" anchor="ctr"/>
+          <a:lstStyle/>
+          <a:p>
+            <a:pPr marL="0" indent="0">
+              <a:buNone/>
+            </a:pPr>
+            <a:r>
+              <a:rPr lang="en-US" sz="1400" b="1" dirty="0">
+                <a:solidFill>
+                  <a:srgbClr val="FFFFFF"/>
+                </a:solidFill>
+                <a:latin typeface="Calibri" pitchFamily="34" charset="0"/>
+                <a:ea typeface="Calibri" pitchFamily="34" charset="-122"/>
+                <a:cs typeface="Calibri" pitchFamily="34" charset="-120"/>
+              </a:rPr>
+              <a:t>Weighted odds</a:t>
+            </a:r>
+            <a:endParaRPr lang="en-US" sz="1400" dirty="0"/>
+          </a:p>
+        </p:txBody>
+      </p:sp>
+      <p:sp>
+        <p:nvSpPr>
+          <p:cNvPr id="16" name="Text 14"/>
+          <p:cNvSpPr/>
+          <p:nvPr/>
+        </p:nvSpPr>
+        <p:spPr>
+          <a:xfrm>
+            <a:off x="914400" y="3721608"/>
+            <a:ext cx="4114800" cy="256032"/>
+          </a:xfrm>
+          <a:prstGeom prst="rect">
+            <a:avLst/>
+          </a:prstGeom>
+          <a:noFill/>
+          <a:ln/>
+        </p:spPr>
+        <p:txBody>
+          <a:bodyPr wrap="square" lIns="0" tIns="0" rIns="0" bIns="0" rtlCol="0" anchor="ctr"/>
+          <a:lstStyle/>
+          <a:p>
+            <a:pPr marL="0" indent="0">
+              <a:buNone/>
+            </a:pPr>
+            <a:r>
+              <a:rPr lang="en-US" sz="1100" dirty="0">
+                <a:solidFill>
+                  <a:srgbClr val="8892A4"/>
+                </a:solidFill>
+                <a:latin typeface="Calibri" pitchFamily="34" charset="0"/>
+                <a:ea typeface="Calibri" pitchFamily="34" charset="-122"/>
+                <a:cs typeface="Calibri" pitchFamily="34" charset="-120"/>
+              </a:rPr>
+              <a:t>chances scale with tickets purchased</a:t>
+            </a:r>
+            <a:endParaRPr lang="en-US" sz="1100" dirty="0"/>
+          </a:p>
+        </p:txBody>
+      </p:sp>
+      <p:sp>
+        <p:nvSpPr>
+          <p:cNvPr id="17" name="Shape 15"/>
+          <p:cNvSpPr/>
+          <p:nvPr/>
+        </p:nvSpPr>
+        <p:spPr>
+          <a:xfrm>
+            <a:off x="502920" y="4215384"/>
+            <a:ext cx="274320" cy="54864"/>
+          </a:xfrm>
+          <a:prstGeom prst="rect">
+            <a:avLst/>
+          </a:prstGeom>
+          <a:solidFill>
+            <a:srgbClr val="00B894"/>
+          </a:solidFill>
+          <a:ln/>
+        </p:spPr>
+      </p:sp>
+      <p:sp>
+        <p:nvSpPr>
+          <p:cNvPr id="18" name="Text 16"/>
+          <p:cNvSpPr/>
+          <p:nvPr/>
+        </p:nvSpPr>
+        <p:spPr>
+          <a:xfrm>
+            <a:off x="914400" y="4123944"/>
+            <a:ext cx="4114800" cy="274320"/>
+          </a:xfrm>
+          <a:prstGeom prst="rect">
+            <a:avLst/>
+          </a:prstGeom>
+          <a:noFill/>
+          <a:ln/>
+        </p:spPr>
+        <p:txBody>
+          <a:bodyPr wrap="square" lIns="0" tIns="0" rIns="0" bIns="0" rtlCol="0" anchor="ctr"/>
+          <a:lstStyle/>
+          <a:p>
+            <a:pPr marL="0" indent="0">
+              <a:buNone/>
+            </a:pPr>
+            <a:r>
+              <a:rPr lang="en-US" sz="1400" b="1" dirty="0">
+                <a:solidFill>
+                  <a:srgbClr val="FFFFFF"/>
+                </a:solidFill>
+                <a:latin typeface="Calibri" pitchFamily="34" charset="0"/>
+                <a:ea typeface="Calibri" pitchFamily="34" charset="-122"/>
+                <a:cs typeface="Calibri" pitchFamily="34" charset="-120"/>
+              </a:rPr>
+              <a:t>Winner drawn automatically</a:t>
+            </a:r>
+            <a:endParaRPr lang="en-US" sz="1400" dirty="0"/>
+          </a:p>
+        </p:txBody>
+      </p:sp>
+      <p:sp>
+        <p:nvSpPr>
+          <p:cNvPr id="19" name="Text 17"/>
+          <p:cNvSpPr/>
+          <p:nvPr/>
+        </p:nvSpPr>
+        <p:spPr>
+          <a:xfrm>
+            <a:off x="914400" y="4398264"/>
+            <a:ext cx="4114800" cy="256032"/>
+          </a:xfrm>
+          <a:prstGeom prst="rect">
+            <a:avLst/>
+          </a:prstGeom>
+          <a:noFill/>
+          <a:ln/>
+        </p:spPr>
+        <p:txBody>
+          <a:bodyPr wrap="square" lIns="0" tIns="0" rIns="0" bIns="0" rtlCol="0" anchor="ctr"/>
+          <a:lstStyle/>
+          <a:p>
+            <a:pPr marL="0" indent="0">
+              <a:buNone/>
+            </a:pPr>
+            <a:r>
+              <a:rPr lang="en-US" sz="1100" dirty="0">
+                <a:solidFill>
+                  <a:srgbClr val="8892A4"/>
+                </a:solidFill>
+                <a:latin typeface="Calibri" pitchFamily="34" charset="0"/>
+                <a:ea typeface="Calibri" pitchFamily="34" charset="-122"/>
+                <a:cs typeface="Calibri" pitchFamily="34" charset="-120"/>
+              </a:rPr>
+              <a:t>free QR ticket lands straight in My Tickets</a:t>
+            </a:r>
+            <a:endParaRPr lang="en-US" sz="1100" dirty="0"/>
+          </a:p>
+        </p:txBody>
+      </p:sp>
+      <p:sp>
+        <p:nvSpPr>
+          <p:cNvPr id="20" name="Shape 18"/>
+          <p:cNvSpPr/>
+          <p:nvPr/>
+        </p:nvSpPr>
+        <p:spPr>
+          <a:xfrm>
+            <a:off x="5349240" y="1463040"/>
+            <a:ext cx="2240280" cy="2240280"/>
+          </a:xfrm>
+          <a:prstGeom prst="pie">
+            <a:avLst>
+              <a:gd name="adj1" fmla="val 0"/>
+              <a:gd name="adj2" fmla="val 3600000"/>
+            </a:avLst>
+          </a:prstGeom>
+          <a:solidFill>
+            <a:srgbClr val="6C5CE7"/>
+          </a:solidFill>
+          <a:ln w="19050">
+            <a:solidFill>
+              <a:srgbClr val="0D0B1E"/>
+            </a:solidFill>
+            <a:prstDash val="solid"/>
+          </a:ln>
+        </p:spPr>
+      </p:sp>
+      <p:sp>
+        <p:nvSpPr>
+          <p:cNvPr id="21" name="Shape 19"/>
+          <p:cNvSpPr/>
+          <p:nvPr/>
+        </p:nvSpPr>
+        <p:spPr>
+          <a:xfrm>
+            <a:off x="5349240" y="1463040"/>
+            <a:ext cx="2240280" cy="2240280"/>
+          </a:xfrm>
+          <a:prstGeom prst="pie">
+            <a:avLst>
+              <a:gd name="adj1" fmla="val 3600000"/>
+              <a:gd name="adj2" fmla="val 7200000"/>
+            </a:avLst>
+          </a:prstGeom>
+          <a:solidFill>
+            <a:srgbClr val="E84393"/>
+          </a:solidFill>
+          <a:ln w="19050">
+            <a:solidFill>
+              <a:srgbClr val="0D0B1E"/>
+            </a:solidFill>
+            <a:prstDash val="solid"/>
+          </a:ln>
+        </p:spPr>
+      </p:sp>
+      <p:sp>
+        <p:nvSpPr>
+          <p:cNvPr id="22" name="Shape 20"/>
+          <p:cNvSpPr/>
+          <p:nvPr/>
+        </p:nvSpPr>
+        <p:spPr>
+          <a:xfrm>
+            <a:off x="5349240" y="1463040"/>
+            <a:ext cx="2240280" cy="2240280"/>
+          </a:xfrm>
+          <a:prstGeom prst="pie">
+            <a:avLst>
+              <a:gd name="adj1" fmla="val 7200000"/>
+              <a:gd name="adj2" fmla="val 10800000"/>
+            </a:avLst>
+          </a:prstGeom>
+          <a:solidFill>
+            <a:srgbClr val="00B894"/>
+          </a:solidFill>
+          <a:ln w="19050">
+            <a:solidFill>
+              <a:srgbClr val="0D0B1E"/>
+            </a:solidFill>
+            <a:prstDash val="solid"/>
+          </a:ln>
+        </p:spPr>
+      </p:sp>
+      <p:sp>
+        <p:nvSpPr>
+          <p:cNvPr id="23" name="Shape 21"/>
+          <p:cNvSpPr/>
+          <p:nvPr/>
+        </p:nvSpPr>
+        <p:spPr>
+          <a:xfrm>
+            <a:off x="5349240" y="1463040"/>
+            <a:ext cx="2240280" cy="2240280"/>
+          </a:xfrm>
+          <a:prstGeom prst="pie">
+            <a:avLst>
+              <a:gd name="adj1" fmla="val 10800000"/>
+              <a:gd name="adj2" fmla="val 14400000"/>
+            </a:avLst>
+          </a:prstGeom>
+          <a:solidFill>
+            <a:srgbClr val="A29BFE"/>
+          </a:solidFill>
+          <a:ln w="19050">
+            <a:solidFill>
+              <a:srgbClr val="0D0B1E"/>
+            </a:solidFill>
+            <a:prstDash val="solid"/>
+          </a:ln>
+        </p:spPr>
+      </p:sp>
+      <p:sp>
+        <p:nvSpPr>
+          <p:cNvPr id="24" name="Shape 22"/>
+          <p:cNvSpPr/>
+          <p:nvPr/>
+        </p:nvSpPr>
+        <p:spPr>
+          <a:xfrm>
+            <a:off x="5349240" y="1463040"/>
+            <a:ext cx="2240280" cy="2240280"/>
+          </a:xfrm>
+          <a:prstGeom prst="pie">
+            <a:avLst>
+              <a:gd name="adj1" fmla="val 14400000"/>
+              <a:gd name="adj2" fmla="val 18000000"/>
+            </a:avLst>
+          </a:prstGeom>
+          <a:solidFill>
+            <a:srgbClr val="0984E3"/>
+          </a:solidFill>
+          <a:ln w="19050">
+            <a:solidFill>
+              <a:srgbClr val="0D0B1E"/>
+            </a:solidFill>
+            <a:prstDash val="solid"/>
+          </a:ln>
+        </p:spPr>
+      </p:sp>
+      <p:sp>
+        <p:nvSpPr>
+          <p:cNvPr id="25" name="Shape 23"/>
+          <p:cNvSpPr/>
+          <p:nvPr/>
+        </p:nvSpPr>
+        <p:spPr>
+          <a:xfrm>
+            <a:off x="5349240" y="1463040"/>
+            <a:ext cx="2240280" cy="2240280"/>
+          </a:xfrm>
+          <a:prstGeom prst="pie">
+            <a:avLst>
+              <a:gd name="adj1" fmla="val 18000000"/>
+              <a:gd name="adj2" fmla="val 21600000"/>
+            </a:avLst>
+          </a:prstGeom>
+          <a:solidFill>
+            <a:srgbClr val="E17055"/>
+          </a:solidFill>
+          <a:ln w="19050">
+            <a:solidFill>
+              <a:srgbClr val="0D0B1E"/>
+            </a:solidFill>
+            <a:prstDash val="solid"/>
+          </a:ln>
+        </p:spPr>
+      </p:sp>
+      <p:sp>
+        <p:nvSpPr>
+          <p:cNvPr id="26" name="Shape 24"/>
+          <p:cNvSpPr/>
+          <p:nvPr/>
+        </p:nvSpPr>
+        <p:spPr>
+          <a:xfrm>
+            <a:off x="6313932" y="2427732"/>
+            <a:ext cx="310896" cy="310896"/>
+          </a:xfrm>
+          <a:prstGeom prst="ellipse">
+            <a:avLst/>
+          </a:prstGeom>
+          <a:solidFill>
+            <a:srgbClr val="0D0B1E"/>
+          </a:solidFill>
+          <a:ln w="25400">
+            <a:solidFill>
+              <a:srgbClr val="6C5CE7"/>
+            </a:solidFill>
+            <a:prstDash val="solid"/>
+          </a:ln>
+        </p:spPr>
+      </p:sp>
+      <p:sp>
+        <p:nvSpPr>
+          <p:cNvPr id="27" name="Shape 25"/>
+          <p:cNvSpPr/>
+          <p:nvPr/>
+        </p:nvSpPr>
+        <p:spPr>
+          <a:xfrm rot="10800000">
+            <a:off x="6350508" y="1371600"/>
+            <a:ext cx="237744" cy="237744"/>
+          </a:xfrm>
+          <a:prstGeom prst="triangle">
+            <a:avLst/>
+          </a:prstGeom>
+          <a:solidFill>
+            <a:srgbClr val="E84393"/>
+          </a:solidFill>
+          <a:ln w="12700">
+            <a:solidFill>
+              <a:srgbClr val="0D0B1E"/>
+            </a:solidFill>
+            <a:prstDash val="solid"/>
+          </a:ln>
+        </p:spPr>
+      </p:sp>
+      <p:sp>
+        <p:nvSpPr>
+          <p:cNvPr id="28" name="Text 26"/>
+          <p:cNvSpPr/>
+          <p:nvPr/>
+        </p:nvSpPr>
+        <p:spPr>
+          <a:xfrm>
+            <a:off x="5074920" y="3822192"/>
+            <a:ext cx="2788920" cy="256032"/>
+          </a:xfrm>
+          <a:prstGeom prst="rect">
+            <a:avLst/>
+          </a:prstGeom>
+          <a:noFill/>
+          <a:ln/>
+        </p:spPr>
+        <p:txBody>
+          <a:bodyPr wrap="square" lIns="0" tIns="0" rIns="0" bIns="0" rtlCol="0" anchor="ctr"/>
+          <a:lstStyle/>
+          <a:p>
+            <a:pPr marL="0" indent="0" algn="ctr">
+              <a:buNone/>
+            </a:pPr>
+            <a:r>
+              <a:rPr lang="en-US" sz="1050" i="1" dirty="0">
+                <a:solidFill>
+                  <a:srgbClr val="8892A4"/>
+                </a:solidFill>
+                <a:latin typeface="Calibri" pitchFamily="34" charset="0"/>
+                <a:ea typeface="Calibri" pitchFamily="34" charset="-122"/>
+                <a:cs typeface="Calibri" pitchFamily="34" charset="-120"/>
+              </a:rPr>
+              <a:t>Result wheel spins live on every screen</a:t>
+            </a:r>
+            <a:endParaRPr lang="en-US" sz="1050" dirty="0"/>
+          </a:p>
+        </p:txBody>
+      </p:sp>
+      <p:sp>
+        <p:nvSpPr>
+          <p:cNvPr id="29" name="Shape 27"/>
+          <p:cNvSpPr/>
+          <p:nvPr/>
+        </p:nvSpPr>
+        <p:spPr>
+          <a:xfrm>
+            <a:off x="5166360" y="4160520"/>
+            <a:ext cx="2606040" cy="420624"/>
+          </a:xfrm>
+          <a:prstGeom prst="roundRect">
+            <a:avLst>
+              <a:gd name="adj" fmla="val 15217"/>
+            </a:avLst>
+          </a:prstGeom>
+          <a:solidFill>
+            <a:srgbClr val="1A1535"/>
+          </a:solidFill>
+          <a:ln w="12700">
+            <a:solidFill>
+              <a:srgbClr val="2A2050"/>
+            </a:solidFill>
+            <a:prstDash val="solid"/>
+          </a:ln>
+        </p:spPr>
+      </p:sp>
+      <p:sp>
+        <p:nvSpPr>
+          <p:cNvPr id="30" name="Shape 28"/>
+          <p:cNvSpPr/>
+          <p:nvPr/>
+        </p:nvSpPr>
+        <p:spPr>
+          <a:xfrm>
+            <a:off x="5166360" y="4160520"/>
+            <a:ext cx="2606040" cy="54864"/>
+          </a:xfrm>
+          <a:prstGeom prst="rect">
+            <a:avLst/>
+          </a:prstGeom>
+          <a:solidFill>
+            <a:srgbClr val="00B894"/>
+          </a:solidFill>
+          <a:ln/>
+        </p:spPr>
+      </p:sp>
+      <p:sp>
+        <p:nvSpPr>
+          <p:cNvPr id="31" name="Text 29"/>
+          <p:cNvSpPr/>
+          <p:nvPr/>
+        </p:nvSpPr>
+        <p:spPr>
+          <a:xfrm>
+            <a:off x="5303520" y="4251960"/>
+            <a:ext cx="2377440" cy="256032"/>
+          </a:xfrm>
+          <a:prstGeom prst="rect">
+            <a:avLst/>
+          </a:prstGeom>
+          <a:noFill/>
+          <a:ln/>
+        </p:spPr>
+        <p:txBody>
+          <a:bodyPr wrap="square" lIns="0" tIns="0" rIns="0" bIns="0" rtlCol="0" anchor="ctr"/>
+          <a:lstStyle/>
+          <a:p>
+            <a:pPr marL="0" indent="0">
+              <a:buNone/>
+            </a:pPr>
+            <a:r>
+              <a:rPr lang="en-US" sz="1000" b="1" dirty="0">
+                <a:solidFill>
+                  <a:srgbClr val="00B894"/>
+                </a:solidFill>
+                <a:latin typeface="Calibri" pitchFamily="34" charset="0"/>
+                <a:ea typeface="Calibri" pitchFamily="34" charset="-122"/>
+                <a:cs typeface="Calibri" pitchFamily="34" charset="-120"/>
+              </a:rPr>
+              <a:t>Winner — free ticket issued automatically</a:t>
+            </a:r>
+            <a:endParaRPr lang="en-US" sz="1000" dirty="0"/>
+          </a:p>
+        </p:txBody>
+      </p:sp>
+      <p:sp>
+        <p:nvSpPr>
+          <p:cNvPr id="32" name="Text 30"/>
+          <p:cNvSpPr/>
+          <p:nvPr/>
+        </p:nvSpPr>
+        <p:spPr>
+          <a:xfrm>
+            <a:off x="502920" y="4773168"/>
+            <a:ext cx="8138160" cy="256032"/>
+          </a:xfrm>
+          <a:prstGeom prst="rect">
+            <a:avLst/>
+          </a:prstGeom>
+          <a:noFill/>
+          <a:ln/>
+        </p:spPr>
+        <p:txBody>
+          <a:bodyPr wrap="square" lIns="0" tIns="0" rIns="0" bIns="0" rtlCol="0" anchor="ctr"/>
+          <a:lstStyle/>
+          <a:p>
+            <a:pPr marL="0" indent="0">
+              <a:buNone/>
+            </a:pPr>
+            <a:endParaRPr lang="en-US" sz="1050" dirty="0"/>
+          </a:p>
+        </p:txBody>
+      </p:sp>
+    </p:spTree>
+  </p:cSld>
+  <p:clrMapOvr>
+    <a:masterClrMapping/>
+  </p:clrMapOvr>
+</p:sld>
+</file>
+
+<file path=ppt/slides/slide8.xml><?xml version="1.0" encoding="utf-8"?>
+<p:sld xmlns:a="http://schemas.openxmlformats.org/drawingml/2006/main" xmlns:r="http://schemas.openxmlformats.org/officeDocument/2006/relationships" xmlns:p="http://schemas.openxmlformats.org/presentationml/2006/main">
   <p:cSld name="Slide 7">
     <p:bg>
       <p:bgPr>
@@ -9661,17 +11850,6 @@
             <a:pPr marL="0" indent="0" algn="ctr">
               <a:buNone/>
             </a:pPr>
-            <a:r>
-              <a:rPr lang="en-US" sz="1100" i="1" dirty="0">
-                <a:solidFill>
-                  <a:srgbClr val="8892A4"/>
-                </a:solidFill>
-                <a:latin typeface="Calibri" pitchFamily="34" charset="0"/>
-                <a:ea typeface="Calibri" pitchFamily="34" charset="-122"/>
-                <a:cs typeface="Calibri" pitchFamily="34" charset="-120"/>
-              </a:rPr>
-              <a:t>Powered by Hugging Face zero-shot inference — graceful fallback when unavailable.</a:t>
-            </a:r>
             <a:endParaRPr lang="en-US" sz="1100" dirty="0"/>
           </a:p>
         </p:txBody>
@@ -9684,7 +11862,7 @@
 </p:sld>
 </file>
 
-<file path=ppt/slides/slide8.xml><?xml version="1.0" encoding="utf-8"?>
+<file path=ppt/slides/slide9.xml><?xml version="1.0" encoding="utf-8"?>
 <p:sld xmlns:a="http://schemas.openxmlformats.org/drawingml/2006/main" xmlns:r="http://schemas.openxmlformats.org/officeDocument/2006/relationships" xmlns:p="http://schemas.openxmlformats.org/presentationml/2006/main">
   <p:cSld name="Slide 8">
     <p:bg>
@@ -10482,887 +12660,6 @@
               <a:t>no connection required</a:t>
             </a:r>
             <a:endParaRPr lang="en-US" sz="950" dirty="0"/>
-          </a:p>
-        </p:txBody>
-      </p:sp>
-    </p:spTree>
-  </p:cSld>
-  <p:clrMapOvr>
-    <a:masterClrMapping/>
-  </p:clrMapOvr>
-</p:sld>
-</file>
-
-<file path=ppt/slides/slide9.xml><?xml version="1.0" encoding="utf-8"?>
-<p:sld xmlns:a="http://schemas.openxmlformats.org/drawingml/2006/main" xmlns:r="http://schemas.openxmlformats.org/officeDocument/2006/relationships" xmlns:p="http://schemas.openxmlformats.org/presentationml/2006/main">
-  <p:cSld name="Slide 9">
-    <p:bg>
-      <p:bgPr>
-        <a:solidFill>
-          <a:srgbClr val="0D0B1E"/>
-        </a:solidFill>
-        <a:effectLst/>
-      </p:bgPr>
-    </p:bg>
-    <p:spTree>
-      <p:nvGrpSpPr>
-        <p:cNvPr id="1" name=""/>
-        <p:cNvGrpSpPr/>
-        <p:nvPr/>
-      </p:nvGrpSpPr>
-      <p:grpSpPr>
-        <a:xfrm>
-          <a:off x="0" y="0"/>
-          <a:ext cx="0" cy="0"/>
-          <a:chOff x="0" y="0"/>
-          <a:chExt cx="0" cy="0"/>
-        </a:xfrm>
-      </p:grpSpPr>
-      <p:sp>
-        <p:nvSpPr>
-          <p:cNvPr id="2" name="Text 0"/>
-          <p:cNvSpPr/>
-          <p:nvPr/>
-        </p:nvSpPr>
-        <p:spPr>
-          <a:xfrm>
-            <a:off x="502920" y="274320"/>
-            <a:ext cx="8138160" cy="237744"/>
-          </a:xfrm>
-          <a:prstGeom prst="rect">
-            <a:avLst/>
-          </a:prstGeom>
-          <a:noFill/>
-          <a:ln/>
-        </p:spPr>
-        <p:txBody>
-          <a:bodyPr wrap="square" lIns="0" tIns="0" rIns="0" bIns="0" rtlCol="0" anchor="ctr"/>
-          <a:lstStyle/>
-          <a:p>
-            <a:pPr marL="0" indent="0">
-              <a:buNone/>
-            </a:pPr>
-            <a:r>
-              <a:rPr lang="en-US" sz="1300" b="1" kern="0" spc="400" dirty="0">
-                <a:solidFill>
-                  <a:srgbClr val="A29BFE"/>
-                </a:solidFill>
-                <a:latin typeface="Calibri" pitchFamily="34" charset="0"/>
-                <a:ea typeface="Calibri" pitchFamily="34" charset="-122"/>
-                <a:cs typeface="Calibri" pitchFamily="34" charset="-120"/>
-              </a:rPr>
-              <a:t>FEATURE</a:t>
-            </a:r>
-            <a:endParaRPr lang="en-US" sz="1300" dirty="0"/>
-          </a:p>
-        </p:txBody>
-      </p:sp>
-      <p:sp>
-        <p:nvSpPr>
-          <p:cNvPr id="3" name="Text 1"/>
-          <p:cNvSpPr/>
-          <p:nvPr/>
-        </p:nvSpPr>
-        <p:spPr>
-          <a:xfrm>
-            <a:off x="502920" y="512064"/>
-            <a:ext cx="8138160" cy="530352"/>
-          </a:xfrm>
-          <a:prstGeom prst="rect">
-            <a:avLst/>
-          </a:prstGeom>
-          <a:noFill/>
-          <a:ln/>
-        </p:spPr>
-        <p:txBody>
-          <a:bodyPr wrap="square" lIns="0" tIns="0" rIns="0" bIns="0" rtlCol="0" anchor="ctr"/>
-          <a:lstStyle/>
-          <a:p>
-            <a:pPr marL="0" indent="0">
-              <a:buNone/>
-            </a:pPr>
-            <a:r>
-              <a:rPr lang="en-US" sz="3100" b="1" dirty="0">
-                <a:solidFill>
-                  <a:srgbClr val="FFFFFF"/>
-                </a:solidFill>
-                <a:latin typeface="Calibri" pitchFamily="34" charset="0"/>
-                <a:ea typeface="Calibri" pitchFamily="34" charset="-122"/>
-                <a:cs typeface="Calibri" pitchFamily="34" charset="-120"/>
-              </a:rPr>
-              <a:t>Security &amp; Trust</a:t>
-            </a:r>
-            <a:endParaRPr lang="en-US" sz="3100" dirty="0"/>
-          </a:p>
-        </p:txBody>
-      </p:sp>
-      <p:sp>
-        <p:nvSpPr>
-          <p:cNvPr id="4" name="Shape 2"/>
-          <p:cNvSpPr/>
-          <p:nvPr/>
-        </p:nvSpPr>
-        <p:spPr>
-          <a:xfrm>
-            <a:off x="502920" y="1097280"/>
-            <a:ext cx="1051560" cy="73152"/>
-          </a:xfrm>
-          <a:prstGeom prst="rect">
-            <a:avLst/>
-          </a:prstGeom>
-          <a:solidFill>
-            <a:srgbClr val="6C5CE7"/>
-          </a:solidFill>
-          <a:ln/>
-        </p:spPr>
-      </p:sp>
-      <p:sp>
-        <p:nvSpPr>
-          <p:cNvPr id="5" name="Shape 3"/>
-          <p:cNvSpPr/>
-          <p:nvPr/>
-        </p:nvSpPr>
-        <p:spPr>
-          <a:xfrm>
-            <a:off x="502920" y="1371600"/>
-            <a:ext cx="2587752" cy="1645920"/>
-          </a:xfrm>
-          <a:prstGeom prst="roundRect">
-            <a:avLst>
-              <a:gd name="adj" fmla="val 3889"/>
-            </a:avLst>
-          </a:prstGeom>
-          <a:solidFill>
-            <a:srgbClr val="1A1535"/>
-          </a:solidFill>
-          <a:ln w="12700">
-            <a:solidFill>
-              <a:srgbClr val="2A2050"/>
-            </a:solidFill>
-            <a:prstDash val="solid"/>
-          </a:ln>
-        </p:spPr>
-      </p:sp>
-      <p:sp>
-        <p:nvSpPr>
-          <p:cNvPr id="6" name="Shape 4"/>
-          <p:cNvSpPr/>
-          <p:nvPr/>
-        </p:nvSpPr>
-        <p:spPr>
-          <a:xfrm>
-            <a:off x="685800" y="1609344"/>
-            <a:ext cx="320040" cy="54864"/>
-          </a:xfrm>
-          <a:prstGeom prst="rect">
-            <a:avLst/>
-          </a:prstGeom>
-          <a:solidFill>
-            <a:srgbClr val="6C5CE7"/>
-          </a:solidFill>
-          <a:ln/>
-        </p:spPr>
-      </p:sp>
-      <p:sp>
-        <p:nvSpPr>
-          <p:cNvPr id="7" name="Text 5"/>
-          <p:cNvSpPr/>
-          <p:nvPr/>
-        </p:nvSpPr>
-        <p:spPr>
-          <a:xfrm>
-            <a:off x="685800" y="1755648"/>
-            <a:ext cx="2221992" cy="292608"/>
-          </a:xfrm>
-          <a:prstGeom prst="rect">
-            <a:avLst/>
-          </a:prstGeom>
-          <a:noFill/>
-          <a:ln/>
-        </p:spPr>
-        <p:txBody>
-          <a:bodyPr wrap="square" lIns="0" tIns="0" rIns="0" bIns="0" rtlCol="0" anchor="ctr"/>
-          <a:lstStyle/>
-          <a:p>
-            <a:pPr marL="0" indent="0">
-              <a:buNone/>
-            </a:pPr>
-            <a:r>
-              <a:rPr lang="en-US" sz="1400" b="1" dirty="0">
-                <a:solidFill>
-                  <a:srgbClr val="FFFFFF"/>
-                </a:solidFill>
-                <a:latin typeface="Calibri" pitchFamily="34" charset="0"/>
-                <a:ea typeface="Calibri" pitchFamily="34" charset="-122"/>
-                <a:cs typeface="Calibri" pitchFamily="34" charset="-120"/>
-              </a:rPr>
-              <a:t>JWT sessions</a:t>
-            </a:r>
-            <a:endParaRPr lang="en-US" sz="1400" dirty="0"/>
-          </a:p>
-        </p:txBody>
-      </p:sp>
-      <p:sp>
-        <p:nvSpPr>
-          <p:cNvPr id="8" name="Text 6"/>
-          <p:cNvSpPr/>
-          <p:nvPr/>
-        </p:nvSpPr>
-        <p:spPr>
-          <a:xfrm>
-            <a:off x="685800" y="2103120"/>
-            <a:ext cx="2221992" cy="731520"/>
-          </a:xfrm>
-          <a:prstGeom prst="rect">
-            <a:avLst/>
-          </a:prstGeom>
-          <a:noFill/>
-          <a:ln/>
-        </p:spPr>
-        <p:txBody>
-          <a:bodyPr wrap="square" lIns="0" tIns="0" rIns="0" bIns="0" rtlCol="0" anchor="ctr"/>
-          <a:lstStyle/>
-          <a:p>
-            <a:pPr marL="0" indent="0">
-              <a:buNone/>
-            </a:pPr>
-            <a:r>
-              <a:rPr lang="en-US" sz="1100" dirty="0">
-                <a:solidFill>
-                  <a:srgbClr val="8892A4"/>
-                </a:solidFill>
-                <a:latin typeface="Calibri" pitchFamily="34" charset="0"/>
-                <a:ea typeface="Calibri" pitchFamily="34" charset="-122"/>
-                <a:cs typeface="Calibri" pitchFamily="34" charset="-120"/>
-              </a:rPr>
-              <a:t>sliding window + rotating refresh tokens</a:t>
-            </a:r>
-            <a:endParaRPr lang="en-US" sz="1100" dirty="0"/>
-          </a:p>
-        </p:txBody>
-      </p:sp>
-      <p:sp>
-        <p:nvSpPr>
-          <p:cNvPr id="9" name="Shape 7"/>
-          <p:cNvSpPr/>
-          <p:nvPr/>
-        </p:nvSpPr>
-        <p:spPr>
-          <a:xfrm>
-            <a:off x="3278124" y="1371600"/>
-            <a:ext cx="2587752" cy="1645920"/>
-          </a:xfrm>
-          <a:prstGeom prst="roundRect">
-            <a:avLst>
-              <a:gd name="adj" fmla="val 3889"/>
-            </a:avLst>
-          </a:prstGeom>
-          <a:solidFill>
-            <a:srgbClr val="1A1535"/>
-          </a:solidFill>
-          <a:ln w="12700">
-            <a:solidFill>
-              <a:srgbClr val="2A2050"/>
-            </a:solidFill>
-            <a:prstDash val="solid"/>
-          </a:ln>
-        </p:spPr>
-      </p:sp>
-      <p:sp>
-        <p:nvSpPr>
-          <p:cNvPr id="10" name="Shape 8"/>
-          <p:cNvSpPr/>
-          <p:nvPr/>
-        </p:nvSpPr>
-        <p:spPr>
-          <a:xfrm>
-            <a:off x="3461004" y="1609344"/>
-            <a:ext cx="320040" cy="54864"/>
-          </a:xfrm>
-          <a:prstGeom prst="rect">
-            <a:avLst/>
-          </a:prstGeom>
-          <a:solidFill>
-            <a:srgbClr val="6C5CE7"/>
-          </a:solidFill>
-          <a:ln/>
-        </p:spPr>
-      </p:sp>
-      <p:sp>
-        <p:nvSpPr>
-          <p:cNvPr id="11" name="Text 9"/>
-          <p:cNvSpPr/>
-          <p:nvPr/>
-        </p:nvSpPr>
-        <p:spPr>
-          <a:xfrm>
-            <a:off x="3461004" y="1755648"/>
-            <a:ext cx="2221992" cy="292608"/>
-          </a:xfrm>
-          <a:prstGeom prst="rect">
-            <a:avLst/>
-          </a:prstGeom>
-          <a:noFill/>
-          <a:ln/>
-        </p:spPr>
-        <p:txBody>
-          <a:bodyPr wrap="square" lIns="0" tIns="0" rIns="0" bIns="0" rtlCol="0" anchor="ctr"/>
-          <a:lstStyle/>
-          <a:p>
-            <a:pPr marL="0" indent="0">
-              <a:buNone/>
-            </a:pPr>
-            <a:r>
-              <a:rPr lang="en-US" sz="1400" b="1" dirty="0">
-                <a:solidFill>
-                  <a:srgbClr val="FFFFFF"/>
-                </a:solidFill>
-                <a:latin typeface="Calibri" pitchFamily="34" charset="0"/>
-                <a:ea typeface="Calibri" pitchFamily="34" charset="-122"/>
-                <a:cs typeface="Calibri" pitchFamily="34" charset="-120"/>
-              </a:rPr>
-              <a:t>Email 2FA</a:t>
-            </a:r>
-            <a:endParaRPr lang="en-US" sz="1400" dirty="0"/>
-          </a:p>
-        </p:txBody>
-      </p:sp>
-      <p:sp>
-        <p:nvSpPr>
-          <p:cNvPr id="12" name="Text 10"/>
-          <p:cNvSpPr/>
-          <p:nvPr/>
-        </p:nvSpPr>
-        <p:spPr>
-          <a:xfrm>
-            <a:off x="3461004" y="2103120"/>
-            <a:ext cx="2221992" cy="731520"/>
-          </a:xfrm>
-          <a:prstGeom prst="rect">
-            <a:avLst/>
-          </a:prstGeom>
-          <a:noFill/>
-          <a:ln/>
-        </p:spPr>
-        <p:txBody>
-          <a:bodyPr wrap="square" lIns="0" tIns="0" rIns="0" bIns="0" rtlCol="0" anchor="ctr"/>
-          <a:lstStyle/>
-          <a:p>
-            <a:pPr marL="0" indent="0">
-              <a:buNone/>
-            </a:pPr>
-            <a:r>
-              <a:rPr lang="en-US" sz="1100" dirty="0">
-                <a:solidFill>
-                  <a:srgbClr val="8892A4"/>
-                </a:solidFill>
-                <a:latin typeface="Calibri" pitchFamily="34" charset="0"/>
-                <a:ea typeface="Calibri" pitchFamily="34" charset="-122"/>
-                <a:cs typeface="Calibri" pitchFamily="34" charset="-120"/>
-              </a:rPr>
-              <a:t>verification code required on registration</a:t>
-            </a:r>
-            <a:endParaRPr lang="en-US" sz="1100" dirty="0"/>
-          </a:p>
-        </p:txBody>
-      </p:sp>
-      <p:sp>
-        <p:nvSpPr>
-          <p:cNvPr id="13" name="Shape 11"/>
-          <p:cNvSpPr/>
-          <p:nvPr/>
-        </p:nvSpPr>
-        <p:spPr>
-          <a:xfrm>
-            <a:off x="6053328" y="1371600"/>
-            <a:ext cx="2587752" cy="1645920"/>
-          </a:xfrm>
-          <a:prstGeom prst="roundRect">
-            <a:avLst>
-              <a:gd name="adj" fmla="val 3889"/>
-            </a:avLst>
-          </a:prstGeom>
-          <a:solidFill>
-            <a:srgbClr val="1A1535"/>
-          </a:solidFill>
-          <a:ln w="12700">
-            <a:solidFill>
-              <a:srgbClr val="2A2050"/>
-            </a:solidFill>
-            <a:prstDash val="solid"/>
-          </a:ln>
-        </p:spPr>
-      </p:sp>
-      <p:sp>
-        <p:nvSpPr>
-          <p:cNvPr id="14" name="Shape 12"/>
-          <p:cNvSpPr/>
-          <p:nvPr/>
-        </p:nvSpPr>
-        <p:spPr>
-          <a:xfrm>
-            <a:off x="6236208" y="1609344"/>
-            <a:ext cx="320040" cy="54864"/>
-          </a:xfrm>
-          <a:prstGeom prst="rect">
-            <a:avLst/>
-          </a:prstGeom>
-          <a:solidFill>
-            <a:srgbClr val="6C5CE7"/>
-          </a:solidFill>
-          <a:ln/>
-        </p:spPr>
-      </p:sp>
-      <p:sp>
-        <p:nvSpPr>
-          <p:cNvPr id="15" name="Text 13"/>
-          <p:cNvSpPr/>
-          <p:nvPr/>
-        </p:nvSpPr>
-        <p:spPr>
-          <a:xfrm>
-            <a:off x="6236208" y="1755648"/>
-            <a:ext cx="2221992" cy="292608"/>
-          </a:xfrm>
-          <a:prstGeom prst="rect">
-            <a:avLst/>
-          </a:prstGeom>
-          <a:noFill/>
-          <a:ln/>
-        </p:spPr>
-        <p:txBody>
-          <a:bodyPr wrap="square" lIns="0" tIns="0" rIns="0" bIns="0" rtlCol="0" anchor="ctr"/>
-          <a:lstStyle/>
-          <a:p>
-            <a:pPr marL="0" indent="0">
-              <a:buNone/>
-            </a:pPr>
-            <a:r>
-              <a:rPr lang="en-US" sz="1400" b="1" dirty="0">
-                <a:solidFill>
-                  <a:srgbClr val="FFFFFF"/>
-                </a:solidFill>
-                <a:latin typeface="Calibri" pitchFamily="34" charset="0"/>
-                <a:ea typeface="Calibri" pitchFamily="34" charset="-122"/>
-                <a:cs typeface="Calibri" pitchFamily="34" charset="-120"/>
-              </a:rPr>
-              <a:t>OAuth sign-in</a:t>
-            </a:r>
-            <a:endParaRPr lang="en-US" sz="1400" dirty="0"/>
-          </a:p>
-        </p:txBody>
-      </p:sp>
-      <p:sp>
-        <p:nvSpPr>
-          <p:cNvPr id="16" name="Text 14"/>
-          <p:cNvSpPr/>
-          <p:nvPr/>
-        </p:nvSpPr>
-        <p:spPr>
-          <a:xfrm>
-            <a:off x="6236208" y="2103120"/>
-            <a:ext cx="2221992" cy="731520"/>
-          </a:xfrm>
-          <a:prstGeom prst="rect">
-            <a:avLst/>
-          </a:prstGeom>
-          <a:noFill/>
-          <a:ln/>
-        </p:spPr>
-        <p:txBody>
-          <a:bodyPr wrap="square" lIns="0" tIns="0" rIns="0" bIns="0" rtlCol="0" anchor="ctr"/>
-          <a:lstStyle/>
-          <a:p>
-            <a:pPr marL="0" indent="0">
-              <a:buNone/>
-            </a:pPr>
-            <a:r>
-              <a:rPr lang="en-US" sz="1100" dirty="0">
-                <a:solidFill>
-                  <a:srgbClr val="8892A4"/>
-                </a:solidFill>
-                <a:latin typeface="Calibri" pitchFamily="34" charset="0"/>
-                <a:ea typeface="Calibri" pitchFamily="34" charset="-122"/>
-                <a:cs typeface="Calibri" pitchFamily="34" charset="-120"/>
-              </a:rPr>
-              <a:t>Google and GitHub via Passport</a:t>
-            </a:r>
-            <a:endParaRPr lang="en-US" sz="1100" dirty="0"/>
-          </a:p>
-        </p:txBody>
-      </p:sp>
-      <p:sp>
-        <p:nvSpPr>
-          <p:cNvPr id="17" name="Shape 15"/>
-          <p:cNvSpPr/>
-          <p:nvPr/>
-        </p:nvSpPr>
-        <p:spPr>
-          <a:xfrm>
-            <a:off x="502920" y="3200400"/>
-            <a:ext cx="2587752" cy="1645920"/>
-          </a:xfrm>
-          <a:prstGeom prst="roundRect">
-            <a:avLst>
-              <a:gd name="adj" fmla="val 3889"/>
-            </a:avLst>
-          </a:prstGeom>
-          <a:solidFill>
-            <a:srgbClr val="1A1535"/>
-          </a:solidFill>
-          <a:ln w="12700">
-            <a:solidFill>
-              <a:srgbClr val="2A2050"/>
-            </a:solidFill>
-            <a:prstDash val="solid"/>
-          </a:ln>
-        </p:spPr>
-      </p:sp>
-      <p:sp>
-        <p:nvSpPr>
-          <p:cNvPr id="18" name="Shape 16"/>
-          <p:cNvSpPr/>
-          <p:nvPr/>
-        </p:nvSpPr>
-        <p:spPr>
-          <a:xfrm>
-            <a:off x="685800" y="3438144"/>
-            <a:ext cx="320040" cy="54864"/>
-          </a:xfrm>
-          <a:prstGeom prst="rect">
-            <a:avLst/>
-          </a:prstGeom>
-          <a:solidFill>
-            <a:srgbClr val="6C5CE7"/>
-          </a:solidFill>
-          <a:ln/>
-        </p:spPr>
-      </p:sp>
-      <p:sp>
-        <p:nvSpPr>
-          <p:cNvPr id="19" name="Text 17"/>
-          <p:cNvSpPr/>
-          <p:nvPr/>
-        </p:nvSpPr>
-        <p:spPr>
-          <a:xfrm>
-            <a:off x="685800" y="3584448"/>
-            <a:ext cx="2221992" cy="292608"/>
-          </a:xfrm>
-          <a:prstGeom prst="rect">
-            <a:avLst/>
-          </a:prstGeom>
-          <a:noFill/>
-          <a:ln/>
-        </p:spPr>
-        <p:txBody>
-          <a:bodyPr wrap="square" lIns="0" tIns="0" rIns="0" bIns="0" rtlCol="0" anchor="ctr"/>
-          <a:lstStyle/>
-          <a:p>
-            <a:pPr marL="0" indent="0">
-              <a:buNone/>
-            </a:pPr>
-            <a:r>
-              <a:rPr lang="en-US" sz="1400" b="1" dirty="0">
-                <a:solidFill>
-                  <a:srgbClr val="FFFFFF"/>
-                </a:solidFill>
-                <a:latin typeface="Calibri" pitchFamily="34" charset="0"/>
-                <a:ea typeface="Calibri" pitchFamily="34" charset="-122"/>
-                <a:cs typeface="Calibri" pitchFamily="34" charset="-120"/>
-              </a:rPr>
-              <a:t>Roles &amp; permissions</a:t>
-            </a:r>
-            <a:endParaRPr lang="en-US" sz="1400" dirty="0"/>
-          </a:p>
-        </p:txBody>
-      </p:sp>
-      <p:sp>
-        <p:nvSpPr>
-          <p:cNvPr id="20" name="Text 18"/>
-          <p:cNvSpPr/>
-          <p:nvPr/>
-        </p:nvSpPr>
-        <p:spPr>
-          <a:xfrm>
-            <a:off x="685800" y="3931920"/>
-            <a:ext cx="2221992" cy="731520"/>
-          </a:xfrm>
-          <a:prstGeom prst="rect">
-            <a:avLst/>
-          </a:prstGeom>
-          <a:noFill/>
-          <a:ln/>
-        </p:spPr>
-        <p:txBody>
-          <a:bodyPr wrap="square" lIns="0" tIns="0" rIns="0" bIns="0" rtlCol="0" anchor="ctr"/>
-          <a:lstStyle/>
-          <a:p>
-            <a:pPr marL="0" indent="0">
-              <a:buNone/>
-            </a:pPr>
-            <a:r>
-              <a:rPr lang="en-US" sz="1100" dirty="0">
-                <a:solidFill>
-                  <a:srgbClr val="8892A4"/>
-                </a:solidFill>
-                <a:latin typeface="Calibri" pitchFamily="34" charset="0"/>
-                <a:ea typeface="Calibri" pitchFamily="34" charset="-122"/>
-                <a:cs typeface="Calibri" pitchFamily="34" charset="-120"/>
-              </a:rPr>
-              <a:t>granular access control per endpoint</a:t>
-            </a:r>
-            <a:endParaRPr lang="en-US" sz="1100" dirty="0"/>
-          </a:p>
-        </p:txBody>
-      </p:sp>
-      <p:sp>
-        <p:nvSpPr>
-          <p:cNvPr id="21" name="Shape 19"/>
-          <p:cNvSpPr/>
-          <p:nvPr/>
-        </p:nvSpPr>
-        <p:spPr>
-          <a:xfrm>
-            <a:off x="3278124" y="3200400"/>
-            <a:ext cx="2587752" cy="1645920"/>
-          </a:xfrm>
-          <a:prstGeom prst="roundRect">
-            <a:avLst>
-              <a:gd name="adj" fmla="val 3889"/>
-            </a:avLst>
-          </a:prstGeom>
-          <a:solidFill>
-            <a:srgbClr val="1A1535"/>
-          </a:solidFill>
-          <a:ln w="12700">
-            <a:solidFill>
-              <a:srgbClr val="2A2050"/>
-            </a:solidFill>
-            <a:prstDash val="solid"/>
-          </a:ln>
-        </p:spPr>
-      </p:sp>
-      <p:sp>
-        <p:nvSpPr>
-          <p:cNvPr id="22" name="Shape 20"/>
-          <p:cNvSpPr/>
-          <p:nvPr/>
-        </p:nvSpPr>
-        <p:spPr>
-          <a:xfrm>
-            <a:off x="3461004" y="3438144"/>
-            <a:ext cx="320040" cy="54864"/>
-          </a:xfrm>
-          <a:prstGeom prst="rect">
-            <a:avLst/>
-          </a:prstGeom>
-          <a:solidFill>
-            <a:srgbClr val="6C5CE7"/>
-          </a:solidFill>
-          <a:ln/>
-        </p:spPr>
-      </p:sp>
-      <p:sp>
-        <p:nvSpPr>
-          <p:cNvPr id="23" name="Text 21"/>
-          <p:cNvSpPr/>
-          <p:nvPr/>
-        </p:nvSpPr>
-        <p:spPr>
-          <a:xfrm>
-            <a:off x="3461004" y="3584448"/>
-            <a:ext cx="2221992" cy="292608"/>
-          </a:xfrm>
-          <a:prstGeom prst="rect">
-            <a:avLst/>
-          </a:prstGeom>
-          <a:noFill/>
-          <a:ln/>
-        </p:spPr>
-        <p:txBody>
-          <a:bodyPr wrap="square" lIns="0" tIns="0" rIns="0" bIns="0" rtlCol="0" anchor="ctr"/>
-          <a:lstStyle/>
-          <a:p>
-            <a:pPr marL="0" indent="0">
-              <a:buNone/>
-            </a:pPr>
-            <a:r>
-              <a:rPr lang="en-US" sz="1400" b="1" dirty="0">
-                <a:solidFill>
-                  <a:srgbClr val="FFFFFF"/>
-                </a:solidFill>
-                <a:latin typeface="Calibri" pitchFamily="34" charset="0"/>
-                <a:ea typeface="Calibri" pitchFamily="34" charset="-122"/>
-                <a:cs typeface="Calibri" pitchFamily="34" charset="-120"/>
-              </a:rPr>
-              <a:t>Threat detection</a:t>
-            </a:r>
-            <a:endParaRPr lang="en-US" sz="1400" dirty="0"/>
-          </a:p>
-        </p:txBody>
-      </p:sp>
-      <p:sp>
-        <p:nvSpPr>
-          <p:cNvPr id="24" name="Text 22"/>
-          <p:cNvSpPr/>
-          <p:nvPr/>
-        </p:nvSpPr>
-        <p:spPr>
-          <a:xfrm>
-            <a:off x="3461004" y="3931920"/>
-            <a:ext cx="2221992" cy="731520"/>
-          </a:xfrm>
-          <a:prstGeom prst="rect">
-            <a:avLst/>
-          </a:prstGeom>
-          <a:noFill/>
-          <a:ln/>
-        </p:spPr>
-        <p:txBody>
-          <a:bodyPr wrap="square" lIns="0" tIns="0" rIns="0" bIns="0" rtlCol="0" anchor="ctr"/>
-          <a:lstStyle/>
-          <a:p>
-            <a:pPr marL="0" indent="0">
-              <a:buNone/>
-            </a:pPr>
-            <a:r>
-              <a:rPr lang="en-US" sz="1100" dirty="0">
-                <a:solidFill>
-                  <a:srgbClr val="8892A4"/>
-                </a:solidFill>
-                <a:latin typeface="Calibri" pitchFamily="34" charset="0"/>
-                <a:ea typeface="Calibri" pitchFamily="34" charset="-122"/>
-                <a:cs typeface="Calibri" pitchFamily="34" charset="-120"/>
-              </a:rPr>
-              <a:t>rate spikes and privilege probing auto-flagged</a:t>
-            </a:r>
-            <a:endParaRPr lang="en-US" sz="1100" dirty="0"/>
-          </a:p>
-        </p:txBody>
-      </p:sp>
-      <p:sp>
-        <p:nvSpPr>
-          <p:cNvPr id="25" name="Shape 23"/>
-          <p:cNvSpPr/>
-          <p:nvPr/>
-        </p:nvSpPr>
-        <p:spPr>
-          <a:xfrm>
-            <a:off x="6053328" y="3200400"/>
-            <a:ext cx="2587752" cy="1645920"/>
-          </a:xfrm>
-          <a:prstGeom prst="roundRect">
-            <a:avLst>
-              <a:gd name="adj" fmla="val 3889"/>
-            </a:avLst>
-          </a:prstGeom>
-          <a:solidFill>
-            <a:srgbClr val="1A1535"/>
-          </a:solidFill>
-          <a:ln w="12700">
-            <a:solidFill>
-              <a:srgbClr val="2A2050"/>
-            </a:solidFill>
-            <a:prstDash val="solid"/>
-          </a:ln>
-        </p:spPr>
-      </p:sp>
-      <p:sp>
-        <p:nvSpPr>
-          <p:cNvPr id="26" name="Shape 24"/>
-          <p:cNvSpPr/>
-          <p:nvPr/>
-        </p:nvSpPr>
-        <p:spPr>
-          <a:xfrm>
-            <a:off x="6236208" y="3438144"/>
-            <a:ext cx="320040" cy="54864"/>
-          </a:xfrm>
-          <a:prstGeom prst="rect">
-            <a:avLst/>
-          </a:prstGeom>
-          <a:solidFill>
-            <a:srgbClr val="6C5CE7"/>
-          </a:solidFill>
-          <a:ln/>
-        </p:spPr>
-      </p:sp>
-      <p:sp>
-        <p:nvSpPr>
-          <p:cNvPr id="27" name="Text 25"/>
-          <p:cNvSpPr/>
-          <p:nvPr/>
-        </p:nvSpPr>
-        <p:spPr>
-          <a:xfrm>
-            <a:off x="6236208" y="3584448"/>
-            <a:ext cx="2221992" cy="292608"/>
-          </a:xfrm>
-          <a:prstGeom prst="rect">
-            <a:avLst/>
-          </a:prstGeom>
-          <a:noFill/>
-          <a:ln/>
-        </p:spPr>
-        <p:txBody>
-          <a:bodyPr wrap="square" lIns="0" tIns="0" rIns="0" bIns="0" rtlCol="0" anchor="ctr"/>
-          <a:lstStyle/>
-          <a:p>
-            <a:pPr marL="0" indent="0">
-              <a:buNone/>
-            </a:pPr>
-            <a:r>
-              <a:rPr lang="en-US" sz="1400" b="1" dirty="0">
-                <a:solidFill>
-                  <a:srgbClr val="FFFFFF"/>
-                </a:solidFill>
-                <a:latin typeface="Calibri" pitchFamily="34" charset="0"/>
-                <a:ea typeface="Calibri" pitchFamily="34" charset="-122"/>
-                <a:cs typeface="Calibri" pitchFamily="34" charset="-120"/>
-              </a:rPr>
-              <a:t>Audit log + HTTPS</a:t>
-            </a:r>
-            <a:endParaRPr lang="en-US" sz="1400" dirty="0"/>
-          </a:p>
-        </p:txBody>
-      </p:sp>
-      <p:sp>
-        <p:nvSpPr>
-          <p:cNvPr id="28" name="Text 26"/>
-          <p:cNvSpPr/>
-          <p:nvPr/>
-        </p:nvSpPr>
-        <p:spPr>
-          <a:xfrm>
-            <a:off x="6236208" y="3931920"/>
-            <a:ext cx="2221992" cy="731520"/>
-          </a:xfrm>
-          <a:prstGeom prst="rect">
-            <a:avLst/>
-          </a:prstGeom>
-          <a:noFill/>
-          <a:ln/>
-        </p:spPr>
-        <p:txBody>
-          <a:bodyPr wrap="square" lIns="0" tIns="0" rIns="0" bIns="0" rtlCol="0" anchor="ctr"/>
-          <a:lstStyle/>
-          <a:p>
-            <a:pPr marL="0" indent="0">
-              <a:buNone/>
-            </a:pPr>
-            <a:r>
-              <a:rPr lang="en-US" sz="1100" dirty="0">
-                <a:solidFill>
-                  <a:srgbClr val="8892A4"/>
-                </a:solidFill>
-                <a:latin typeface="Calibri" pitchFamily="34" charset="0"/>
-                <a:ea typeface="Calibri" pitchFamily="34" charset="-122"/>
-                <a:cs typeface="Calibri" pitchFamily="34" charset="-120"/>
-              </a:rPr>
-              <a:t>every authenticated action recorded</a:t>
-            </a:r>
-            <a:endParaRPr lang="en-US" sz="1100" dirty="0"/>
           </a:p>
         </p:txBody>
       </p:sp>
